--- a/docs/SHOP-IMT-presentation.pptx
+++ b/docs/SHOP-IMT-presentation.pptx
@@ -10,11 +10,13 @@
     <p:sldId id="258" r:id="rId4"/>
     <p:sldId id="259" r:id="rId5"/>
     <p:sldId id="260" r:id="rId6"/>
+    <p:sldId id="267" r:id="rId18"/>
     <p:sldId id="261" r:id="rId7"/>
     <p:sldId id="262" r:id="rId8"/>
     <p:sldId id="263" r:id="rId9"/>
     <p:sldId id="264" r:id="rId10"/>
     <p:sldId id="265" r:id="rId11"/>
+    <p:sldId id="268" r:id="rId19"/>
     <p:sldId id="266" r:id="rId12"/>
   </p:sldIdLst>
   <p:notesMasterIdLst>
@@ -642,14 +644,28 @@
           <a:lstStyle/>
           <a:p>
             <a:r>
-              <a:rPr lang="en-US" dirty="0"/>
-              <a:t>[Félix]
-Contrainte : coût zéro, tenue avec deux environnements.
-DynamoDB est en mode provisionné, seul mode avec une offre gratuite permanente : 5 unités en prod, 1 en dev, soit 24 des 25 gratuites. Les Lambdas tournent sur ARM. Translate ne traduit chaque nom qu'une fois.
-Pour Kafka : Amazon MSK est facturé dès la première heure. DynamoDB Streams donne le même modèle de flux ordonné et rejouable, gratuitement ; MSK reste la cible pour un vrai volume.
-Transition : « Gabin, et la commande du jury ? »</a:t>
-            </a:r>
-            <a:endParaRPr lang="en-US" dirty="0"/>
+              <a:t>[Félix]</a:t>
+            </a:r>
+          </a:p>
+          <a:p>
+            <a:r>
+              <a:t>Contrainte : coût zéro, tenue avec deux environnements.</a:t>
+            </a:r>
+          </a:p>
+          <a:p>
+            <a:r>
+              <a:t>DynamoDB est en mode provisionné, seul mode avec une offre gratuite permanente : 5 unités en prod, 1 en dev, soit 24 des 25 gratuites. Les Lambdas tournent sur ARM. Translate ne traduit chaque nom qu'une fois.</a:t>
+            </a:r>
+          </a:p>
+          <a:p>
+            <a:r>
+              <a:t>Pour Kafka : Amazon MSK est facturé dès la première heure. Le serverless utilise DynamoDB Streams, même modèle de flux ordonné et rejouable, gratuitement ; la solution EC2 fait tourner Apache Kafka sur une instance de l'offre gratuite. MSK reste la cible pour un vrai volume.</a:t>
+            </a:r>
+          </a:p>
+          <a:p>
+            <a:r>
+              <a:t>Transition : « Gabin, et la commande du jury ? »</a:t>
+            </a:r>
           </a:p>
         </p:txBody>
       </p:sp>
@@ -734,14 +750,28 @@
           <a:lstStyle/>
           <a:p>
             <a:r>
-              <a:rPr lang="en-US" dirty="0"/>
-              <a:t>[Gabin, puis tous]
-Gabin boucle la boucle : se tourner vers le membre du jury qui a commandé. « Au début, vous avez commandé. Ouvrez votre boîte mail. » Montrer sur l'écran la page de suivi : livrée (ou en livraison). « Pendant dix minutes, votre commande a traversé dix-sept services AWS, et personne n'a touché un serveur. »
-Puis chacun une phrase : Louison sur le moteur événementiel et les rôles, Félix sur Terraform et le zéro euro, Gabin sur la suite EC2.
-Gabin conclut : « 23 h 47, trois cents commandes : on est prêts. Merci. Vos questions ? »
-Services : CloudFront, S3, API Gateway, Lambda, DynamoDB, SNS, SQS, Step Functions, SES, Cognito, Translate, EventBridge Scheduler, CloudWatch, CloudTrail, IAM, SSM Parameter Store, Budgets.</a:t>
-            </a:r>
-            <a:endParaRPr lang="en-US" dirty="0"/>
+              <a:t>[Gabin, puis tous]</a:t>
+            </a:r>
+          </a:p>
+          <a:p>
+            <a:r>
+              <a:t>Gabin boucle la boucle : se tourner vers le membre du jury qui a commandé. « Au début, vous avez commandé. Ouvrez votre boîte mail. » Montrer sur l'écran la page de suivi : livrée (ou en livraison). « Pendant dix minutes, votre commande a traversé les services AWS de la solution serverless, et personne n'a touché un serveur. »</a:t>
+            </a:r>
+          </a:p>
+          <a:p>
+            <a:r>
+              <a:t>Puis chacun une phrase : Louison sur le moteur événementiel et les rôles, Félix sur Terraform et le zéro euro, Gabin sur la solution EC2.</a:t>
+            </a:r>
+          </a:p>
+          <a:p>
+            <a:r>
+              <a:t>Gabin conclut : « 23 h 47, trois cents commandes : on est prêts. Merci. Vos questions ? »</a:t>
+            </a:r>
+          </a:p>
+          <a:p>
+            <a:r>
+              <a:t>Services (22) : CloudFront, S3, API Gateway, Lambda, DynamoDB, SNS, SQS, Step Functions, SES, Cognito, Translate, EventBridge Scheduler, CloudWatch, CloudTrail, IAM, SSM, Budgets, et pour la solution EC2 : EC2, Auto Scaling, Elastic Load Balancing, RDS, VPC.</a:t>
+            </a:r>
           </a:p>
         </p:txBody>
       </p:sp>
@@ -774,6 +804,201 @@
         <p14:creationId xmlns:p14="http://schemas.microsoft.com/office/powerpoint/2010/main" val="1024086991"/>
       </p:ext>
     </p:extLst>
+  </p:cSld>
+  <p:clrMapOvr>
+    <a:masterClrMapping/>
+  </p:clrMapOvr>
+</p:notes>
+</file>
+
+<file path=ppt/notesSlides/notesSlide12.xml><?xml version="1.0" encoding="utf-8"?>
+<p:notes xmlns:a="http://schemas.openxmlformats.org/drawingml/2006/main" xmlns:p="http://schemas.openxmlformats.org/presentationml/2006/main" xmlns:r="http://schemas.openxmlformats.org/officeDocument/2006/relationships">
+  <p:cSld>
+    <p:spTree>
+      <p:nvGrpSpPr>
+        <p:cNvPr id="1" name=""/>
+        <p:cNvGrpSpPr/>
+        <p:nvPr/>
+      </p:nvGrpSpPr>
+      <p:grpSpPr>
+        <a:xfrm>
+          <a:off x="0" y="0"/>
+          <a:ext cx="0" cy="0"/>
+          <a:chOff x="0" y="0"/>
+          <a:chExt cx="0" cy="0"/>
+        </a:xfrm>
+      </p:grpSpPr>
+      <p:sp>
+        <p:nvSpPr>
+          <p:cNvPr id="2" name="Slide Image Placeholder 1"/>
+          <p:cNvSpPr>
+            <a:spLocks noGrp="1"/>
+          </p:cNvSpPr>
+          <p:nvPr>
+            <p:ph type="sldImg" idx="2"/>
+          </p:nvPr>
+        </p:nvSpPr>
+        <p:spPr/>
+      </p:sp>
+      <p:sp>
+        <p:nvSpPr>
+          <p:cNvPr id="3" name="Notes Placeholder 2"/>
+          <p:cNvSpPr>
+            <a:spLocks noGrp="1"/>
+          </p:cNvSpPr>
+          <p:nvPr>
+            <p:ph type="body" idx="3" sz="quarter"/>
+          </p:nvPr>
+        </p:nvSpPr>
+        <p:spPr/>
+        <p:txBody>
+          <a:bodyPr/>
+          <a:lstStyle/>
+          <a:p>
+            <a:r>
+              <a:t>[Louison]</a:t>
+            </a:r>
+          </a:p>
+          <a:p>
+            <a:r>
+              <a:t>« La consigne demandait aussi une version sur machines virtuelles. Elle tourne en même temps que le serverless, avec le même site et les mêmes e-mails. »</a:t>
+            </a:r>
+          </a:p>
+          <a:p>
+            <a:r>
+              <a:t>CloudFront ajoute un en-tête secret : l'ALB refuse toute requête qui ne vient pas de CloudFront. L'ALB répartit sur un groupe Auto Scaling de un à deux serveurs web t3.micro, sur deux zones ; au-delà de 60 % de CPU, un deuxième serveur démarre.</a:t>
+            </a:r>
+          </a:p>
+          <a:p>
+            <a:r>
+              <a:t>La commande est une transaction MySQL sur RDS : SELECT FOR UPDATE verrouille le stock, même si deux serveurs reçoivent une commande au même instant.</a:t>
+            </a:r>
+          </a:p>
+          <a:p>
+            <a:r>
+              <a:t>Le serveur web publie l'événement sur SNS, qui le pousse dans une file SQS. Le serveur de traitement la lit, envoie la confirmation SES et simule l'expédition.</a:t>
+            </a:r>
+          </a:p>
+          <a:p>
+            <a:r>
+              <a:t>Et ici, Kafka est un vrai broker Apache Kafka, sur le serveur de traitement : deux groupes de consommateurs lisent le même flux, l'un archive chaque événement dans S3, l'autre envoie les e-mails de suivi.</a:t>
+            </a:r>
+          </a:p>
+          <a:p>
+            <a:r>
+              <a:t>Pas de SSH : on entre sur les serveurs par Session Manager, et le mot de passe de la base est dans SSM, chiffré.</a:t>
+            </a:r>
+          </a:p>
+        </p:txBody>
+      </p:sp>
+      <p:sp>
+        <p:nvSpPr>
+          <p:cNvPr id="4" name="Slide Number Placeholder 3"/>
+          <p:cNvSpPr>
+            <a:spLocks noGrp="1"/>
+          </p:cNvSpPr>
+          <p:nvPr>
+            <p:ph type="sldNum" idx="5" sz="quarter"/>
+          </p:nvPr>
+        </p:nvSpPr>
+        <p:spPr/>
+      </p:sp>
+    </p:spTree>
+  </p:cSld>
+  <p:clrMapOvr>
+    <a:masterClrMapping/>
+  </p:clrMapOvr>
+</p:notes>
+</file>
+
+<file path=ppt/notesSlides/notesSlide13.xml><?xml version="1.0" encoding="utf-8"?>
+<p:notes xmlns:a="http://schemas.openxmlformats.org/drawingml/2006/main" xmlns:p="http://schemas.openxmlformats.org/presentationml/2006/main" xmlns:r="http://schemas.openxmlformats.org/officeDocument/2006/relationships">
+  <p:cSld>
+    <p:spTree>
+      <p:nvGrpSpPr>
+        <p:cNvPr id="1" name=""/>
+        <p:cNvGrpSpPr/>
+        <p:nvPr/>
+      </p:nvGrpSpPr>
+      <p:grpSpPr>
+        <a:xfrm>
+          <a:off x="0" y="0"/>
+          <a:ext cx="0" cy="0"/>
+          <a:chOff x="0" y="0"/>
+          <a:chExt cx="0" cy="0"/>
+        </a:xfrm>
+      </p:grpSpPr>
+      <p:sp>
+        <p:nvSpPr>
+          <p:cNvPr id="2" name="Slide Image Placeholder 1"/>
+          <p:cNvSpPr>
+            <a:spLocks noGrp="1"/>
+          </p:cNvSpPr>
+          <p:nvPr>
+            <p:ph type="sldImg" idx="2"/>
+          </p:nvPr>
+        </p:nvSpPr>
+        <p:spPr/>
+      </p:sp>
+      <p:sp>
+        <p:nvSpPr>
+          <p:cNvPr id="3" name="Notes Placeholder 2"/>
+          <p:cNvSpPr>
+            <a:spLocks noGrp="1"/>
+          </p:cNvSpPr>
+          <p:nvPr>
+            <p:ph type="body" idx="3" sz="quarter"/>
+          </p:nvPr>
+        </p:nvSpPr>
+        <p:spPr/>
+        <p:txBody>
+          <a:bodyPr/>
+          <a:lstStyle/>
+          <a:p>
+            <a:r>
+              <a:t>[Gabin]</a:t>
+            </a:r>
+          </a:p>
+          <a:p>
+            <a:r>
+              <a:t>« Même boutique, deux façons de la construire. »</a:t>
+            </a:r>
+          </a:p>
+          <a:p>
+            <a:r>
+              <a:t>Serverless : on ne paie qu'à l'usage, AWS gère la montée en charge et la haute disponibilité, il n'y a rien à mettre à jour.</a:t>
+            </a:r>
+          </a:p>
+          <a:p>
+            <a:r>
+              <a:t>EC2 : on choisit et on surveille nos serveurs. La haute disponibilité, c'est nous qui la construisons : ALB et Auto Scaling sur deux zones, contrôle de santé, récupération automatique du serveur de traitement.</a:t>
+            </a:r>
+          </a:p>
+          <a:p>
+            <a:r>
+              <a:t>En échange, on a une base relationnelle classique et un vrai Kafka. Coût : une soixantaine de centimes par jour, donc on l'allume pour la démo et on la coupe ensuite, en changeant une seule clé dans SSM.</a:t>
+            </a:r>
+          </a:p>
+          <a:p>
+            <a:r>
+              <a:t>Transition : « Et maintenant, la commande du jury. »</a:t>
+            </a:r>
+          </a:p>
+        </p:txBody>
+      </p:sp>
+      <p:sp>
+        <p:nvSpPr>
+          <p:cNvPr id="4" name="Slide Number Placeholder 3"/>
+          <p:cNvSpPr>
+            <a:spLocks noGrp="1"/>
+          </p:cNvSpPr>
+          <p:nvPr>
+            <p:ph type="sldNum" idx="5" sz="quarter"/>
+          </p:nvPr>
+        </p:nvSpPr>
+        <p:spPr/>
+      </p:sp>
+    </p:spTree>
   </p:cSld>
   <p:clrMapOvr>
     <a:masterClrMapping/>
@@ -826,13 +1051,23 @@
           <a:lstStyle/>
           <a:p>
             <a:r>
-              <a:rPr lang="en-US" dirty="0"/>
-              <a:t>[Gabin]
-« Voici SHOP'IMT, la boutique des étudiants de l'IMT Nord Europe. »
-« Trois promesses : aucun serveur à gérer, aucune commande perdue, zéro euro par mois. Tout est décrit en Terraform et tourne en deux environnements, dev et prod. »
-Présenter l'équipe en une phrase : « Louison va vous montrer le moteur, Félix la vitrine et l'usine, et moi je vous ramène votre commande à la fin. »</a:t>
-            </a:r>
-            <a:endParaRPr lang="en-US" dirty="0"/>
+              <a:t>[Gabin]</a:t>
+            </a:r>
+          </a:p>
+          <a:p>
+            <a:r>
+              <a:t>« Voici SHOP'IMT, la boutique des étudiants de l'IMT Nord Europe. »</a:t>
+            </a:r>
+          </a:p>
+          <a:p>
+            <a:r>
+              <a:t>« Deux solutions qui tournent en même temps : une serverless, sans aucun serveur à gérer, et une sur des machines virtuelles EC2. Aucune commande perdue, zéro euro par mois pour le serverless. Tout est décrit en Terraform et tourne en deux environnements, dev et prod. »</a:t>
+            </a:r>
+          </a:p>
+          <a:p>
+            <a:r>
+              <a:t>Présenter l'équipe en une phrase : « Louison va vous montrer le moteur, Félix la vitrine et l'usine, et moi je vous ramène votre commande à la fin. »</a:t>
+            </a:r>
           </a:p>
         </p:txBody>
       </p:sp>
@@ -917,14 +1152,28 @@
           <a:lstStyle/>
           <a:p>
             <a:r>
-              <a:rPr lang="en-US" dirty="0"/>
-              <a:t>[Gabin]
-Le sujet demandait un catalogue web, la commande, une confirmation en temps réel, l'audit et un traitement interne, plus du streaming type Kafka.
-Pour chacune, un service AWS managé. Point clé : les prix sont recalculés côté serveur et le stock est réservé dans une transaction, donc on ne peut ni tricher sur le prix ni vendre un article épuisé.
-Pour Kafka, DynamoDB Streams : même principe de journal d'événements ordonné, mais gratuit.
-Transition : « Louison, qu'est-ce qui arrive à la commande du jury, là, maintenant ? »</a:t>
-            </a:r>
-            <a:endParaRPr lang="en-US" dirty="0"/>
+              <a:t>[Gabin]</a:t>
+            </a:r>
+          </a:p>
+          <a:p>
+            <a:r>
+              <a:t>Le sujet demandait un catalogue web, la commande, une confirmation en temps réel, l'audit et un traitement interne, plus du streaming type Kafka.</a:t>
+            </a:r>
+          </a:p>
+          <a:p>
+            <a:r>
+              <a:t>Pour chacune, un service AWS managé. Point clé : les prix sont recalculés côté serveur et le stock est réservé dans une transaction, donc on ne peut ni tricher sur le prix ni vendre un article épuisé.</a:t>
+            </a:r>
+          </a:p>
+          <a:p>
+            <a:r>
+              <a:t>Pour Kafka : côté serverless, DynamoDB Streams, même principe de journal d'événements ordonné mais gratuit ; côté EC2, un vrai broker Apache Kafka sur une instance t3.micro.</a:t>
+            </a:r>
+          </a:p>
+          <a:p>
+            <a:r>
+              <a:t>Transition : « Louison, qu'est-ce qui arrive à la commande du jury, là, maintenant ? »</a:t>
+            </a:r>
           </a:p>
         </p:txBody>
       </p:sp>
@@ -2562,6 +2811,1027 @@
 
 <file path=ppt/slides/slide10.xml><?xml version="1.0" encoding="utf-8"?>
 <p:sld xmlns:a="http://schemas.openxmlformats.org/drawingml/2006/main" xmlns:r="http://schemas.openxmlformats.org/officeDocument/2006/relationships" xmlns:p="http://schemas.openxmlformats.org/presentationml/2006/main">
+  <p:cSld name="Slide 9">
+    <p:spTree>
+      <p:nvGrpSpPr>
+        <p:cNvPr id="1" name=""/>
+        <p:cNvGrpSpPr/>
+        <p:nvPr/>
+      </p:nvGrpSpPr>
+      <p:grpSpPr>
+        <a:xfrm>
+          <a:off x="0" y="0"/>
+          <a:ext cx="0" cy="0"/>
+          <a:chOff x="0" y="0"/>
+          <a:chExt cx="0" cy="0"/>
+        </a:xfrm>
+      </p:grpSpPr>
+      <p:sp>
+        <p:nvSpPr>
+          <p:cNvPr id="2" name="orateur-193"/>
+          <p:cNvSpPr/>
+          <p:nvPr/>
+        </p:nvSpPr>
+        <p:spPr>
+          <a:xfrm>
+            <a:off x="10497312" y="109728"/>
+            <a:ext cx="868680" cy="292608"/>
+          </a:xfrm>
+          <a:prstGeom prst="roundRect">
+            <a:avLst>
+              <a:gd name="adj" fmla="val 50000"/>
+            </a:avLst>
+          </a:prstGeom>
+          <a:solidFill>
+            <a:schemeClr val="accent3"/>
+          </a:solidFill>
+          <a:ln w="12700">
+            <a:solidFill>
+              <a:schemeClr val="accent3"/>
+            </a:solidFill>
+            <a:prstDash val="solid"/>
+          </a:ln>
+        </p:spPr>
+      </p:sp>
+      <p:sp>
+        <p:nvSpPr>
+          <p:cNvPr id="3" name="orateur-texte-194"/>
+          <p:cNvSpPr txBox="1"/>
+          <p:nvPr/>
+        </p:nvSpPr>
+        <p:spPr>
+          <a:xfrm>
+            <a:off x="10497312" y="109728"/>
+            <a:ext cx="868680" cy="292608"/>
+          </a:xfrm>
+          <a:prstGeom prst="rect">
+            <a:avLst/>
+          </a:prstGeom>
+          <a:noFill/>
+          <a:ln/>
+        </p:spPr>
+        <p:txBody>
+          <a:bodyPr wrap="square" lIns="0" tIns="0" rIns="0" bIns="0" rtlCol="0" anchor="ctr"/>
+          <a:lstStyle/>
+          <a:p>
+            <a:pPr algn="ctr" indent="0" marL="0">
+              <a:buNone/>
+            </a:pPr>
+            <a:r>
+              <a:rPr lang="en-US" sz="1100" b="1" dirty="0">
+                <a:solidFill>
+                  <a:schemeClr val="bg1"/>
+                </a:solidFill>
+              </a:rPr>
+              <a:t>Félix</a:t>
+            </a:r>
+            <a:endParaRPr lang="en-US" sz="1100" dirty="0"/>
+          </a:p>
+        </p:txBody>
+      </p:sp>
+      <p:sp>
+        <p:nvSpPr>
+          <p:cNvPr id="4" name="Text 0"/>
+          <p:cNvSpPr/>
+          <p:nvPr>
+            <p:ph idx="100" type="title" hasCustomPrompt="1"/>
+          </p:nvPr>
+        </p:nvSpPr>
+        <p:spPr>
+          <a:xfrm>
+            <a:off x="548640" y="365760"/>
+            <a:ext cx="11064240" cy="777240"/>
+          </a:xfrm>
+          <a:prstGeom prst="rect">
+            <a:avLst/>
+          </a:prstGeom>
+          <a:noFill/>
+          <a:ln/>
+        </p:spPr>
+        <p:txBody>
+          <a:bodyPr wrap="square" lIns="0" tIns="0" rIns="0" bIns="0" rtlCol="0" anchor="ctr"/>
+          <a:lstStyle/>
+          <a:p>
+            <a:pPr algn="l" indent="0" marL="0">
+              <a:buNone/>
+            </a:pPr>
+            <a:r>
+              <a:rPr lang="en-US" sz="3000" b="1" dirty="0">
+                <a:solidFill>
+                  <a:schemeClr val="tx1"/>
+                </a:solidFill>
+              </a:rPr>
+              <a:t>De git push à la prod, sans clé d'accès</a:t>
+            </a:r>
+            <a:endParaRPr lang="en-US" sz="3000" dirty="0"/>
+          </a:p>
+        </p:txBody>
+      </p:sp>
+      <p:sp>
+        <p:nvSpPr>
+          <p:cNvPr id="5" name="service-195"/>
+          <p:cNvSpPr/>
+          <p:nvPr/>
+        </p:nvSpPr>
+        <p:spPr>
+          <a:xfrm>
+            <a:off x="548640" y="1463040"/>
+            <a:ext cx="1965960" cy="868680"/>
+          </a:xfrm>
+          <a:prstGeom prst="roundRect">
+            <a:avLst>
+              <a:gd name="adj" fmla="val 8421"/>
+            </a:avLst>
+          </a:prstGeom>
+          <a:solidFill>
+            <a:schemeClr val="tx1"/>
+          </a:solidFill>
+          <a:ln w="15875">
+            <a:solidFill>
+              <a:schemeClr val="tx1"/>
+            </a:solidFill>
+            <a:prstDash val="solid"/>
+          </a:ln>
+        </p:spPr>
+      </p:sp>
+      <p:sp>
+        <p:nvSpPr>
+          <p:cNvPr id="6" name="service-texte-196"/>
+          <p:cNvSpPr txBox="1"/>
+          <p:nvPr/>
+        </p:nvSpPr>
+        <p:spPr>
+          <a:xfrm>
+            <a:off x="548640" y="1463040"/>
+            <a:ext cx="1965960" cy="868680"/>
+          </a:xfrm>
+          <a:prstGeom prst="rect">
+            <a:avLst/>
+          </a:prstGeom>
+          <a:noFill/>
+          <a:ln/>
+        </p:spPr>
+        <p:txBody>
+          <a:bodyPr wrap="square" lIns="508" tIns="508" rIns="508" bIns="508" rtlCol="0" anchor="ctr"/>
+          <a:lstStyle/>
+          <a:p>
+            <a:pPr algn="ctr" indent="0" marL="0">
+              <a:buNone/>
+            </a:pPr>
+            <a:r>
+              <a:rPr lang="en-US" sz="1200" b="1" dirty="0">
+                <a:solidFill>
+                  <a:schemeClr val="bg1"/>
+                </a:solidFill>
+              </a:rPr>
+              <a:t>git push</a:t>
+            </a:r>
+            <a:endParaRPr lang="en-US" sz="1200" dirty="0"/>
+          </a:p>
+          <a:p>
+            <a:pPr algn="ctr" indent="0" marL="0">
+              <a:buNone/>
+            </a:pPr>
+            <a:r>
+              <a:rPr lang="en-US" sz="1000" dirty="0">
+                <a:solidFill>
+                  <a:schemeClr val="bg1"/>
+                </a:solidFill>
+              </a:rPr>
+              <a:t>branche dev ou main</a:t>
+            </a:r>
+            <a:endParaRPr lang="en-US" sz="1200" dirty="0"/>
+          </a:p>
+        </p:txBody>
+      </p:sp>
+      <p:sp>
+        <p:nvSpPr>
+          <p:cNvPr id="7" name="fleche-197"/>
+          <p:cNvSpPr/>
+          <p:nvPr/>
+        </p:nvSpPr>
+        <p:spPr>
+          <a:xfrm>
+            <a:off x="2514600" y="1897380"/>
+            <a:ext cx="310896" cy="914"/>
+          </a:xfrm>
+          <a:prstGeom prst="line">
+            <a:avLst/>
+          </a:prstGeom>
+          <a:noFill/>
+          <a:ln w="19050">
+            <a:solidFill>
+              <a:schemeClr val="accent6"/>
+            </a:solidFill>
+            <a:prstDash val="solid"/>
+            <a:tailEnd type="triangle"/>
+          </a:ln>
+        </p:spPr>
+      </p:sp>
+      <p:sp>
+        <p:nvSpPr>
+          <p:cNvPr id="8" name="service-198"/>
+          <p:cNvSpPr/>
+          <p:nvPr/>
+        </p:nvSpPr>
+        <p:spPr>
+          <a:xfrm>
+            <a:off x="2825496" y="1463040"/>
+            <a:ext cx="1965960" cy="868680"/>
+          </a:xfrm>
+          <a:prstGeom prst="roundRect">
+            <a:avLst>
+              <a:gd name="adj" fmla="val 8421"/>
+            </a:avLst>
+          </a:prstGeom>
+          <a:solidFill>
+            <a:schemeClr val="accent5"/>
+          </a:solidFill>
+          <a:ln w="15875">
+            <a:solidFill>
+              <a:schemeClr val="accent1"/>
+            </a:solidFill>
+            <a:prstDash val="solid"/>
+          </a:ln>
+        </p:spPr>
+      </p:sp>
+      <p:sp>
+        <p:nvSpPr>
+          <p:cNvPr id="9" name="service-texte-199"/>
+          <p:cNvSpPr txBox="1"/>
+          <p:nvPr/>
+        </p:nvSpPr>
+        <p:spPr>
+          <a:xfrm>
+            <a:off x="2825496" y="1463040"/>
+            <a:ext cx="1965960" cy="868680"/>
+          </a:xfrm>
+          <a:prstGeom prst="rect">
+            <a:avLst/>
+          </a:prstGeom>
+          <a:noFill/>
+          <a:ln/>
+        </p:spPr>
+        <p:txBody>
+          <a:bodyPr wrap="square" lIns="508" tIns="508" rIns="508" bIns="508" rtlCol="0" anchor="ctr"/>
+          <a:lstStyle/>
+          <a:p>
+            <a:pPr algn="ctr" indent="0" marL="0">
+              <a:buNone/>
+            </a:pPr>
+            <a:r>
+              <a:rPr lang="en-US" sz="1200" b="1" dirty="0">
+                <a:solidFill>
+                  <a:schemeClr val="tx1"/>
+                </a:solidFill>
+              </a:rPr>
+              <a:t>GitHub Actions</a:t>
+            </a:r>
+            <a:endParaRPr lang="en-US" sz="1200" dirty="0"/>
+          </a:p>
+          <a:p>
+            <a:pPr algn="ctr" indent="0" marL="0">
+              <a:buNone/>
+            </a:pPr>
+            <a:r>
+              <a:rPr lang="en-US" sz="1000" dirty="0">
+                <a:solidFill>
+                  <a:schemeClr val="tx1"/>
+                </a:solidFill>
+              </a:rPr>
+              <a:t>tests, lint, build</a:t>
+            </a:r>
+            <a:endParaRPr lang="en-US" sz="1200" dirty="0"/>
+          </a:p>
+        </p:txBody>
+      </p:sp>
+      <p:sp>
+        <p:nvSpPr>
+          <p:cNvPr id="10" name="fleche-200"/>
+          <p:cNvSpPr/>
+          <p:nvPr/>
+        </p:nvSpPr>
+        <p:spPr>
+          <a:xfrm>
+            <a:off x="4791456" y="1897380"/>
+            <a:ext cx="310896" cy="914"/>
+          </a:xfrm>
+          <a:prstGeom prst="line">
+            <a:avLst/>
+          </a:prstGeom>
+          <a:noFill/>
+          <a:ln w="19050">
+            <a:solidFill>
+              <a:schemeClr val="accent6"/>
+            </a:solidFill>
+            <a:prstDash val="solid"/>
+            <a:tailEnd type="triangle"/>
+          </a:ln>
+        </p:spPr>
+      </p:sp>
+      <p:sp>
+        <p:nvSpPr>
+          <p:cNvPr id="11" name="service-201"/>
+          <p:cNvSpPr/>
+          <p:nvPr/>
+        </p:nvSpPr>
+        <p:spPr>
+          <a:xfrm>
+            <a:off x="5102352" y="1463040"/>
+            <a:ext cx="1965960" cy="868680"/>
+          </a:xfrm>
+          <a:prstGeom prst="roundRect">
+            <a:avLst>
+              <a:gd name="adj" fmla="val 8421"/>
+            </a:avLst>
+          </a:prstGeom>
+          <a:solidFill>
+            <a:schemeClr val="accent5"/>
+          </a:solidFill>
+          <a:ln w="15875">
+            <a:solidFill>
+              <a:schemeClr val="accent1"/>
+            </a:solidFill>
+            <a:prstDash val="solid"/>
+          </a:ln>
+        </p:spPr>
+      </p:sp>
+      <p:sp>
+        <p:nvSpPr>
+          <p:cNvPr id="12" name="service-texte-202"/>
+          <p:cNvSpPr txBox="1"/>
+          <p:nvPr/>
+        </p:nvSpPr>
+        <p:spPr>
+          <a:xfrm>
+            <a:off x="5102352" y="1463040"/>
+            <a:ext cx="1965960" cy="868680"/>
+          </a:xfrm>
+          <a:prstGeom prst="rect">
+            <a:avLst/>
+          </a:prstGeom>
+          <a:noFill/>
+          <a:ln/>
+        </p:spPr>
+        <p:txBody>
+          <a:bodyPr wrap="square" lIns="508" tIns="508" rIns="508" bIns="508" rtlCol="0" anchor="ctr"/>
+          <a:lstStyle/>
+          <a:p>
+            <a:pPr algn="ctr" indent="0" marL="0">
+              <a:buNone/>
+            </a:pPr>
+            <a:r>
+              <a:rPr lang="en-US" sz="1200" b="1" dirty="0">
+                <a:solidFill>
+                  <a:schemeClr val="tx1"/>
+                </a:solidFill>
+              </a:rPr>
+              <a:t>terraform plan</a:t>
+            </a:r>
+            <a:endParaRPr lang="en-US" sz="1200" dirty="0"/>
+          </a:p>
+          <a:p>
+            <a:pPr algn="ctr" indent="0" marL="0">
+              <a:buNone/>
+            </a:pPr>
+            <a:r>
+              <a:rPr lang="en-US" sz="1000" dirty="0">
+                <a:solidFill>
+                  <a:schemeClr val="tx1"/>
+                </a:solidFill>
+              </a:rPr>
+              <a:t>affiché dans la PR</a:t>
+            </a:r>
+            <a:endParaRPr lang="en-US" sz="1200" dirty="0"/>
+          </a:p>
+        </p:txBody>
+      </p:sp>
+      <p:sp>
+        <p:nvSpPr>
+          <p:cNvPr id="13" name="fleche-203"/>
+          <p:cNvSpPr/>
+          <p:nvPr/>
+        </p:nvSpPr>
+        <p:spPr>
+          <a:xfrm>
+            <a:off x="7068312" y="1897380"/>
+            <a:ext cx="310896" cy="914"/>
+          </a:xfrm>
+          <a:prstGeom prst="line">
+            <a:avLst/>
+          </a:prstGeom>
+          <a:noFill/>
+          <a:ln w="19050">
+            <a:solidFill>
+              <a:schemeClr val="accent6"/>
+            </a:solidFill>
+            <a:prstDash val="solid"/>
+            <a:tailEnd type="triangle"/>
+          </a:ln>
+        </p:spPr>
+      </p:sp>
+      <p:sp>
+        <p:nvSpPr>
+          <p:cNvPr id="14" name="service-204"/>
+          <p:cNvSpPr/>
+          <p:nvPr/>
+        </p:nvSpPr>
+        <p:spPr>
+          <a:xfrm>
+            <a:off x="7379208" y="1463040"/>
+            <a:ext cx="1965960" cy="868680"/>
+          </a:xfrm>
+          <a:prstGeom prst="roundRect">
+            <a:avLst>
+              <a:gd name="adj" fmla="val 8421"/>
+            </a:avLst>
+          </a:prstGeom>
+          <a:solidFill>
+            <a:schemeClr val="tx1"/>
+          </a:solidFill>
+          <a:ln w="15875">
+            <a:solidFill>
+              <a:schemeClr val="tx1"/>
+            </a:solidFill>
+            <a:prstDash val="solid"/>
+          </a:ln>
+        </p:spPr>
+      </p:sp>
+      <p:sp>
+        <p:nvSpPr>
+          <p:cNvPr id="15" name="service-texte-205"/>
+          <p:cNvSpPr txBox="1"/>
+          <p:nvPr/>
+        </p:nvSpPr>
+        <p:spPr>
+          <a:xfrm>
+            <a:off x="7379208" y="1463040"/>
+            <a:ext cx="1965960" cy="868680"/>
+          </a:xfrm>
+          <a:prstGeom prst="rect">
+            <a:avLst/>
+          </a:prstGeom>
+          <a:noFill/>
+          <a:ln/>
+        </p:spPr>
+        <p:txBody>
+          <a:bodyPr wrap="square" lIns="508" tIns="508" rIns="508" bIns="508" rtlCol="0" anchor="ctr"/>
+          <a:lstStyle/>
+          <a:p>
+            <a:pPr algn="ctr" indent="0" marL="0">
+              <a:buNone/>
+            </a:pPr>
+            <a:r>
+              <a:rPr lang="en-US" sz="1200" b="1" dirty="0">
+                <a:solidFill>
+                  <a:schemeClr val="bg1"/>
+                </a:solidFill>
+              </a:rPr>
+              <a:t>IAM + OIDC</a:t>
+            </a:r>
+            <a:endParaRPr lang="en-US" sz="1200" dirty="0"/>
+          </a:p>
+          <a:p>
+            <a:pPr algn="ctr" indent="0" marL="0">
+              <a:buNone/>
+            </a:pPr>
+            <a:r>
+              <a:rPr lang="en-US" sz="1000" dirty="0">
+                <a:solidFill>
+                  <a:schemeClr val="bg1"/>
+                </a:solidFill>
+              </a:rPr>
+              <a:t>identifiants d'1 h</a:t>
+            </a:r>
+            <a:endParaRPr lang="en-US" sz="1200" dirty="0"/>
+          </a:p>
+        </p:txBody>
+      </p:sp>
+      <p:sp>
+        <p:nvSpPr>
+          <p:cNvPr id="16" name="fleche-206"/>
+          <p:cNvSpPr/>
+          <p:nvPr/>
+        </p:nvSpPr>
+        <p:spPr>
+          <a:xfrm>
+            <a:off x="9345168" y="1897380"/>
+            <a:ext cx="310896" cy="914"/>
+          </a:xfrm>
+          <a:prstGeom prst="line">
+            <a:avLst/>
+          </a:prstGeom>
+          <a:noFill/>
+          <a:ln w="19050">
+            <a:solidFill>
+              <a:schemeClr val="accent6"/>
+            </a:solidFill>
+            <a:prstDash val="solid"/>
+            <a:tailEnd type="triangle"/>
+          </a:ln>
+        </p:spPr>
+      </p:sp>
+      <p:sp>
+        <p:nvSpPr>
+          <p:cNvPr id="17" name="service-207"/>
+          <p:cNvSpPr/>
+          <p:nvPr/>
+        </p:nvSpPr>
+        <p:spPr>
+          <a:xfrm>
+            <a:off x="9656064" y="1463040"/>
+            <a:ext cx="1965960" cy="868680"/>
+          </a:xfrm>
+          <a:prstGeom prst="roundRect">
+            <a:avLst>
+              <a:gd name="adj" fmla="val 8421"/>
+            </a:avLst>
+          </a:prstGeom>
+          <a:solidFill>
+            <a:schemeClr val="bg1"/>
+          </a:solidFill>
+          <a:ln w="15875">
+            <a:solidFill>
+              <a:schemeClr val="tx1"/>
+            </a:solidFill>
+            <a:prstDash val="solid"/>
+          </a:ln>
+        </p:spPr>
+      </p:sp>
+      <p:sp>
+        <p:nvSpPr>
+          <p:cNvPr id="18" name="service-texte-208"/>
+          <p:cNvSpPr txBox="1"/>
+          <p:nvPr/>
+        </p:nvSpPr>
+        <p:spPr>
+          <a:xfrm>
+            <a:off x="9656064" y="1463040"/>
+            <a:ext cx="1965960" cy="868680"/>
+          </a:xfrm>
+          <a:prstGeom prst="rect">
+            <a:avLst/>
+          </a:prstGeom>
+          <a:noFill/>
+          <a:ln/>
+        </p:spPr>
+        <p:txBody>
+          <a:bodyPr wrap="square" lIns="508" tIns="508" rIns="508" bIns="508" rtlCol="0" anchor="ctr"/>
+          <a:lstStyle/>
+          <a:p>
+            <a:pPr algn="ctr" indent="0" marL="0">
+              <a:buNone/>
+            </a:pPr>
+            <a:r>
+              <a:rPr lang="en-US" sz="1200" b="1" dirty="0">
+                <a:solidFill>
+                  <a:schemeClr val="tx1"/>
+                </a:solidFill>
+              </a:rPr>
+              <a:t>terraform apply</a:t>
+            </a:r>
+            <a:endParaRPr lang="en-US" sz="1200" dirty="0"/>
+          </a:p>
+          <a:p>
+            <a:pPr algn="ctr" indent="0" marL="0">
+              <a:buNone/>
+            </a:pPr>
+            <a:r>
+              <a:rPr lang="en-US" sz="1000" dirty="0">
+                <a:solidFill>
+                  <a:schemeClr val="tx1"/>
+                </a:solidFill>
+              </a:rPr>
+              <a:t>dev ou prod</a:t>
+            </a:r>
+            <a:endParaRPr lang="en-US" sz="1200" dirty="0"/>
+          </a:p>
+        </p:txBody>
+      </p:sp>
+      <p:sp>
+        <p:nvSpPr>
+          <p:cNvPr id="19" name="carte-209"/>
+          <p:cNvSpPr/>
+          <p:nvPr/>
+        </p:nvSpPr>
+        <p:spPr>
+          <a:xfrm>
+            <a:off x="548640" y="2743200"/>
+            <a:ext cx="5440680" cy="1600200"/>
+          </a:xfrm>
+          <a:prstGeom prst="roundRect">
+            <a:avLst>
+              <a:gd name="adj" fmla="val 6857"/>
+            </a:avLst>
+          </a:prstGeom>
+          <a:solidFill>
+            <a:schemeClr val="bg2"/>
+          </a:solidFill>
+          <a:ln w="12700">
+            <a:solidFill>
+              <a:schemeClr val="bg2"/>
+            </a:solidFill>
+            <a:prstDash val="solid"/>
+          </a:ln>
+        </p:spPr>
+      </p:sp>
+      <p:sp>
+        <p:nvSpPr>
+          <p:cNvPr id="20" name="texte-210"/>
+          <p:cNvSpPr txBox="1"/>
+          <p:nvPr/>
+        </p:nvSpPr>
+        <p:spPr>
+          <a:xfrm>
+            <a:off x="868680" y="2926080"/>
+            <a:ext cx="1371600" cy="548640"/>
+          </a:xfrm>
+          <a:prstGeom prst="rect">
+            <a:avLst/>
+          </a:prstGeom>
+          <a:noFill/>
+          <a:ln/>
+        </p:spPr>
+        <p:txBody>
+          <a:bodyPr wrap="square" lIns="0" tIns="0" rIns="0" bIns="0" rtlCol="0" anchor="t"/>
+          <a:lstStyle/>
+          <a:p>
+            <a:pPr indent="0" marL="0">
+              <a:buNone/>
+            </a:pPr>
+            <a:r>
+              <a:rPr lang="en-US" sz="3000" b="1" dirty="0">
+                <a:solidFill>
+                  <a:schemeClr val="accent1"/>
+                </a:solidFill>
+              </a:rPr>
+              <a:t>dev</a:t>
+            </a:r>
+            <a:endParaRPr lang="en-US" sz="3000" dirty="0"/>
+          </a:p>
+        </p:txBody>
+      </p:sp>
+      <p:sp>
+        <p:nvSpPr>
+          <p:cNvPr id="21" name="texte-211"/>
+          <p:cNvSpPr txBox="1"/>
+          <p:nvPr/>
+        </p:nvSpPr>
+        <p:spPr>
+          <a:xfrm>
+            <a:off x="2286000" y="2971800"/>
+            <a:ext cx="3474720" cy="365760"/>
+          </a:xfrm>
+          <a:prstGeom prst="rect">
+            <a:avLst/>
+          </a:prstGeom>
+          <a:noFill/>
+          <a:ln/>
+        </p:spPr>
+        <p:txBody>
+          <a:bodyPr wrap="square" lIns="0" tIns="0" rIns="0" bIns="0" rtlCol="0" anchor="t"/>
+          <a:lstStyle/>
+          <a:p>
+            <a:pPr indent="0" marL="0">
+              <a:buNone/>
+            </a:pPr>
+            <a:r>
+              <a:rPr lang="en-US" sz="1500" b="1" dirty="0">
+                <a:solidFill>
+                  <a:schemeClr val="tx1"/>
+                </a:solidFill>
+              </a:rPr>
+              <a:t>Branche dev · préfixe shopimt-dev</a:t>
+            </a:r>
+            <a:endParaRPr lang="en-US" sz="1500" dirty="0"/>
+          </a:p>
+        </p:txBody>
+      </p:sp>
+      <p:sp>
+        <p:nvSpPr>
+          <p:cNvPr id="22" name="texte-212"/>
+          <p:cNvSpPr txBox="1"/>
+          <p:nvPr/>
+        </p:nvSpPr>
+        <p:spPr>
+          <a:xfrm>
+            <a:off x="2286000" y="3383280"/>
+            <a:ext cx="3474720" cy="731520"/>
+          </a:xfrm>
+          <a:prstGeom prst="rect">
+            <a:avLst/>
+          </a:prstGeom>
+          <a:noFill/>
+          <a:ln/>
+        </p:spPr>
+        <p:txBody>
+          <a:bodyPr wrap="square" lIns="0" tIns="0" rIns="0" bIns="0" rtlCol="0" anchor="t"/>
+          <a:lstStyle/>
+          <a:p>
+            <a:pPr indent="0" marL="0">
+              <a:buNone/>
+            </a:pPr>
+            <a:r>
+              <a:rPr lang="en-US" sz="1300" dirty="0">
+                <a:solidFill>
+                  <a:schemeClr val="accent6"/>
+                </a:solidFill>
+              </a:rPr>
+              <a:t>Capacité DynamoDB minimale, on y casse tout sans risque</a:t>
+            </a:r>
+            <a:endParaRPr lang="en-US" sz="1300" dirty="0"/>
+          </a:p>
+        </p:txBody>
+      </p:sp>
+      <p:sp>
+        <p:nvSpPr>
+          <p:cNvPr id="23" name="carte-213"/>
+          <p:cNvSpPr/>
+          <p:nvPr/>
+        </p:nvSpPr>
+        <p:spPr>
+          <a:xfrm>
+            <a:off x="6172200" y="2743200"/>
+            <a:ext cx="5440680" cy="1600200"/>
+          </a:xfrm>
+          <a:prstGeom prst="roundRect">
+            <a:avLst>
+              <a:gd name="adj" fmla="val 6857"/>
+            </a:avLst>
+          </a:prstGeom>
+          <a:solidFill>
+            <a:schemeClr val="accent5"/>
+          </a:solidFill>
+          <a:ln w="12700">
+            <a:solidFill>
+              <a:schemeClr val="accent5"/>
+            </a:solidFill>
+            <a:prstDash val="solid"/>
+          </a:ln>
+        </p:spPr>
+      </p:sp>
+      <p:sp>
+        <p:nvSpPr>
+          <p:cNvPr id="24" name="texte-214"/>
+          <p:cNvSpPr txBox="1"/>
+          <p:nvPr/>
+        </p:nvSpPr>
+        <p:spPr>
+          <a:xfrm>
+            <a:off x="6492240" y="2926080"/>
+            <a:ext cx="1371600" cy="548640"/>
+          </a:xfrm>
+          <a:prstGeom prst="rect">
+            <a:avLst/>
+          </a:prstGeom>
+          <a:noFill/>
+          <a:ln/>
+        </p:spPr>
+        <p:txBody>
+          <a:bodyPr wrap="square" lIns="0" tIns="0" rIns="0" bIns="0" rtlCol="0" anchor="t"/>
+          <a:lstStyle/>
+          <a:p>
+            <a:pPr indent="0" marL="0">
+              <a:buNone/>
+            </a:pPr>
+            <a:r>
+              <a:rPr lang="en-US" sz="3000" b="1" dirty="0">
+                <a:solidFill>
+                  <a:schemeClr val="tx1"/>
+                </a:solidFill>
+              </a:rPr>
+              <a:t>prod</a:t>
+            </a:r>
+            <a:endParaRPr lang="en-US" sz="3000" dirty="0"/>
+          </a:p>
+        </p:txBody>
+      </p:sp>
+      <p:sp>
+        <p:nvSpPr>
+          <p:cNvPr id="25" name="texte-215"/>
+          <p:cNvSpPr txBox="1"/>
+          <p:nvPr/>
+        </p:nvSpPr>
+        <p:spPr>
+          <a:xfrm>
+            <a:off x="7909560" y="2971800"/>
+            <a:ext cx="3474720" cy="365760"/>
+          </a:xfrm>
+          <a:prstGeom prst="rect">
+            <a:avLst/>
+          </a:prstGeom>
+          <a:noFill/>
+          <a:ln/>
+        </p:spPr>
+        <p:txBody>
+          <a:bodyPr wrap="square" lIns="0" tIns="0" rIns="0" bIns="0" rtlCol="0" anchor="t"/>
+          <a:lstStyle/>
+          <a:p>
+            <a:pPr indent="0" marL="0">
+              <a:buNone/>
+            </a:pPr>
+            <a:r>
+              <a:rPr lang="en-US" sz="1500" b="1" dirty="0">
+                <a:solidFill>
+                  <a:schemeClr val="tx1"/>
+                </a:solidFill>
+              </a:rPr>
+              <a:t>Branche main · préfixe shopimt-sls</a:t>
+            </a:r>
+            <a:endParaRPr lang="en-US" sz="1500" dirty="0"/>
+          </a:p>
+        </p:txBody>
+      </p:sp>
+      <p:sp>
+        <p:nvSpPr>
+          <p:cNvPr id="26" name="texte-216"/>
+          <p:cNvSpPr txBox="1"/>
+          <p:nvPr/>
+        </p:nvSpPr>
+        <p:spPr>
+          <a:xfrm>
+            <a:off x="7909560" y="3383280"/>
+            <a:ext cx="3474720" cy="731520"/>
+          </a:xfrm>
+          <a:prstGeom prst="rect">
+            <a:avLst/>
+          </a:prstGeom>
+          <a:noFill/>
+          <a:ln/>
+        </p:spPr>
+        <p:txBody>
+          <a:bodyPr wrap="square" lIns="0" tIns="0" rIns="0" bIns="0" rtlCol="0" anchor="t"/>
+          <a:lstStyle/>
+          <a:p>
+            <a:pPr indent="0" marL="0">
+              <a:buNone/>
+            </a:pPr>
+            <a:r>
+              <a:rPr lang="en-US" sz="1300" dirty="0">
+                <a:solidFill>
+                  <a:schemeClr val="accent6"/>
+                </a:solidFill>
+              </a:rPr>
+              <a:t>Même module Terraform, seules quelques valeurs changent</a:t>
+            </a:r>
+            <a:endParaRPr lang="en-US" sz="1300" dirty="0"/>
+          </a:p>
+        </p:txBody>
+      </p:sp>
+      <p:sp>
+        <p:nvSpPr>
+          <p:cNvPr id="27" name="carte-217"/>
+          <p:cNvSpPr/>
+          <p:nvPr/>
+        </p:nvSpPr>
+        <p:spPr>
+          <a:xfrm>
+            <a:off x="548640" y="4572000"/>
+            <a:ext cx="11064240" cy="1508760"/>
+          </a:xfrm>
+          <a:prstGeom prst="roundRect">
+            <a:avLst>
+              <a:gd name="adj" fmla="val 7273"/>
+            </a:avLst>
+          </a:prstGeom>
+          <a:solidFill>
+            <a:schemeClr val="tx1"/>
+          </a:solidFill>
+          <a:ln w="12700">
+            <a:solidFill>
+              <a:schemeClr val="tx1"/>
+            </a:solidFill>
+            <a:prstDash val="solid"/>
+          </a:ln>
+        </p:spPr>
+      </p:sp>
+      <p:sp>
+        <p:nvSpPr>
+          <p:cNvPr id="28" name="texte-218"/>
+          <p:cNvSpPr txBox="1"/>
+          <p:nvPr/>
+        </p:nvSpPr>
+        <p:spPr>
+          <a:xfrm>
+            <a:off x="868680" y="4800600"/>
+            <a:ext cx="10424160" cy="411480"/>
+          </a:xfrm>
+          <a:prstGeom prst="rect">
+            <a:avLst/>
+          </a:prstGeom>
+          <a:noFill/>
+          <a:ln/>
+        </p:spPr>
+        <p:txBody>
+          <a:bodyPr wrap="square" lIns="0" tIns="0" rIns="0" bIns="0" rtlCol="0" anchor="t"/>
+          <a:lstStyle/>
+          <a:p>
+            <a:pPr indent="0" marL="0">
+              <a:buNone/>
+            </a:pPr>
+            <a:r>
+              <a:rPr lang="en-US" sz="1500" b="1" dirty="0">
+                <a:solidFill>
+                  <a:schemeClr val="bg1"/>
+                </a:solidFill>
+              </a:rPr>
+              <a:t>État Terraform dans S3 (versionné, verrouillé) · réglages personnels dans SSM Parameter Store, hors du dépôt</a:t>
+            </a:r>
+            <a:endParaRPr lang="en-US" sz="1500" dirty="0"/>
+          </a:p>
+        </p:txBody>
+      </p:sp>
+      <p:sp>
+        <p:nvSpPr>
+          <p:cNvPr id="29" name="texte-219"/>
+          <p:cNvSpPr txBox="1"/>
+          <p:nvPr/>
+        </p:nvSpPr>
+        <p:spPr>
+          <a:xfrm>
+            <a:off x="868680" y="5303520"/>
+            <a:ext cx="10424160" cy="457200"/>
+          </a:xfrm>
+          <a:prstGeom prst="rect">
+            <a:avLst/>
+          </a:prstGeom>
+          <a:noFill/>
+          <a:ln/>
+        </p:spPr>
+        <p:txBody>
+          <a:bodyPr wrap="square" lIns="0" tIns="0" rIns="0" bIns="0" rtlCol="0" anchor="t"/>
+          <a:lstStyle/>
+          <a:p>
+            <a:pPr indent="0" marL="0">
+              <a:buNone/>
+            </a:pPr>
+            <a:r>
+              <a:rPr lang="en-US" sz="1300" dirty="0">
+                <a:solidFill>
+                  <a:schemeClr val="bg2"/>
+                </a:solidFill>
+              </a:rPr>
+              <a:t>Aucune adresse e-mail, aucun secret, aucun état dans GitHub : le dépôt peut être public.</a:t>
+            </a:r>
+            <a:endParaRPr lang="en-US" sz="1300" dirty="0"/>
+          </a:p>
+        </p:txBody>
+      </p:sp>
+      <p:sp>
+        <p:nvSpPr>
+          <p:cNvPr id="25" name="Slide Number Placeholder 0"/>
+          <p:cNvSpPr>
+            <a:spLocks noGrp="1"/>
+          </p:cNvSpPr>
+          <p:nvPr>
+            <p:ph type="sldNum" sz="quarter" idx="4294967295"/>
+          </p:nvPr>
+        </p:nvSpPr>
+        <p:spPr>
+          <a:xfrm>
+            <a:off x="11155680" y="6400800"/>
+            <a:ext cx="457200" cy="274320"/>
+          </a:xfrm>
+          <a:prstGeom prst="rect">
+            <a:avLst/>
+          </a:prstGeom>
+          <a:extLst>
+            <a:ext uri="{C572A759-6A51-4108-AA02-DFA0A04FC94B}">
+              <ma14:wrappingTextBoxFlag xmlns:ma14="http://schemas.microsoft.com/office/mac/drawingml/2011/main" val="0"/>
+            </a:ext>
+          </a:extLst>
+        </p:spPr>
+        <p:txBody>
+          <a:bodyPr/>
+          <a:lstStyle>
+            <a:lvl1pPr>
+              <a:defRPr sz="1000">
+                <a:solidFill>
+                  <a:schemeClr val="accent6"/>
+                </a:solidFill>
+              </a:defRPr>
+            </a:lvl1pPr>
+          </a:lstStyle>
+          <a:p>
+            <a:pPr algn="r"/>
+            <a:fld id="{F7021451-1387-4CA6-816F-3879F97B5CBC}" type="slidenum">
+              <a:rPr b="0" lang="en-US"/>
+              <a:t>9</a:t>
+            </a:fld>
+            <a:endParaRPr lang="en-US"/>
+          </a:p>
+        </p:txBody>
+      </p:sp>
+    </p:spTree>
+  </p:cSld>
+  <p:clrMapOvr>
+    <a:masterClrMapping/>
+  </p:clrMapOvr>
+</p:sld>
+</file>
+
+<file path=ppt/slides/slide11.xml><?xml version="1.0" encoding="utf-8"?>
+<p:sld xmlns:a="http://schemas.openxmlformats.org/drawingml/2006/main" xmlns:r="http://schemas.openxmlformats.org/officeDocument/2006/relationships" xmlns:p="http://schemas.openxmlformats.org/presentationml/2006/main">
   <p:cSld name="Slide 10">
     <p:spTree>
       <p:nvGrpSpPr>
@@ -2771,7 +4041,7 @@
                   <a:schemeClr val="bg1"/>
                 </a:solidFill>
               </a:rPr>
-              <a:t>Deux environnements, tous dans l'offre gratuite AWS</a:t>
+              <a:t>Serverless : deux environnements dans l'offre gratuite AWS</a:t>
             </a:r>
             <a:endParaRPr lang="en-US" sz="1600" dirty="0"/>
           </a:p>
@@ -3646,7 +4916,7 @@
                             <a:schemeClr val="tx1"/>
                           </a:solidFill>
                         </a:rPr>
-                        <a:t>Kafka (MSK)</a:t>
+                        <a:t>Kafka</a:t>
                       </a:r>
                       <a:endParaRPr lang="en-US" sz="1300" dirty="0"/>
                     </a:p>
@@ -3683,7 +4953,7 @@
                             <a:schemeClr val="tx1"/>
                           </a:solidFill>
                         </a:rPr>
-                        <a:t>Remplacé par DynamoDB Streams</a:t>
+                        <a:t>Streams (serverless), broker EC2</a:t>
                       </a:r>
                       <a:endParaRPr lang="en-US" sz="1300" dirty="0"/>
                     </a:p>
@@ -3720,7 +4990,7 @@
                             <a:schemeClr val="tx1"/>
                           </a:solidFill>
                         </a:rPr>
-                        <a:t>MSK n'a pas d'offre gratuite</a:t>
+                        <a:t>MSK évité : pas d'offre gratuite</a:t>
                       </a:r>
                       <a:endParaRPr lang="en-US" sz="1300" dirty="0"/>
                     </a:p>
@@ -3801,7 +5071,1241 @@
 </p:sld>
 </file>
 
-<file path=ppt/slides/slide11.xml><?xml version="1.0" encoding="utf-8"?>
+<file path=ppt/slides/slide12.xml><?xml version="1.0" encoding="utf-8"?>
+<p:sld xmlns:a="http://schemas.openxmlformats.org/drawingml/2006/main" xmlns:p="http://schemas.openxmlformats.org/presentationml/2006/main" xmlns:r="http://schemas.openxmlformats.org/officeDocument/2006/relationships">
+  <p:cSld>
+    <p:spTree>
+      <p:nvGrpSpPr>
+        <p:cNvPr id="1" name=""/>
+        <p:cNvGrpSpPr/>
+        <p:nvPr/>
+      </p:nvGrpSpPr>
+      <p:grpSpPr/>
+      <p:sp>
+        <p:nvSpPr>
+          <p:cNvPr id="2" name="orateur-16"/>
+          <p:cNvSpPr/>
+          <p:nvPr/>
+        </p:nvSpPr>
+        <p:spPr>
+          <a:xfrm>
+            <a:off x="10497312" y="109728"/>
+            <a:ext cx="868680" cy="292608"/>
+          </a:xfrm>
+          <a:prstGeom prst="roundRect">
+            <a:avLst>
+              <a:gd name="adj" fmla="val 50000"/>
+            </a:avLst>
+          </a:prstGeom>
+          <a:solidFill>
+            <a:schemeClr val="accent1"/>
+          </a:solidFill>
+          <a:ln w="12700">
+            <a:solidFill>
+              <a:schemeClr val="accent1"/>
+            </a:solidFill>
+            <a:prstDash val="solid"/>
+          </a:ln>
+        </p:spPr>
+      </p:sp>
+      <p:sp>
+        <p:nvSpPr>
+          <p:cNvPr id="3" name="orateur-texte-17"/>
+          <p:cNvSpPr txBox="1"/>
+          <p:nvPr/>
+        </p:nvSpPr>
+        <p:spPr>
+          <a:xfrm>
+            <a:off x="10497312" y="109728"/>
+            <a:ext cx="868680" cy="292608"/>
+          </a:xfrm>
+          <a:prstGeom prst="rect">
+            <a:avLst/>
+          </a:prstGeom>
+          <a:noFill/>
+          <a:ln/>
+        </p:spPr>
+        <p:txBody>
+          <a:bodyPr wrap="square" lIns="0" tIns="0" rIns="0" bIns="0" rtlCol="0" anchor="ctr"/>
+          <a:lstStyle/>
+          <a:p>
+            <a:pPr algn="ctr" indent="0" marL="0">
+              <a:buNone/>
+            </a:pPr>
+            <a:r>
+              <a:rPr lang="en-US" sz="1100" b="1" dirty="0">
+                <a:solidFill>
+                  <a:schemeClr val="tx1"/>
+                </a:solidFill>
+              </a:rPr>
+              <a:t>Gabin</a:t>
+            </a:r>
+            <a:endParaRPr lang="en-US" sz="1100" dirty="0"/>
+          </a:p>
+        </p:txBody>
+      </p:sp>
+      <p:sp>
+        <p:nvSpPr>
+          <p:cNvPr id="4" name="Text 0"/>
+          <p:cNvSpPr/>
+          <p:nvPr>
+            <p:ph idx="100" type="title" hasCustomPrompt="1"/>
+          </p:nvPr>
+        </p:nvSpPr>
+        <p:spPr>
+          <a:xfrm>
+            <a:off x="548640" y="365760"/>
+            <a:ext cx="11064240" cy="777240"/>
+          </a:xfrm>
+          <a:prstGeom prst="rect">
+            <a:avLst/>
+          </a:prstGeom>
+          <a:noFill/>
+          <a:ln/>
+        </p:spPr>
+        <p:txBody>
+          <a:bodyPr wrap="square" lIns="0" tIns="0" rIns="0" bIns="0" rtlCol="0" anchor="ctr"/>
+          <a:lstStyle/>
+          <a:p>
+            <a:pPr algn="l" indent="0" marL="0">
+              <a:buNone/>
+            </a:pPr>
+            <a:r>
+              <a:rPr lang="en-US" sz="3000" b="1" dirty="0">
+                <a:solidFill>
+                  <a:schemeClr val="tx1"/>
+                </a:solidFill>
+              </a:rPr>
+              <a:t>Serverless et EC2 : deux solutions en même temps</a:t>
+            </a:r>
+            <a:endParaRPr lang="en-US" sz="3000" dirty="0"/>
+          </a:p>
+        </p:txBody>
+      </p:sp>
+      <p:sp>
+        <p:nvSpPr>
+          <p:cNvPr id="5" name="carte-222"/>
+          <p:cNvSpPr/>
+          <p:nvPr/>
+        </p:nvSpPr>
+        <p:spPr>
+          <a:xfrm>
+            <a:off x="548640" y="1417320"/>
+            <a:ext cx="3291840" cy="4663440"/>
+          </a:xfrm>
+          <a:prstGeom prst="roundRect">
+            <a:avLst>
+              <a:gd name="adj" fmla="val 3333"/>
+            </a:avLst>
+          </a:prstGeom>
+          <a:solidFill>
+            <a:schemeClr val="tx1"/>
+          </a:solidFill>
+          <a:ln w="12700">
+            <a:solidFill>
+              <a:schemeClr val="tx1"/>
+            </a:solidFill>
+            <a:prstDash val="solid"/>
+          </a:ln>
+        </p:spPr>
+      </p:sp>
+      <p:sp>
+        <p:nvSpPr>
+          <p:cNvPr id="6" name="texte-223"/>
+          <p:cNvSpPr txBox="1"/>
+          <p:nvPr/>
+        </p:nvSpPr>
+        <p:spPr>
+          <a:xfrm>
+            <a:off x="868680" y="1737360"/>
+            <a:ext cx="2743200" cy="1188720"/>
+          </a:xfrm>
+          <a:prstGeom prst="rect">
+            <a:avLst/>
+          </a:prstGeom>
+          <a:noFill/>
+          <a:ln/>
+        </p:spPr>
+        <p:txBody>
+          <a:bodyPr wrap="square" lIns="0" tIns="0" rIns="0" bIns="0" rtlCol="0" anchor="t"/>
+          <a:lstStyle/>
+          <a:p>
+            <a:pPr indent="0" marL="0">
+              <a:buNone/>
+            </a:pPr>
+            <a:r>
+              <a:rPr lang="en-US" sz="7200" b="1" dirty="0">
+                <a:solidFill>
+                  <a:schemeClr val="accent1"/>
+                </a:solidFill>
+              </a:rPr>
+              <a:t>2</a:t>
+            </a:r>
+            <a:endParaRPr lang="en-US" sz="7200" dirty="0"/>
+          </a:p>
+        </p:txBody>
+      </p:sp>
+      <p:sp>
+        <p:nvSpPr>
+          <p:cNvPr id="7" name="texte-224"/>
+          <p:cNvSpPr txBox="1"/>
+          <p:nvPr/>
+        </p:nvSpPr>
+        <p:spPr>
+          <a:xfrm>
+            <a:off x="868680" y="3017520"/>
+            <a:ext cx="2697480" cy="914400"/>
+          </a:xfrm>
+          <a:prstGeom prst="rect">
+            <a:avLst/>
+          </a:prstGeom>
+          <a:noFill/>
+          <a:ln/>
+        </p:spPr>
+        <p:txBody>
+          <a:bodyPr wrap="square" lIns="0" tIns="0" rIns="0" bIns="0" rtlCol="0" anchor="t"/>
+          <a:lstStyle/>
+          <a:p>
+            <a:pPr indent="0" marL="0">
+              <a:buNone/>
+            </a:pPr>
+            <a:r>
+              <a:rPr lang="en-US" sz="1600" dirty="0">
+                <a:solidFill>
+                  <a:schemeClr val="bg1"/>
+                </a:solidFill>
+              </a:rPr>
+              <a:t>solutions en ligne : même site, même API, mêmes e-mails</a:t>
+            </a:r>
+            <a:endParaRPr lang="en-US" sz="1600" dirty="0"/>
+          </a:p>
+        </p:txBody>
+      </p:sp>
+      <p:sp>
+        <p:nvSpPr>
+          <p:cNvPr id="8" name="texte-225"/>
+          <p:cNvSpPr txBox="1"/>
+          <p:nvPr/>
+        </p:nvSpPr>
+        <p:spPr>
+          <a:xfrm>
+            <a:off x="868680" y="5074920"/>
+            <a:ext cx="2697480" cy="731520"/>
+          </a:xfrm>
+          <a:prstGeom prst="rect">
+            <a:avLst/>
+          </a:prstGeom>
+          <a:noFill/>
+          <a:ln/>
+        </p:spPr>
+        <p:txBody>
+          <a:bodyPr wrap="square" lIns="0" tIns="0" rIns="0" bIns="0" rtlCol="0" anchor="t"/>
+          <a:lstStyle/>
+          <a:p>
+            <a:pPr indent="0" marL="0">
+              <a:buNone/>
+            </a:pPr>
+            <a:r>
+              <a:rPr lang="en-US" sz="1200" dirty="0">
+                <a:solidFill>
+                  <a:schemeClr val="bg2"/>
+                </a:solidFill>
+              </a:rPr>
+              <a:t>EC2 : environ 0,60 $ par jour, coupée après la soutenance</a:t>
+            </a:r>
+            <a:endParaRPr lang="en-US" sz="1200" dirty="0"/>
+          </a:p>
+        </p:txBody>
+      </p:sp>
+      <p:graphicFrame>
+        <p:nvGraphicFramePr>
+          <p:cNvPr id="11" name="tableau-couts"/>
+          <p:cNvGraphicFramePr>
+            <a:graphicFrameLocks noGrp="1"/>
+          </p:cNvGraphicFramePr>
+          <p:nvPr>
+            <p:extLst>
+              <p:ext uri="{D42A27DB-BD31-4B8C-83A1-F6EECF244321}">
+                <p14:modId xmlns:p14="http://schemas.microsoft.com/office/powerpoint/2010/main" val="1579011935"/>
+              </p:ext>
+            </p:extLst>
+          </p:nvPr>
+        </p:nvGraphicFramePr>
+        <p:xfrm>
+          <a:off x="4206240" y="1417320"/>
+          <a:ext cx="7406640" cy="914400"/>
+        </p:xfrm>
+        <a:graphic>
+          <a:graphicData uri="http://schemas.openxmlformats.org/drawingml/2006/table">
+            <a:tbl>
+              <a:tblPr/>
+              <a:tblGrid>
+                <a:gridCol w="1737360"/>
+                <a:gridCol w="2834640"/>
+                <a:gridCol w="2834640"/>
+              </a:tblGrid>
+              <a:tr h="548640">
+                <a:tc>
+                  <a:txBody>
+                    <a:bodyPr/>
+                    <a:lstStyle/>
+                    <a:p>
+                      <a:pPr indent="0" marL="0">
+                        <a:buNone/>
+                      </a:pPr>
+                      <a:r>
+                        <a:rPr lang="en-US" sz="1300" b="1" dirty="0">
+                          <a:solidFill>
+                            <a:schemeClr val="bg1"/>
+                          </a:solidFill>
+                        </a:rPr>
+                        <a:t/>
+                      </a:r>
+                      <a:endParaRPr lang="en-US" sz="1300" dirty="0"/>
+                    </a:p>
+                  </a:txBody>
+                  <a:tcPr marL="109728" marR="109728" marT="0" marB="0" anchor="ctr">
+                    <a:lnL w="0" cap="flat" cmpd="sng" algn="ctr">
+                      <a:noFill/>
+                    </a:lnL>
+                    <a:lnR w="0" cap="flat" cmpd="sng" algn="ctr">
+                      <a:noFill/>
+                    </a:lnR>
+                    <a:lnT w="0" cap="flat" cmpd="sng" algn="ctr">
+                      <a:noFill/>
+                    </a:lnT>
+                    <a:lnB w="0" cap="flat" cmpd="sng" algn="ctr">
+                      <a:noFill/>
+                    </a:lnB>
+                    <a:solidFill>
+                      <a:schemeClr val="tx1"/>
+                    </a:solidFill>
+                  </a:tcPr>
+                </a:tc>
+                <a:tc>
+                  <a:txBody>
+                    <a:bodyPr/>
+                    <a:lstStyle/>
+                    <a:p>
+                      <a:pPr indent="0" marL="0">
+                        <a:buNone/>
+                      </a:pPr>
+                      <a:r>
+                        <a:rPr lang="en-US" sz="1300" b="1" dirty="0">
+                          <a:solidFill>
+                            <a:schemeClr val="bg1"/>
+                          </a:solidFill>
+                        </a:rPr>
+                        <a:t>Serverless</a:t>
+                      </a:r>
+                      <a:endParaRPr lang="en-US" sz="1300" dirty="0"/>
+                    </a:p>
+                  </a:txBody>
+                  <a:tcPr marL="109728" marR="109728" marT="0" marB="0" anchor="ctr">
+                    <a:lnL w="0" cap="flat" cmpd="sng" algn="ctr">
+                      <a:noFill/>
+                    </a:lnL>
+                    <a:lnR w="0" cap="flat" cmpd="sng" algn="ctr">
+                      <a:noFill/>
+                    </a:lnR>
+                    <a:lnT w="0" cap="flat" cmpd="sng" algn="ctr">
+                      <a:noFill/>
+                    </a:lnT>
+                    <a:lnB w="0" cap="flat" cmpd="sng" algn="ctr">
+                      <a:noFill/>
+                    </a:lnB>
+                    <a:solidFill>
+                      <a:schemeClr val="tx1"/>
+                    </a:solidFill>
+                  </a:tcPr>
+                </a:tc>
+                <a:tc>
+                  <a:txBody>
+                    <a:bodyPr/>
+                    <a:lstStyle/>
+                    <a:p>
+                      <a:pPr indent="0" marL="0">
+                        <a:buNone/>
+                      </a:pPr>
+                      <a:r>
+                        <a:rPr lang="en-US" sz="1300" b="1" dirty="0">
+                          <a:solidFill>
+                            <a:schemeClr val="bg1"/>
+                          </a:solidFill>
+                        </a:rPr>
+                        <a:t>EC2</a:t>
+                      </a:r>
+                      <a:endParaRPr lang="en-US" sz="1300" dirty="0"/>
+                    </a:p>
+                  </a:txBody>
+                  <a:tcPr marL="109728" marR="109728" marT="0" marB="0" anchor="ctr">
+                    <a:lnL w="0" cap="flat" cmpd="sng" algn="ctr">
+                      <a:noFill/>
+                    </a:lnL>
+                    <a:lnR w="0" cap="flat" cmpd="sng" algn="ctr">
+                      <a:noFill/>
+                    </a:lnR>
+                    <a:lnT w="0" cap="flat" cmpd="sng" algn="ctr">
+                      <a:noFill/>
+                    </a:lnT>
+                    <a:lnB w="0" cap="flat" cmpd="sng" algn="ctr">
+                      <a:noFill/>
+                    </a:lnB>
+                    <a:solidFill>
+                      <a:schemeClr val="tx1"/>
+                    </a:solidFill>
+                  </a:tcPr>
+                </a:tc>
+              </a:tr>
+              <a:tr h="548640">
+                <a:tc>
+                  <a:txBody>
+                    <a:bodyPr/>
+                    <a:lstStyle/>
+                    <a:p>
+                      <a:pPr indent="0" marL="0">
+                        <a:buNone/>
+                      </a:pPr>
+                      <a:r>
+                        <a:rPr lang="en-US" sz="1300" dirty="0">
+                          <a:solidFill>
+                            <a:schemeClr val="tx1"/>
+                          </a:solidFill>
+                        </a:rPr>
+                        <a:t>Calcul</a:t>
+                      </a:r>
+                      <a:endParaRPr lang="en-US" sz="1300" dirty="0"/>
+                    </a:p>
+                  </a:txBody>
+                  <a:tcPr marL="109728" marR="109728" marT="0" marB="0" anchor="ctr">
+                    <a:lnL w="0" cap="flat" cmpd="sng" algn="ctr">
+                      <a:noFill/>
+                    </a:lnL>
+                    <a:lnR w="0" cap="flat" cmpd="sng" algn="ctr">
+                      <a:noFill/>
+                    </a:lnR>
+                    <a:lnT w="0" cap="flat" cmpd="sng" algn="ctr">
+                      <a:noFill/>
+                    </a:lnT>
+                    <a:lnB w="0" cap="flat" cmpd="sng" algn="ctr">
+                      <a:noFill/>
+                    </a:lnB>
+                    <a:solidFill>
+                      <a:schemeClr val="bg1"/>
+                    </a:solidFill>
+                  </a:tcPr>
+                </a:tc>
+                <a:tc>
+                  <a:txBody>
+                    <a:bodyPr/>
+                    <a:lstStyle/>
+                    <a:p>
+                      <a:pPr indent="0" marL="0">
+                        <a:buNone/>
+                      </a:pPr>
+                      <a:r>
+                        <a:rPr lang="en-US" sz="1300" dirty="0">
+                          <a:solidFill>
+                            <a:schemeClr val="tx1"/>
+                          </a:solidFill>
+                        </a:rPr>
+                        <a:t>Lambda, à la demande</a:t>
+                      </a:r>
+                      <a:endParaRPr lang="en-US" sz="1300" dirty="0"/>
+                    </a:p>
+                  </a:txBody>
+                  <a:tcPr marL="109728" marR="109728" marT="0" marB="0" anchor="ctr">
+                    <a:lnL w="0" cap="flat" cmpd="sng" algn="ctr">
+                      <a:noFill/>
+                    </a:lnL>
+                    <a:lnR w="0" cap="flat" cmpd="sng" algn="ctr">
+                      <a:noFill/>
+                    </a:lnR>
+                    <a:lnT w="0" cap="flat" cmpd="sng" algn="ctr">
+                      <a:noFill/>
+                    </a:lnT>
+                    <a:lnB w="0" cap="flat" cmpd="sng" algn="ctr">
+                      <a:noFill/>
+                    </a:lnB>
+                    <a:solidFill>
+                      <a:schemeClr val="bg1"/>
+                    </a:solidFill>
+                  </a:tcPr>
+                </a:tc>
+                <a:tc>
+                  <a:txBody>
+                    <a:bodyPr/>
+                    <a:lstStyle/>
+                    <a:p>
+                      <a:pPr indent="0" marL="0">
+                        <a:buNone/>
+                      </a:pPr>
+                      <a:r>
+                        <a:rPr lang="en-US" sz="1300" dirty="0">
+                          <a:solidFill>
+                            <a:schemeClr val="tx1"/>
+                          </a:solidFill>
+                        </a:rPr>
+                        <a:t>t3.micro, Auto Scaling 1 à 2</a:t>
+                      </a:r>
+                      <a:endParaRPr lang="en-US" sz="1300" dirty="0"/>
+                    </a:p>
+                  </a:txBody>
+                  <a:tcPr marL="109728" marR="109728" marT="0" marB="0" anchor="ctr">
+                    <a:lnL w="0" cap="flat" cmpd="sng" algn="ctr">
+                      <a:noFill/>
+                    </a:lnL>
+                    <a:lnR w="0" cap="flat" cmpd="sng" algn="ctr">
+                      <a:noFill/>
+                    </a:lnR>
+                    <a:lnT w="0" cap="flat" cmpd="sng" algn="ctr">
+                      <a:noFill/>
+                    </a:lnT>
+                    <a:lnB w="0" cap="flat" cmpd="sng" algn="ctr">
+                      <a:noFill/>
+                    </a:lnB>
+                    <a:solidFill>
+                      <a:schemeClr val="bg1"/>
+                    </a:solidFill>
+                  </a:tcPr>
+                </a:tc>
+              </a:tr>
+              <a:tr h="548640">
+                <a:tc>
+                  <a:txBody>
+                    <a:bodyPr/>
+                    <a:lstStyle/>
+                    <a:p>
+                      <a:pPr indent="0" marL="0">
+                        <a:buNone/>
+                      </a:pPr>
+                      <a:r>
+                        <a:rPr lang="en-US" sz="1300" dirty="0">
+                          <a:solidFill>
+                            <a:schemeClr val="tx1"/>
+                          </a:solidFill>
+                        </a:rPr>
+                        <a:t>Base</a:t>
+                      </a:r>
+                      <a:endParaRPr lang="en-US" sz="1300" dirty="0"/>
+                    </a:p>
+                  </a:txBody>
+                  <a:tcPr marL="109728" marR="109728" marT="0" marB="0" anchor="ctr">
+                    <a:lnL w="0" cap="flat" cmpd="sng" algn="ctr">
+                      <a:noFill/>
+                    </a:lnL>
+                    <a:lnR w="0" cap="flat" cmpd="sng" algn="ctr">
+                      <a:noFill/>
+                    </a:lnR>
+                    <a:lnT w="0" cap="flat" cmpd="sng" algn="ctr">
+                      <a:noFill/>
+                    </a:lnT>
+                    <a:lnB w="0" cap="flat" cmpd="sng" algn="ctr">
+                      <a:noFill/>
+                    </a:lnB>
+                    <a:solidFill>
+                      <a:schemeClr val="bg2"/>
+                    </a:solidFill>
+                  </a:tcPr>
+                </a:tc>
+                <a:tc>
+                  <a:txBody>
+                    <a:bodyPr/>
+                    <a:lstStyle/>
+                    <a:p>
+                      <a:pPr indent="0" marL="0">
+                        <a:buNone/>
+                      </a:pPr>
+                      <a:r>
+                        <a:rPr lang="en-US" sz="1300" dirty="0">
+                          <a:solidFill>
+                            <a:schemeClr val="tx1"/>
+                          </a:solidFill>
+                        </a:rPr>
+                        <a:t>DynamoDB, transaction</a:t>
+                      </a:r>
+                      <a:endParaRPr lang="en-US" sz="1300" dirty="0"/>
+                    </a:p>
+                  </a:txBody>
+                  <a:tcPr marL="109728" marR="109728" marT="0" marB="0" anchor="ctr">
+                    <a:lnL w="0" cap="flat" cmpd="sng" algn="ctr">
+                      <a:noFill/>
+                    </a:lnL>
+                    <a:lnR w="0" cap="flat" cmpd="sng" algn="ctr">
+                      <a:noFill/>
+                    </a:lnR>
+                    <a:lnT w="0" cap="flat" cmpd="sng" algn="ctr">
+                      <a:noFill/>
+                    </a:lnT>
+                    <a:lnB w="0" cap="flat" cmpd="sng" algn="ctr">
+                      <a:noFill/>
+                    </a:lnB>
+                    <a:solidFill>
+                      <a:schemeClr val="bg2"/>
+                    </a:solidFill>
+                  </a:tcPr>
+                </a:tc>
+                <a:tc>
+                  <a:txBody>
+                    <a:bodyPr/>
+                    <a:lstStyle/>
+                    <a:p>
+                      <a:pPr indent="0" marL="0">
+                        <a:buNone/>
+                      </a:pPr>
+                      <a:r>
+                        <a:rPr lang="en-US" sz="1300" dirty="0">
+                          <a:solidFill>
+                            <a:schemeClr val="tx1"/>
+                          </a:solidFill>
+                        </a:rPr>
+                        <a:t>RDS MySQL, SELECT … FOR UPDATE</a:t>
+                      </a:r>
+                      <a:endParaRPr lang="en-US" sz="1300" dirty="0"/>
+                    </a:p>
+                  </a:txBody>
+                  <a:tcPr marL="109728" marR="109728" marT="0" marB="0" anchor="ctr">
+                    <a:lnL w="0" cap="flat" cmpd="sng" algn="ctr">
+                      <a:noFill/>
+                    </a:lnL>
+                    <a:lnR w="0" cap="flat" cmpd="sng" algn="ctr">
+                      <a:noFill/>
+                    </a:lnR>
+                    <a:lnT w="0" cap="flat" cmpd="sng" algn="ctr">
+                      <a:noFill/>
+                    </a:lnT>
+                    <a:lnB w="0" cap="flat" cmpd="sng" algn="ctr">
+                      <a:noFill/>
+                    </a:lnB>
+                    <a:solidFill>
+                      <a:schemeClr val="bg2"/>
+                    </a:solidFill>
+                  </a:tcPr>
+                </a:tc>
+              </a:tr>
+              <a:tr h="548640">
+                <a:tc>
+                  <a:txBody>
+                    <a:bodyPr/>
+                    <a:lstStyle/>
+                    <a:p>
+                      <a:pPr indent="0" marL="0">
+                        <a:buNone/>
+                      </a:pPr>
+                      <a:r>
+                        <a:rPr lang="en-US" sz="1300" dirty="0">
+                          <a:solidFill>
+                            <a:schemeClr val="tx1"/>
+                          </a:solidFill>
+                        </a:rPr>
+                        <a:t>Entrée</a:t>
+                      </a:r>
+                      <a:endParaRPr lang="en-US" sz="1300" dirty="0"/>
+                    </a:p>
+                  </a:txBody>
+                  <a:tcPr marL="109728" marR="109728" marT="0" marB="0" anchor="ctr">
+                    <a:lnL w="0" cap="flat" cmpd="sng" algn="ctr">
+                      <a:noFill/>
+                    </a:lnL>
+                    <a:lnR w="0" cap="flat" cmpd="sng" algn="ctr">
+                      <a:noFill/>
+                    </a:lnR>
+                    <a:lnT w="0" cap="flat" cmpd="sng" algn="ctr">
+                      <a:noFill/>
+                    </a:lnT>
+                    <a:lnB w="0" cap="flat" cmpd="sng" algn="ctr">
+                      <a:noFill/>
+                    </a:lnB>
+                    <a:solidFill>
+                      <a:schemeClr val="bg1"/>
+                    </a:solidFill>
+                  </a:tcPr>
+                </a:tc>
+                <a:tc>
+                  <a:txBody>
+                    <a:bodyPr/>
+                    <a:lstStyle/>
+                    <a:p>
+                      <a:pPr indent="0" marL="0">
+                        <a:buNone/>
+                      </a:pPr>
+                      <a:r>
+                        <a:rPr lang="en-US" sz="1300" dirty="0">
+                          <a:solidFill>
+                            <a:schemeClr val="tx1"/>
+                          </a:solidFill>
+                        </a:rPr>
+                        <a:t>API Gateway</a:t>
+                      </a:r>
+                      <a:endParaRPr lang="en-US" sz="1300" dirty="0"/>
+                    </a:p>
+                  </a:txBody>
+                  <a:tcPr marL="109728" marR="109728" marT="0" marB="0" anchor="ctr">
+                    <a:lnL w="0" cap="flat" cmpd="sng" algn="ctr">
+                      <a:noFill/>
+                    </a:lnL>
+                    <a:lnR w="0" cap="flat" cmpd="sng" algn="ctr">
+                      <a:noFill/>
+                    </a:lnR>
+                    <a:lnT w="0" cap="flat" cmpd="sng" algn="ctr">
+                      <a:noFill/>
+                    </a:lnT>
+                    <a:lnB w="0" cap="flat" cmpd="sng" algn="ctr">
+                      <a:noFill/>
+                    </a:lnB>
+                    <a:solidFill>
+                      <a:schemeClr val="bg1"/>
+                    </a:solidFill>
+                  </a:tcPr>
+                </a:tc>
+                <a:tc>
+                  <a:txBody>
+                    <a:bodyPr/>
+                    <a:lstStyle/>
+                    <a:p>
+                      <a:pPr indent="0" marL="0">
+                        <a:buNone/>
+                      </a:pPr>
+                      <a:r>
+                        <a:rPr lang="en-US" sz="1300" dirty="0">
+                          <a:solidFill>
+                            <a:schemeClr val="tx1"/>
+                          </a:solidFill>
+                        </a:rPr>
+                        <a:t>ALB sur 2 zones</a:t>
+                      </a:r>
+                      <a:endParaRPr lang="en-US" sz="1300" dirty="0"/>
+                    </a:p>
+                  </a:txBody>
+                  <a:tcPr marL="109728" marR="109728" marT="0" marB="0" anchor="ctr">
+                    <a:lnL w="0" cap="flat" cmpd="sng" algn="ctr">
+                      <a:noFill/>
+                    </a:lnL>
+                    <a:lnR w="0" cap="flat" cmpd="sng" algn="ctr">
+                      <a:noFill/>
+                    </a:lnR>
+                    <a:lnT w="0" cap="flat" cmpd="sng" algn="ctr">
+                      <a:noFill/>
+                    </a:lnT>
+                    <a:lnB w="0" cap="flat" cmpd="sng" algn="ctr">
+                      <a:noFill/>
+                    </a:lnB>
+                    <a:solidFill>
+                      <a:schemeClr val="bg1"/>
+                    </a:solidFill>
+                  </a:tcPr>
+                </a:tc>
+              </a:tr>
+              <a:tr h="548640">
+                <a:tc>
+                  <a:txBody>
+                    <a:bodyPr/>
+                    <a:lstStyle/>
+                    <a:p>
+                      <a:pPr indent="0" marL="0">
+                        <a:buNone/>
+                      </a:pPr>
+                      <a:r>
+                        <a:rPr lang="en-US" sz="1300" dirty="0">
+                          <a:solidFill>
+                            <a:schemeClr val="tx1"/>
+                          </a:solidFill>
+                        </a:rPr>
+                        <a:t>Événements</a:t>
+                      </a:r>
+                      <a:endParaRPr lang="en-US" sz="1300" dirty="0"/>
+                    </a:p>
+                  </a:txBody>
+                  <a:tcPr marL="109728" marR="109728" marT="0" marB="0" anchor="ctr">
+                    <a:lnL w="0" cap="flat" cmpd="sng" algn="ctr">
+                      <a:noFill/>
+                    </a:lnL>
+                    <a:lnR w="0" cap="flat" cmpd="sng" algn="ctr">
+                      <a:noFill/>
+                    </a:lnR>
+                    <a:lnT w="0" cap="flat" cmpd="sng" algn="ctr">
+                      <a:noFill/>
+                    </a:lnT>
+                    <a:lnB w="0" cap="flat" cmpd="sng" algn="ctr">
+                      <a:noFill/>
+                    </a:lnB>
+                    <a:solidFill>
+                      <a:schemeClr val="bg2"/>
+                    </a:solidFill>
+                  </a:tcPr>
+                </a:tc>
+                <a:tc>
+                  <a:txBody>
+                    <a:bodyPr/>
+                    <a:lstStyle/>
+                    <a:p>
+                      <a:pPr indent="0" marL="0">
+                        <a:buNone/>
+                      </a:pPr>
+                      <a:r>
+                        <a:rPr lang="en-US" sz="1300" dirty="0">
+                          <a:solidFill>
+                            <a:schemeClr val="tx1"/>
+                          </a:solidFill>
+                        </a:rPr>
+                        <a:t>SNS, SQS, Streams</a:t>
+                      </a:r>
+                      <a:endParaRPr lang="en-US" sz="1300" dirty="0"/>
+                    </a:p>
+                  </a:txBody>
+                  <a:tcPr marL="109728" marR="109728" marT="0" marB="0" anchor="ctr">
+                    <a:lnL w="0" cap="flat" cmpd="sng" algn="ctr">
+                      <a:noFill/>
+                    </a:lnL>
+                    <a:lnR w="0" cap="flat" cmpd="sng" algn="ctr">
+                      <a:noFill/>
+                    </a:lnR>
+                    <a:lnT w="0" cap="flat" cmpd="sng" algn="ctr">
+                      <a:noFill/>
+                    </a:lnT>
+                    <a:lnB w="0" cap="flat" cmpd="sng" algn="ctr">
+                      <a:noFill/>
+                    </a:lnB>
+                    <a:solidFill>
+                      <a:schemeClr val="bg2"/>
+                    </a:solidFill>
+                  </a:tcPr>
+                </a:tc>
+                <a:tc>
+                  <a:txBody>
+                    <a:bodyPr/>
+                    <a:lstStyle/>
+                    <a:p>
+                      <a:pPr indent="0" marL="0">
+                        <a:buNone/>
+                      </a:pPr>
+                      <a:r>
+                        <a:rPr lang="en-US" sz="1300" dirty="0">
+                          <a:solidFill>
+                            <a:schemeClr val="tx1"/>
+                          </a:solidFill>
+                        </a:rPr>
+                        <a:t>SNS, SQS, Kafka sur EC2</a:t>
+                      </a:r>
+                      <a:endParaRPr lang="en-US" sz="1300" dirty="0"/>
+                    </a:p>
+                  </a:txBody>
+                  <a:tcPr marL="109728" marR="109728" marT="0" marB="0" anchor="ctr">
+                    <a:lnL w="0" cap="flat" cmpd="sng" algn="ctr">
+                      <a:noFill/>
+                    </a:lnL>
+                    <a:lnR w="0" cap="flat" cmpd="sng" algn="ctr">
+                      <a:noFill/>
+                    </a:lnR>
+                    <a:lnT w="0" cap="flat" cmpd="sng" algn="ctr">
+                      <a:noFill/>
+                    </a:lnT>
+                    <a:lnB w="0" cap="flat" cmpd="sng" algn="ctr">
+                      <a:noFill/>
+                    </a:lnB>
+                    <a:solidFill>
+                      <a:schemeClr val="bg2"/>
+                    </a:solidFill>
+                  </a:tcPr>
+                </a:tc>
+              </a:tr>
+              <a:tr h="548640">
+                <a:tc>
+                  <a:txBody>
+                    <a:bodyPr/>
+                    <a:lstStyle/>
+                    <a:p>
+                      <a:pPr indent="0" marL="0">
+                        <a:buNone/>
+                      </a:pPr>
+                      <a:r>
+                        <a:rPr lang="en-US" sz="1300" dirty="0">
+                          <a:solidFill>
+                            <a:schemeClr val="tx1"/>
+                          </a:solidFill>
+                        </a:rPr>
+                        <a:t>Expédition</a:t>
+                      </a:r>
+                      <a:endParaRPr lang="en-US" sz="1300" dirty="0"/>
+                    </a:p>
+                  </a:txBody>
+                  <a:tcPr marL="109728" marR="109728" marT="0" marB="0" anchor="ctr">
+                    <a:lnL w="0" cap="flat" cmpd="sng" algn="ctr">
+                      <a:noFill/>
+                    </a:lnL>
+                    <a:lnR w="0" cap="flat" cmpd="sng" algn="ctr">
+                      <a:noFill/>
+                    </a:lnR>
+                    <a:lnT w="0" cap="flat" cmpd="sng" algn="ctr">
+                      <a:noFill/>
+                    </a:lnT>
+                    <a:lnB w="0" cap="flat" cmpd="sng" algn="ctr">
+                      <a:noFill/>
+                    </a:lnB>
+                    <a:solidFill>
+                      <a:schemeClr val="bg1"/>
+                    </a:solidFill>
+                  </a:tcPr>
+                </a:tc>
+                <a:tc>
+                  <a:txBody>
+                    <a:bodyPr/>
+                    <a:lstStyle/>
+                    <a:p>
+                      <a:pPr indent="0" marL="0">
+                        <a:buNone/>
+                      </a:pPr>
+                      <a:r>
+                        <a:rPr lang="en-US" sz="1300" dirty="0">
+                          <a:solidFill>
+                            <a:schemeClr val="tx1"/>
+                          </a:solidFill>
+                        </a:rPr>
+                        <a:t>Step Functions</a:t>
+                      </a:r>
+                      <a:endParaRPr lang="en-US" sz="1300" dirty="0"/>
+                    </a:p>
+                  </a:txBody>
+                  <a:tcPr marL="109728" marR="109728" marT="0" marB="0" anchor="ctr">
+                    <a:lnL w="0" cap="flat" cmpd="sng" algn="ctr">
+                      <a:noFill/>
+                    </a:lnL>
+                    <a:lnR w="0" cap="flat" cmpd="sng" algn="ctr">
+                      <a:noFill/>
+                    </a:lnR>
+                    <a:lnT w="0" cap="flat" cmpd="sng" algn="ctr">
+                      <a:noFill/>
+                    </a:lnT>
+                    <a:lnB w="0" cap="flat" cmpd="sng" algn="ctr">
+                      <a:noFill/>
+                    </a:lnB>
+                    <a:solidFill>
+                      <a:schemeClr val="bg1"/>
+                    </a:solidFill>
+                  </a:tcPr>
+                </a:tc>
+                <a:tc>
+                  <a:txBody>
+                    <a:bodyPr/>
+                    <a:lstStyle/>
+                    <a:p>
+                      <a:pPr indent="0" marL="0">
+                        <a:buNone/>
+                      </a:pPr>
+                      <a:r>
+                        <a:rPr lang="en-US" sz="1300" dirty="0">
+                          <a:solidFill>
+                            <a:schemeClr val="tx1"/>
+                          </a:solidFill>
+                        </a:rPr>
+                        <a:t>Worker du serveur de traitement</a:t>
+                      </a:r>
+                      <a:endParaRPr lang="en-US" sz="1300" dirty="0"/>
+                    </a:p>
+                  </a:txBody>
+                  <a:tcPr marL="109728" marR="109728" marT="0" marB="0" anchor="ctr">
+                    <a:lnL w="0" cap="flat" cmpd="sng" algn="ctr">
+                      <a:noFill/>
+                    </a:lnL>
+                    <a:lnR w="0" cap="flat" cmpd="sng" algn="ctr">
+                      <a:noFill/>
+                    </a:lnR>
+                    <a:lnT w="0" cap="flat" cmpd="sng" algn="ctr">
+                      <a:noFill/>
+                    </a:lnT>
+                    <a:lnB w="0" cap="flat" cmpd="sng" algn="ctr">
+                      <a:noFill/>
+                    </a:lnB>
+                    <a:solidFill>
+                      <a:schemeClr val="bg1"/>
+                    </a:solidFill>
+                  </a:tcPr>
+                </a:tc>
+              </a:tr>
+              <a:tr h="548640">
+                <a:tc>
+                  <a:txBody>
+                    <a:bodyPr/>
+                    <a:lstStyle/>
+                    <a:p>
+                      <a:pPr indent="0" marL="0">
+                        <a:buNone/>
+                      </a:pPr>
+                      <a:r>
+                        <a:rPr lang="en-US" sz="1300" dirty="0">
+                          <a:solidFill>
+                            <a:schemeClr val="tx1"/>
+                          </a:solidFill>
+                        </a:rPr>
+                        <a:t>Coût au repos</a:t>
+                      </a:r>
+                      <a:endParaRPr lang="en-US" sz="1300" dirty="0"/>
+                    </a:p>
+                  </a:txBody>
+                  <a:tcPr marL="109728" marR="109728" marT="0" marB="0" anchor="ctr">
+                    <a:lnL w="0" cap="flat" cmpd="sng" algn="ctr">
+                      <a:noFill/>
+                    </a:lnL>
+                    <a:lnR w="0" cap="flat" cmpd="sng" algn="ctr">
+                      <a:noFill/>
+                    </a:lnR>
+                    <a:lnT w="0" cap="flat" cmpd="sng" algn="ctr">
+                      <a:noFill/>
+                    </a:lnT>
+                    <a:lnB w="0" cap="flat" cmpd="sng" algn="ctr">
+                      <a:noFill/>
+                    </a:lnB>
+                    <a:solidFill>
+                      <a:schemeClr val="bg2"/>
+                    </a:solidFill>
+                  </a:tcPr>
+                </a:tc>
+                <a:tc>
+                  <a:txBody>
+                    <a:bodyPr/>
+                    <a:lstStyle/>
+                    <a:p>
+                      <a:pPr indent="0" marL="0">
+                        <a:buNone/>
+                      </a:pPr>
+                      <a:r>
+                        <a:rPr lang="en-US" sz="1300" dirty="0">
+                          <a:solidFill>
+                            <a:schemeClr val="tx1"/>
+                          </a:solidFill>
+                        </a:rPr>
+                        <a:t>0 €</a:t>
+                      </a:r>
+                      <a:endParaRPr lang="en-US" sz="1300" dirty="0"/>
+                    </a:p>
+                  </a:txBody>
+                  <a:tcPr marL="109728" marR="109728" marT="0" marB="0" anchor="ctr">
+                    <a:lnL w="0" cap="flat" cmpd="sng" algn="ctr">
+                      <a:noFill/>
+                    </a:lnL>
+                    <a:lnR w="0" cap="flat" cmpd="sng" algn="ctr">
+                      <a:noFill/>
+                    </a:lnR>
+                    <a:lnT w="0" cap="flat" cmpd="sng" algn="ctr">
+                      <a:noFill/>
+                    </a:lnT>
+                    <a:lnB w="0" cap="flat" cmpd="sng" algn="ctr">
+                      <a:noFill/>
+                    </a:lnB>
+                    <a:solidFill>
+                      <a:schemeClr val="bg2"/>
+                    </a:solidFill>
+                  </a:tcPr>
+                </a:tc>
+                <a:tc>
+                  <a:txBody>
+                    <a:bodyPr/>
+                    <a:lstStyle/>
+                    <a:p>
+                      <a:pPr indent="0" marL="0">
+                        <a:buNone/>
+                      </a:pPr>
+                      <a:r>
+                        <a:rPr lang="en-US" sz="1300" dirty="0">
+                          <a:solidFill>
+                            <a:schemeClr val="tx1"/>
+                          </a:solidFill>
+                        </a:rPr>
+                        <a:t>~0,60 $ par jour</a:t>
+                      </a:r>
+                      <a:endParaRPr lang="en-US" sz="1300" dirty="0"/>
+                    </a:p>
+                  </a:txBody>
+                  <a:tcPr marL="109728" marR="109728" marT="0" marB="0" anchor="ctr">
+                    <a:lnL w="0" cap="flat" cmpd="sng" algn="ctr">
+                      <a:noFill/>
+                    </a:lnL>
+                    <a:lnR w="0" cap="flat" cmpd="sng" algn="ctr">
+                      <a:noFill/>
+                    </a:lnR>
+                    <a:lnT w="0" cap="flat" cmpd="sng" algn="ctr">
+                      <a:noFill/>
+                    </a:lnT>
+                    <a:lnB w="0" cap="flat" cmpd="sng" algn="ctr">
+                      <a:noFill/>
+                    </a:lnB>
+                    <a:solidFill>
+                      <a:schemeClr val="bg2"/>
+                    </a:solidFill>
+                  </a:tcPr>
+                </a:tc>
+              </a:tr>
+              <a:tr h="548640">
+                <a:tc>
+                  <a:txBody>
+                    <a:bodyPr/>
+                    <a:lstStyle/>
+                    <a:p>
+                      <a:pPr indent="0" marL="0">
+                        <a:buNone/>
+                      </a:pPr>
+                      <a:r>
+                        <a:rPr lang="en-US" sz="1300" b="1" dirty="0">
+                          <a:solidFill>
+                            <a:schemeClr val="tx1"/>
+                          </a:solidFill>
+                        </a:rPr>
+                        <a:t>Exploitation</a:t>
+                      </a:r>
+                      <a:endParaRPr lang="en-US" sz="1300" dirty="0"/>
+                    </a:p>
+                  </a:txBody>
+                  <a:tcPr marL="109728" marR="109728" marT="0" marB="0" anchor="ctr">
+                    <a:lnL w="0" cap="flat" cmpd="sng" algn="ctr">
+                      <a:noFill/>
+                    </a:lnL>
+                    <a:lnR w="0" cap="flat" cmpd="sng" algn="ctr">
+                      <a:noFill/>
+                    </a:lnR>
+                    <a:lnT w="0" cap="flat" cmpd="sng" algn="ctr">
+                      <a:noFill/>
+                    </a:lnT>
+                    <a:lnB w="0" cap="flat" cmpd="sng" algn="ctr">
+                      <a:noFill/>
+                    </a:lnB>
+                    <a:solidFill>
+                      <a:schemeClr val="accent5"/>
+                    </a:solidFill>
+                  </a:tcPr>
+                </a:tc>
+                <a:tc>
+                  <a:txBody>
+                    <a:bodyPr/>
+                    <a:lstStyle/>
+                    <a:p>
+                      <a:pPr indent="0" marL="0">
+                        <a:buNone/>
+                      </a:pPr>
+                      <a:r>
+                        <a:rPr lang="en-US" sz="1300" dirty="0">
+                          <a:solidFill>
+                            <a:schemeClr val="tx1"/>
+                          </a:solidFill>
+                        </a:rPr>
+                        <a:t>Rien à patcher</a:t>
+                      </a:r>
+                      <a:endParaRPr lang="en-US" sz="1300" dirty="0"/>
+                    </a:p>
+                  </a:txBody>
+                  <a:tcPr marL="109728" marR="109728" marT="0" marB="0" anchor="ctr">
+                    <a:lnL w="0" cap="flat" cmpd="sng" algn="ctr">
+                      <a:noFill/>
+                    </a:lnL>
+                    <a:lnR w="0" cap="flat" cmpd="sng" algn="ctr">
+                      <a:noFill/>
+                    </a:lnR>
+                    <a:lnT w="0" cap="flat" cmpd="sng" algn="ctr">
+                      <a:noFill/>
+                    </a:lnT>
+                    <a:lnB w="0" cap="flat" cmpd="sng" algn="ctr">
+                      <a:noFill/>
+                    </a:lnB>
+                    <a:solidFill>
+                      <a:schemeClr val="accent5"/>
+                    </a:solidFill>
+                  </a:tcPr>
+                </a:tc>
+                <a:tc>
+                  <a:txBody>
+                    <a:bodyPr/>
+                    <a:lstStyle/>
+                    <a:p>
+                      <a:pPr indent="0" marL="0">
+                        <a:buNone/>
+                      </a:pPr>
+                      <a:r>
+                        <a:rPr lang="en-US" sz="1300" dirty="0">
+                          <a:solidFill>
+                            <a:schemeClr val="tx1"/>
+                          </a:solidFill>
+                        </a:rPr>
+                        <a:t>AMI, paquets, mémoire à suivre</a:t>
+                      </a:r>
+                      <a:endParaRPr lang="en-US" sz="1300" dirty="0"/>
+                    </a:p>
+                  </a:txBody>
+                  <a:tcPr marL="109728" marR="109728" marT="0" marB="0" anchor="ctr">
+                    <a:lnL w="0" cap="flat" cmpd="sng" algn="ctr">
+                      <a:noFill/>
+                    </a:lnL>
+                    <a:lnR w="0" cap="flat" cmpd="sng" algn="ctr">
+                      <a:noFill/>
+                    </a:lnR>
+                    <a:lnT w="0" cap="flat" cmpd="sng" algn="ctr">
+                      <a:noFill/>
+                    </a:lnT>
+                    <a:lnB w="0" cap="flat" cmpd="sng" algn="ctr">
+                      <a:noFill/>
+                    </a:lnB>
+                    <a:solidFill>
+                      <a:schemeClr val="accent5"/>
+                    </a:solidFill>
+                  </a:tcPr>
+                </a:tc>
+              </a:tr>
+            </a:tbl>
+          </a:graphicData>
+        </a:graphic>
+      </p:graphicFrame>
+      <p:sp>
+        <p:nvSpPr>
+          <p:cNvPr id="25" name="Slide Number Placeholder 0"/>
+          <p:cNvSpPr>
+            <a:spLocks noGrp="1"/>
+          </p:cNvSpPr>
+          <p:nvPr>
+            <p:ph type="sldNum" sz="quarter" idx="4294967295"/>
+          </p:nvPr>
+        </p:nvSpPr>
+        <p:spPr>
+          <a:xfrm>
+            <a:off x="11155680" y="6400800"/>
+            <a:ext cx="457200" cy="274320"/>
+          </a:xfrm>
+          <a:prstGeom prst="rect">
+            <a:avLst/>
+          </a:prstGeom>
+          <a:extLst>
+            <a:ext uri="{C572A759-6A51-4108-AA02-DFA0A04FC94B}">
+              <ma14:wrappingTextBoxFlag xmlns:ma14="http://schemas.microsoft.com/office/mac/drawingml/2011/main" val="0"/>
+            </a:ext>
+          </a:extLst>
+        </p:spPr>
+        <p:txBody>
+          <a:bodyPr/>
+          <a:lstStyle>
+            <a:lvl1pPr>
+              <a:defRPr sz="1000">
+                <a:solidFill>
+                  <a:schemeClr val="accent6"/>
+                </a:solidFill>
+              </a:defRPr>
+            </a:lvl1pPr>
+          </a:lstStyle>
+          <a:p>
+            <a:pPr algn="r"/>
+            <a:fld id="{F7021451-1387-4CA6-816F-3879F97B5CBC}" type="slidenum">
+              <a:rPr b="0" lang="en-US"/>
+              <a:t>10</a:t>
+            </a:fld>
+            <a:endParaRPr lang="en-US"/>
+          </a:p>
+        </p:txBody>
+      </p:sp>
+    </p:spTree>
+  </p:cSld>
+  <p:clrMapOvr>
+    <a:masterClrMapping/>
+  </p:clrMapOvr>
+</p:sld>
+</file>
+
+<file path=ppt/slides/slide13.xml><?xml version="1.0" encoding="utf-8"?>
 <p:sld xmlns:a="http://schemas.openxmlformats.org/drawingml/2006/main" xmlns:r="http://schemas.openxmlformats.org/officeDocument/2006/relationships" xmlns:p="http://schemas.openxmlformats.org/presentationml/2006/main">
   <p:cSld name="Slide 11">
     <p:spTree>
@@ -4073,7 +6577,7 @@
                   <a:schemeClr val="accent1"/>
                 </a:solidFill>
               </a:rPr>
-              <a:t>17</a:t>
+              <a:t>22</a:t>
             </a:r>
             <a:endParaRPr lang="en-US" sz="5400" dirty="0"/>
           </a:p>
@@ -4361,7 +6865,7 @@
                   <a:schemeClr val="bg2"/>
                 </a:solidFill>
               </a:rPr>
-              <a:t>offre gratuite respectée</a:t>
+              <a:t>pour le serverless</a:t>
             </a:r>
             <a:endParaRPr lang="en-US" sz="1400" dirty="0"/>
           </a:p>
@@ -4424,7 +6928,7 @@
                   <a:schemeClr val="bg1"/>
                 </a:solidFill>
               </a:rPr>
-              <a:t>Suite : la solution 2 sur EC2</a:t>
+              <a:t>En parallèle : la solution 2 sur EC2</a:t>
             </a:r>
             <a:endParaRPr lang="en-US" sz="1800" dirty="0"/>
           </a:p>
@@ -4460,7 +6964,7 @@
                   <a:schemeClr val="bg2"/>
                 </a:solidFill>
               </a:rPr>
-              <a:t>Même boutique sur une machine virtuelle, avec le même cœur SNS → SQS et un Kafka mono-nœud, pour comparer les deux approches.</a:t>
+              <a:t>Même boutique sur EC2, ALB, Auto Scaling et RDS, avec le même cœur SNS → SQS et un vrai Kafka. Les deux tournent en même temps.</a:t>
             </a:r>
             <a:endParaRPr lang="en-US" sz="1400" dirty="0"/>
           </a:p>
@@ -4670,7 +7174,7 @@
                   <a:schemeClr val="bg1"/>
                 </a:solidFill>
               </a:rPr>
-              <a:t>Une boutique en ligne 100 % serverless sur AWS</a:t>
+              <a:t>Une boutique en ligne sur AWS, en serverless et sur EC2</a:t>
             </a:r>
             <a:endParaRPr lang="en-US" sz="4000" dirty="0"/>
           </a:p>
@@ -5998,7 +8502,7 @@
                   <a:schemeClr val="accent6"/>
                 </a:solidFill>
               </a:rPr>
-              <a:t>DynamoDB Streams joue le rôle du flux de commandes, gratuitement</a:t>
+              <a:t>Serverless : DynamoDB Streams. EC2 : un vrai broker Kafka sur EC2</a:t>
             </a:r>
             <a:endParaRPr lang="en-US" sz="1400" dirty="0"/>
           </a:p>
@@ -9439,6 +11943,2233 @@
 </file>
 
 <file path=ppt/slides/slide6.xml><?xml version="1.0" encoding="utf-8"?>
+<p:sld xmlns:a="http://schemas.openxmlformats.org/drawingml/2006/main" xmlns:p="http://schemas.openxmlformats.org/presentationml/2006/main" xmlns:r="http://schemas.openxmlformats.org/officeDocument/2006/relationships">
+  <p:cSld>
+    <p:spTree>
+      <p:nvGrpSpPr>
+        <p:cNvPr id="1" name=""/>
+        <p:cNvGrpSpPr/>
+        <p:nvPr/>
+      </p:nvGrpSpPr>
+      <p:grpSpPr/>
+      <p:sp>
+        <p:nvSpPr>
+          <p:cNvPr id="2" name="orateur-48"/>
+          <p:cNvSpPr/>
+          <p:nvPr/>
+        </p:nvSpPr>
+        <p:spPr>
+          <a:xfrm>
+            <a:off x="10259568" y="109728"/>
+            <a:ext cx="1106424" cy="292608"/>
+          </a:xfrm>
+          <a:prstGeom prst="roundRect">
+            <a:avLst>
+              <a:gd name="adj" fmla="val 50000"/>
+            </a:avLst>
+          </a:prstGeom>
+          <a:solidFill>
+            <a:schemeClr val="accent4"/>
+          </a:solidFill>
+          <a:ln w="12700">
+            <a:solidFill>
+              <a:schemeClr val="accent4"/>
+            </a:solidFill>
+            <a:prstDash val="solid"/>
+          </a:ln>
+        </p:spPr>
+      </p:sp>
+      <p:sp>
+        <p:nvSpPr>
+          <p:cNvPr id="3" name="orateur-texte-49"/>
+          <p:cNvSpPr txBox="1"/>
+          <p:nvPr/>
+        </p:nvSpPr>
+        <p:spPr>
+          <a:xfrm>
+            <a:off x="10259568" y="109728"/>
+            <a:ext cx="1106424" cy="292608"/>
+          </a:xfrm>
+          <a:prstGeom prst="rect">
+            <a:avLst/>
+          </a:prstGeom>
+          <a:noFill/>
+          <a:ln/>
+        </p:spPr>
+        <p:txBody>
+          <a:bodyPr wrap="square" lIns="0" tIns="0" rIns="0" bIns="0" rtlCol="0" anchor="ctr"/>
+          <a:lstStyle/>
+          <a:p>
+            <a:pPr algn="ctr" indent="0" marL="0">
+              <a:buNone/>
+            </a:pPr>
+            <a:r>
+              <a:rPr lang="en-US" sz="1100" b="1" dirty="0">
+                <a:solidFill>
+                  <a:schemeClr val="bg1"/>
+                </a:solidFill>
+              </a:rPr>
+              <a:t>Louison</a:t>
+            </a:r>
+            <a:endParaRPr lang="en-US" sz="1100" dirty="0"/>
+          </a:p>
+        </p:txBody>
+      </p:sp>
+      <p:sp>
+        <p:nvSpPr>
+          <p:cNvPr id="4" name="Text 0"/>
+          <p:cNvSpPr/>
+          <p:nvPr>
+            <p:ph idx="100" type="title" hasCustomPrompt="1"/>
+          </p:nvPr>
+        </p:nvSpPr>
+        <p:spPr>
+          <a:xfrm>
+            <a:off x="548640" y="365760"/>
+            <a:ext cx="11064240" cy="777240"/>
+          </a:xfrm>
+          <a:prstGeom prst="rect">
+            <a:avLst/>
+          </a:prstGeom>
+          <a:noFill/>
+          <a:ln/>
+        </p:spPr>
+        <p:txBody>
+          <a:bodyPr wrap="square" lIns="0" tIns="0" rIns="0" bIns="0" rtlCol="0" anchor="ctr"/>
+          <a:lstStyle/>
+          <a:p>
+            <a:pPr algn="l" indent="0" marL="0">
+              <a:buNone/>
+            </a:pPr>
+            <a:r>
+              <a:rPr lang="en-US" sz="3000" b="1" dirty="0">
+                <a:solidFill>
+                  <a:schemeClr val="tx1"/>
+                </a:solidFill>
+              </a:rPr>
+              <a:t>Solution 2 : la même boutique sur des serveurs EC2</a:t>
+            </a:r>
+            <a:endParaRPr lang="en-US" sz="3000" dirty="0"/>
+          </a:p>
+        </p:txBody>
+      </p:sp>
+      <p:sp>
+        <p:nvSpPr>
+          <p:cNvPr id="5" name="service-50"/>
+          <p:cNvSpPr/>
+          <p:nvPr/>
+        </p:nvSpPr>
+        <p:spPr>
+          <a:xfrm>
+            <a:off x="548640" y="1417320"/>
+            <a:ext cx="1600200" cy="749808"/>
+          </a:xfrm>
+          <a:prstGeom prst="roundRect">
+            <a:avLst>
+              <a:gd name="adj" fmla="val 9756"/>
+            </a:avLst>
+          </a:prstGeom>
+          <a:solidFill>
+            <a:schemeClr val="tx1"/>
+          </a:solidFill>
+          <a:ln w="15875">
+            <a:solidFill>
+              <a:schemeClr val="tx1"/>
+            </a:solidFill>
+            <a:prstDash val="solid"/>
+          </a:ln>
+        </p:spPr>
+      </p:sp>
+      <p:sp>
+        <p:nvSpPr>
+          <p:cNvPr id="6" name="service-texte-51"/>
+          <p:cNvSpPr txBox="1"/>
+          <p:nvPr/>
+        </p:nvSpPr>
+        <p:spPr>
+          <a:xfrm>
+            <a:off x="548640" y="1417320"/>
+            <a:ext cx="1600200" cy="749808"/>
+          </a:xfrm>
+          <a:prstGeom prst="rect">
+            <a:avLst/>
+          </a:prstGeom>
+          <a:noFill/>
+          <a:ln/>
+        </p:spPr>
+        <p:txBody>
+          <a:bodyPr wrap="square" lIns="508" tIns="508" rIns="508" bIns="508" rtlCol="0" anchor="ctr"/>
+          <a:lstStyle/>
+          <a:p>
+            <a:pPr algn="ctr" indent="0" marL="0">
+              <a:buNone/>
+            </a:pPr>
+            <a:r>
+              <a:rPr lang="en-US" sz="1200" b="1" dirty="0">
+                <a:solidFill>
+                  <a:schemeClr val="bg1"/>
+                </a:solidFill>
+              </a:rPr>
+              <a:t>Client</a:t>
+            </a:r>
+            <a:endParaRPr lang="en-US" sz="1200" dirty="0"/>
+          </a:p>
+          <a:p>
+            <a:pPr algn="ctr" indent="0" marL="0">
+              <a:buNone/>
+            </a:pPr>
+            <a:r>
+              <a:rPr lang="en-US" sz="1000" dirty="0">
+                <a:solidFill>
+                  <a:schemeClr val="bg1"/>
+                </a:solidFill>
+              </a:rPr>
+              <a:t>navigateur, iPhone</a:t>
+            </a:r>
+            <a:endParaRPr lang="en-US" sz="1200" dirty="0"/>
+          </a:p>
+        </p:txBody>
+      </p:sp>
+      <p:sp>
+        <p:nvSpPr>
+          <p:cNvPr id="7" name="service-52"/>
+          <p:cNvSpPr/>
+          <p:nvPr/>
+        </p:nvSpPr>
+        <p:spPr>
+          <a:xfrm>
+            <a:off x="2450592" y="1417320"/>
+            <a:ext cx="1600200" cy="749808"/>
+          </a:xfrm>
+          <a:prstGeom prst="roundRect">
+            <a:avLst>
+              <a:gd name="adj" fmla="val 9756"/>
+            </a:avLst>
+          </a:prstGeom>
+          <a:solidFill>
+            <a:schemeClr val="tx1"/>
+          </a:solidFill>
+          <a:ln w="15875">
+            <a:solidFill>
+              <a:schemeClr val="tx1"/>
+            </a:solidFill>
+            <a:prstDash val="solid"/>
+          </a:ln>
+        </p:spPr>
+      </p:sp>
+      <p:sp>
+        <p:nvSpPr>
+          <p:cNvPr id="8" name="service-texte-53"/>
+          <p:cNvSpPr txBox="1"/>
+          <p:nvPr/>
+        </p:nvSpPr>
+        <p:spPr>
+          <a:xfrm>
+            <a:off x="2450592" y="1417320"/>
+            <a:ext cx="1600200" cy="749808"/>
+          </a:xfrm>
+          <a:prstGeom prst="rect">
+            <a:avLst/>
+          </a:prstGeom>
+          <a:noFill/>
+          <a:ln/>
+        </p:spPr>
+        <p:txBody>
+          <a:bodyPr wrap="square" lIns="508" tIns="508" rIns="508" bIns="508" rtlCol="0" anchor="ctr"/>
+          <a:lstStyle/>
+          <a:p>
+            <a:pPr algn="ctr" indent="0" marL="0">
+              <a:buNone/>
+            </a:pPr>
+            <a:r>
+              <a:rPr lang="en-US" sz="1200" b="1" dirty="0">
+                <a:solidFill>
+                  <a:schemeClr val="bg1"/>
+                </a:solidFill>
+              </a:rPr>
+              <a:t>CloudFront</a:t>
+            </a:r>
+            <a:endParaRPr lang="en-US" sz="1200" dirty="0"/>
+          </a:p>
+          <a:p>
+            <a:pPr algn="ctr" indent="0" marL="0">
+              <a:buNone/>
+            </a:pPr>
+            <a:r>
+              <a:rPr lang="en-US" sz="1000" dirty="0">
+                <a:solidFill>
+                  <a:schemeClr val="bg1"/>
+                </a:solidFill>
+              </a:rPr>
+              <a:t>HTTPS + en-tête secret</a:t>
+            </a:r>
+            <a:endParaRPr lang="en-US" sz="1200" dirty="0"/>
+          </a:p>
+        </p:txBody>
+      </p:sp>
+      <p:sp>
+        <p:nvSpPr>
+          <p:cNvPr id="9" name="service-54"/>
+          <p:cNvSpPr/>
+          <p:nvPr/>
+        </p:nvSpPr>
+        <p:spPr>
+          <a:xfrm>
+            <a:off x="4352544" y="1417320"/>
+            <a:ext cx="1600200" cy="749808"/>
+          </a:xfrm>
+          <a:prstGeom prst="roundRect">
+            <a:avLst>
+              <a:gd name="adj" fmla="val 9756"/>
+            </a:avLst>
+          </a:prstGeom>
+          <a:solidFill>
+            <a:schemeClr val="tx1"/>
+          </a:solidFill>
+          <a:ln w="15875">
+            <a:solidFill>
+              <a:schemeClr val="tx1"/>
+            </a:solidFill>
+            <a:prstDash val="solid"/>
+          </a:ln>
+        </p:spPr>
+      </p:sp>
+      <p:sp>
+        <p:nvSpPr>
+          <p:cNvPr id="10" name="service-texte-55"/>
+          <p:cNvSpPr txBox="1"/>
+          <p:nvPr/>
+        </p:nvSpPr>
+        <p:spPr>
+          <a:xfrm>
+            <a:off x="4352544" y="1417320"/>
+            <a:ext cx="1600200" cy="749808"/>
+          </a:xfrm>
+          <a:prstGeom prst="rect">
+            <a:avLst/>
+          </a:prstGeom>
+          <a:noFill/>
+          <a:ln/>
+        </p:spPr>
+        <p:txBody>
+          <a:bodyPr wrap="square" lIns="508" tIns="508" rIns="508" bIns="508" rtlCol="0" anchor="ctr"/>
+          <a:lstStyle/>
+          <a:p>
+            <a:pPr algn="ctr" indent="0" marL="0">
+              <a:buNone/>
+            </a:pPr>
+            <a:r>
+              <a:rPr lang="en-US" sz="1200" b="1" dirty="0">
+                <a:solidFill>
+                  <a:schemeClr val="bg1"/>
+                </a:solidFill>
+              </a:rPr>
+              <a:t>ALB</a:t>
+            </a:r>
+            <a:endParaRPr lang="en-US" sz="1200" dirty="0"/>
+          </a:p>
+          <a:p>
+            <a:pPr algn="ctr" indent="0" marL="0">
+              <a:buNone/>
+            </a:pPr>
+            <a:r>
+              <a:rPr lang="en-US" sz="1000" dirty="0">
+                <a:solidFill>
+                  <a:schemeClr val="bg1"/>
+                </a:solidFill>
+              </a:rPr>
+              <a:t>2 zones, contrôle /sante</a:t>
+            </a:r>
+            <a:endParaRPr lang="en-US" sz="1200" dirty="0"/>
+          </a:p>
+        </p:txBody>
+      </p:sp>
+      <p:sp>
+        <p:nvSpPr>
+          <p:cNvPr id="11" name="service-56"/>
+          <p:cNvSpPr/>
+          <p:nvPr/>
+        </p:nvSpPr>
+        <p:spPr>
+          <a:xfrm>
+            <a:off x="6254496" y="1417320"/>
+            <a:ext cx="1600200" cy="749808"/>
+          </a:xfrm>
+          <a:prstGeom prst="roundRect">
+            <a:avLst>
+              <a:gd name="adj" fmla="val 9756"/>
+            </a:avLst>
+          </a:prstGeom>
+          <a:solidFill>
+            <a:schemeClr val="accent5"/>
+          </a:solidFill>
+          <a:ln w="15875">
+            <a:solidFill>
+              <a:schemeClr val="accent1"/>
+            </a:solidFill>
+            <a:prstDash val="solid"/>
+          </a:ln>
+        </p:spPr>
+      </p:sp>
+      <p:sp>
+        <p:nvSpPr>
+          <p:cNvPr id="12" name="service-texte-57"/>
+          <p:cNvSpPr txBox="1"/>
+          <p:nvPr/>
+        </p:nvSpPr>
+        <p:spPr>
+          <a:xfrm>
+            <a:off x="6254496" y="1417320"/>
+            <a:ext cx="1600200" cy="749808"/>
+          </a:xfrm>
+          <a:prstGeom prst="rect">
+            <a:avLst/>
+          </a:prstGeom>
+          <a:noFill/>
+          <a:ln/>
+        </p:spPr>
+        <p:txBody>
+          <a:bodyPr wrap="square" lIns="508" tIns="508" rIns="508" bIns="508" rtlCol="0" anchor="ctr"/>
+          <a:lstStyle/>
+          <a:p>
+            <a:pPr algn="ctr" indent="0" marL="0">
+              <a:buNone/>
+            </a:pPr>
+            <a:r>
+              <a:rPr lang="en-US" sz="1200" b="1" dirty="0">
+                <a:solidFill>
+                  <a:schemeClr val="tx1"/>
+                </a:solidFill>
+              </a:rPr>
+              <a:t>EC2 web</a:t>
+            </a:r>
+            <a:endParaRPr lang="en-US" sz="1200" dirty="0"/>
+          </a:p>
+          <a:p>
+            <a:pPr algn="ctr" indent="0" marL="0">
+              <a:buNone/>
+            </a:pPr>
+            <a:r>
+              <a:rPr lang="en-US" sz="1000" dirty="0">
+                <a:solidFill>
+                  <a:schemeClr val="tx1"/>
+                </a:solidFill>
+              </a:rPr>
+              <a:t>Auto Scaling 1 à 2</a:t>
+            </a:r>
+            <a:endParaRPr lang="en-US" sz="1200" dirty="0"/>
+          </a:p>
+        </p:txBody>
+      </p:sp>
+      <p:sp>
+        <p:nvSpPr>
+          <p:cNvPr id="13" name="service-58"/>
+          <p:cNvSpPr/>
+          <p:nvPr/>
+        </p:nvSpPr>
+        <p:spPr>
+          <a:xfrm>
+            <a:off x="8156448" y="1417320"/>
+            <a:ext cx="1600200" cy="749808"/>
+          </a:xfrm>
+          <a:prstGeom prst="roundRect">
+            <a:avLst>
+              <a:gd name="adj" fmla="val 9756"/>
+            </a:avLst>
+          </a:prstGeom>
+          <a:solidFill>
+            <a:schemeClr val="bg1"/>
+          </a:solidFill>
+          <a:ln w="15875">
+            <a:solidFill>
+              <a:schemeClr val="tx1"/>
+            </a:solidFill>
+            <a:prstDash val="solid"/>
+          </a:ln>
+        </p:spPr>
+      </p:sp>
+      <p:sp>
+        <p:nvSpPr>
+          <p:cNvPr id="14" name="service-texte-59"/>
+          <p:cNvSpPr txBox="1"/>
+          <p:nvPr/>
+        </p:nvSpPr>
+        <p:spPr>
+          <a:xfrm>
+            <a:off x="8156448" y="1417320"/>
+            <a:ext cx="1600200" cy="749808"/>
+          </a:xfrm>
+          <a:prstGeom prst="rect">
+            <a:avLst/>
+          </a:prstGeom>
+          <a:noFill/>
+          <a:ln/>
+        </p:spPr>
+        <p:txBody>
+          <a:bodyPr wrap="square" lIns="508" tIns="508" rIns="508" bIns="508" rtlCol="0" anchor="ctr"/>
+          <a:lstStyle/>
+          <a:p>
+            <a:pPr algn="ctr" indent="0" marL="0">
+              <a:buNone/>
+            </a:pPr>
+            <a:r>
+              <a:rPr lang="en-US" sz="1200" b="1" dirty="0">
+                <a:solidFill>
+                  <a:schemeClr val="tx1"/>
+                </a:solidFill>
+              </a:rPr>
+              <a:t>RDS MySQL</a:t>
+            </a:r>
+            <a:endParaRPr lang="en-US" sz="1200" dirty="0"/>
+          </a:p>
+          <a:p>
+            <a:pPr algn="ctr" indent="0" marL="0">
+              <a:buNone/>
+            </a:pPr>
+            <a:r>
+              <a:rPr lang="en-US" sz="1000" dirty="0">
+                <a:solidFill>
+                  <a:schemeClr val="tx1"/>
+                </a:solidFill>
+              </a:rPr>
+              <a:t>transaction, TLS</a:t>
+            </a:r>
+            <a:endParaRPr lang="en-US" sz="1200" dirty="0"/>
+          </a:p>
+        </p:txBody>
+      </p:sp>
+      <p:sp>
+        <p:nvSpPr>
+          <p:cNvPr id="15" name="service-60"/>
+          <p:cNvSpPr/>
+          <p:nvPr/>
+        </p:nvSpPr>
+        <p:spPr>
+          <a:xfrm>
+            <a:off x="10058400" y="1417320"/>
+            <a:ext cx="1600200" cy="749808"/>
+          </a:xfrm>
+          <a:prstGeom prst="roundRect">
+            <a:avLst>
+              <a:gd name="adj" fmla="val 9756"/>
+            </a:avLst>
+          </a:prstGeom>
+          <a:solidFill>
+            <a:schemeClr val="accent5"/>
+          </a:solidFill>
+          <a:ln w="15875">
+            <a:solidFill>
+              <a:schemeClr val="accent1"/>
+            </a:solidFill>
+            <a:prstDash val="solid"/>
+          </a:ln>
+        </p:spPr>
+      </p:sp>
+      <p:sp>
+        <p:nvSpPr>
+          <p:cNvPr id="16" name="service-texte-61"/>
+          <p:cNvSpPr txBox="1"/>
+          <p:nvPr/>
+        </p:nvSpPr>
+        <p:spPr>
+          <a:xfrm>
+            <a:off x="10058400" y="1417320"/>
+            <a:ext cx="1600200" cy="749808"/>
+          </a:xfrm>
+          <a:prstGeom prst="rect">
+            <a:avLst/>
+          </a:prstGeom>
+          <a:noFill/>
+          <a:ln/>
+        </p:spPr>
+        <p:txBody>
+          <a:bodyPr wrap="square" lIns="508" tIns="508" rIns="508" bIns="508" rtlCol="0" anchor="ctr"/>
+          <a:lstStyle/>
+          <a:p>
+            <a:pPr algn="ctr" indent="0" marL="0">
+              <a:buNone/>
+            </a:pPr>
+            <a:r>
+              <a:rPr lang="en-US" sz="1200" b="1" dirty="0">
+                <a:solidFill>
+                  <a:schemeClr val="tx1"/>
+                </a:solidFill>
+              </a:rPr>
+              <a:t>SNS</a:t>
+            </a:r>
+            <a:endParaRPr lang="en-US" sz="1200" dirty="0"/>
+          </a:p>
+          <a:p>
+            <a:pPr algn="ctr" indent="0" marL="0">
+              <a:buNone/>
+            </a:pPr>
+            <a:r>
+              <a:rPr lang="en-US" sz="1000" dirty="0">
+                <a:solidFill>
+                  <a:schemeClr val="tx1"/>
+                </a:solidFill>
+              </a:rPr>
+              <a:t>COMMANDE_CREEE</a:t>
+            </a:r>
+            <a:endParaRPr lang="en-US" sz="1200" dirty="0"/>
+          </a:p>
+        </p:txBody>
+      </p:sp>
+      <p:sp>
+        <p:nvSpPr>
+          <p:cNvPr id="17" name="fleche-62"/>
+          <p:cNvSpPr/>
+          <p:nvPr/>
+        </p:nvSpPr>
+        <p:spPr>
+          <a:xfrm>
+            <a:off x="2148840" y="1792224"/>
+            <a:ext cx="301752" cy="914"/>
+          </a:xfrm>
+          <a:prstGeom prst="line">
+            <a:avLst/>
+          </a:prstGeom>
+          <a:noFill/>
+          <a:ln w="19050">
+            <a:solidFill>
+              <a:schemeClr val="accent6"/>
+            </a:solidFill>
+            <a:prstDash val="solid"/>
+            <a:tailEnd type="triangle"/>
+          </a:ln>
+        </p:spPr>
+      </p:sp>
+      <p:sp>
+        <p:nvSpPr>
+          <p:cNvPr id="18" name="fleche-63"/>
+          <p:cNvSpPr/>
+          <p:nvPr/>
+        </p:nvSpPr>
+        <p:spPr>
+          <a:xfrm>
+            <a:off x="4050792" y="1792224"/>
+            <a:ext cx="301752" cy="914"/>
+          </a:xfrm>
+          <a:prstGeom prst="line">
+            <a:avLst/>
+          </a:prstGeom>
+          <a:noFill/>
+          <a:ln w="19050">
+            <a:solidFill>
+              <a:schemeClr val="accent6"/>
+            </a:solidFill>
+            <a:prstDash val="solid"/>
+            <a:tailEnd type="triangle"/>
+          </a:ln>
+        </p:spPr>
+      </p:sp>
+      <p:sp>
+        <p:nvSpPr>
+          <p:cNvPr id="19" name="fleche-64"/>
+          <p:cNvSpPr/>
+          <p:nvPr/>
+        </p:nvSpPr>
+        <p:spPr>
+          <a:xfrm>
+            <a:off x="5952744" y="1792224"/>
+            <a:ext cx="301752" cy="914"/>
+          </a:xfrm>
+          <a:prstGeom prst="line">
+            <a:avLst/>
+          </a:prstGeom>
+          <a:noFill/>
+          <a:ln w="19050">
+            <a:solidFill>
+              <a:schemeClr val="accent6"/>
+            </a:solidFill>
+            <a:prstDash val="solid"/>
+            <a:tailEnd type="triangle"/>
+          </a:ln>
+        </p:spPr>
+      </p:sp>
+      <p:sp>
+        <p:nvSpPr>
+          <p:cNvPr id="20" name="fleche-65"/>
+          <p:cNvSpPr/>
+          <p:nvPr/>
+        </p:nvSpPr>
+        <p:spPr>
+          <a:xfrm>
+            <a:off x="7854696" y="1792224"/>
+            <a:ext cx="301752" cy="914"/>
+          </a:xfrm>
+          <a:prstGeom prst="line">
+            <a:avLst/>
+          </a:prstGeom>
+          <a:noFill/>
+          <a:ln w="19050">
+            <a:solidFill>
+              <a:schemeClr val="accent6"/>
+            </a:solidFill>
+            <a:prstDash val="solid"/>
+            <a:tailEnd type="triangle"/>
+          </a:ln>
+        </p:spPr>
+      </p:sp>
+      <p:sp>
+        <p:nvSpPr>
+          <p:cNvPr id="21" name="fleche-66"/>
+          <p:cNvSpPr/>
+          <p:nvPr/>
+        </p:nvSpPr>
+        <p:spPr>
+          <a:xfrm>
+            <a:off x="9756648" y="1792224"/>
+            <a:ext cx="301752" cy="914"/>
+          </a:xfrm>
+          <a:prstGeom prst="line">
+            <a:avLst/>
+          </a:prstGeom>
+          <a:noFill/>
+          <a:ln w="19050">
+            <a:solidFill>
+              <a:schemeClr val="accent6"/>
+            </a:solidFill>
+            <a:prstDash val="solid"/>
+            <a:tailEnd type="triangle"/>
+          </a:ln>
+        </p:spPr>
+      </p:sp>
+      <p:sp>
+        <p:nvSpPr>
+          <p:cNvPr id="22" name="service-67"/>
+          <p:cNvSpPr/>
+          <p:nvPr/>
+        </p:nvSpPr>
+        <p:spPr>
+          <a:xfrm>
+            <a:off x="2450592" y="2606040"/>
+            <a:ext cx="1600200" cy="640080"/>
+          </a:xfrm>
+          <a:prstGeom prst="roundRect">
+            <a:avLst>
+              <a:gd name="adj" fmla="val 11429"/>
+            </a:avLst>
+          </a:prstGeom>
+          <a:solidFill>
+            <a:schemeClr val="bg1"/>
+          </a:solidFill>
+          <a:ln w="15875">
+            <a:solidFill>
+              <a:schemeClr val="tx1"/>
+            </a:solidFill>
+            <a:prstDash val="solid"/>
+          </a:ln>
+        </p:spPr>
+      </p:sp>
+      <p:sp>
+        <p:nvSpPr>
+          <p:cNvPr id="23" name="service-texte-68"/>
+          <p:cNvSpPr txBox="1"/>
+          <p:nvPr/>
+        </p:nvSpPr>
+        <p:spPr>
+          <a:xfrm>
+            <a:off x="2450592" y="2606040"/>
+            <a:ext cx="1600200" cy="640080"/>
+          </a:xfrm>
+          <a:prstGeom prst="rect">
+            <a:avLst/>
+          </a:prstGeom>
+          <a:noFill/>
+          <a:ln/>
+        </p:spPr>
+        <p:txBody>
+          <a:bodyPr wrap="square" lIns="508" tIns="508" rIns="508" bIns="508" rtlCol="0" anchor="ctr"/>
+          <a:lstStyle/>
+          <a:p>
+            <a:pPr algn="ctr" indent="0" marL="0">
+              <a:buNone/>
+            </a:pPr>
+            <a:r>
+              <a:rPr lang="en-US" sz="1200" b="1" dirty="0">
+                <a:solidFill>
+                  <a:schemeClr val="tx1"/>
+                </a:solidFill>
+              </a:rPr>
+              <a:t>S3</a:t>
+            </a:r>
+            <a:endParaRPr lang="en-US" sz="1200" dirty="0"/>
+          </a:p>
+          <a:p>
+            <a:pPr algn="ctr" indent="0" marL="0">
+              <a:buNone/>
+            </a:pPr>
+            <a:r>
+              <a:rPr lang="en-US" sz="1000" dirty="0">
+                <a:solidFill>
+                  <a:schemeClr val="tx1"/>
+                </a:solidFill>
+              </a:rPr>
+              <a:t>code et site, endpoint VPC</a:t>
+            </a:r>
+            <a:endParaRPr lang="en-US" sz="1200" dirty="0"/>
+          </a:p>
+        </p:txBody>
+      </p:sp>
+      <p:sp>
+        <p:nvSpPr>
+          <p:cNvPr id="24" name="fleche-69"/>
+          <p:cNvSpPr/>
+          <p:nvPr/>
+        </p:nvSpPr>
+        <p:spPr>
+          <a:xfrm>
+            <a:off x="3250692" y="2167128"/>
+            <a:ext cx="914" cy="438912"/>
+          </a:xfrm>
+          <a:prstGeom prst="line">
+            <a:avLst/>
+          </a:prstGeom>
+          <a:noFill/>
+          <a:ln w="19050">
+            <a:solidFill>
+              <a:schemeClr val="accent6"/>
+            </a:solidFill>
+            <a:prstDash val="solid"/>
+            <a:tailEnd type="triangle"/>
+          </a:ln>
+        </p:spPr>
+      </p:sp>
+      <p:sp>
+        <p:nvSpPr>
+          <p:cNvPr id="25" name="service-70"/>
+          <p:cNvSpPr/>
+          <p:nvPr/>
+        </p:nvSpPr>
+        <p:spPr>
+          <a:xfrm>
+            <a:off x="4352544" y="2606040"/>
+            <a:ext cx="1600200" cy="640080"/>
+          </a:xfrm>
+          <a:prstGeom prst="roundRect">
+            <a:avLst>
+              <a:gd name="adj" fmla="val 11429"/>
+            </a:avLst>
+          </a:prstGeom>
+          <a:solidFill>
+            <a:schemeClr val="bg1"/>
+          </a:solidFill>
+          <a:ln w="15875">
+            <a:solidFill>
+              <a:schemeClr val="tx1"/>
+            </a:solidFill>
+            <a:prstDash val="solid"/>
+          </a:ln>
+        </p:spPr>
+      </p:sp>
+      <p:sp>
+        <p:nvSpPr>
+          <p:cNvPr id="26" name="service-texte-71"/>
+          <p:cNvSpPr txBox="1"/>
+          <p:nvPr/>
+        </p:nvSpPr>
+        <p:spPr>
+          <a:xfrm>
+            <a:off x="4352544" y="2606040"/>
+            <a:ext cx="1600200" cy="640080"/>
+          </a:xfrm>
+          <a:prstGeom prst="rect">
+            <a:avLst/>
+          </a:prstGeom>
+          <a:noFill/>
+          <a:ln/>
+        </p:spPr>
+        <p:txBody>
+          <a:bodyPr wrap="square" lIns="508" tIns="508" rIns="508" bIns="508" rtlCol="0" anchor="ctr"/>
+          <a:lstStyle/>
+          <a:p>
+            <a:pPr algn="ctr" indent="0" marL="0">
+              <a:buNone/>
+            </a:pPr>
+            <a:r>
+              <a:rPr lang="en-US" sz="1200" b="1" dirty="0">
+                <a:solidFill>
+                  <a:schemeClr val="tx1"/>
+                </a:solidFill>
+              </a:rPr>
+              <a:t>CloudWatch</a:t>
+            </a:r>
+            <a:endParaRPr lang="en-US" sz="1200" dirty="0"/>
+          </a:p>
+          <a:p>
+            <a:pPr algn="ctr" indent="0" marL="0">
+              <a:buNone/>
+            </a:pPr>
+            <a:r>
+              <a:rPr lang="en-US" sz="1000" dirty="0">
+                <a:solidFill>
+                  <a:schemeClr val="tx1"/>
+                </a:solidFill>
+              </a:rPr>
+              <a:t>santé, alarmes</a:t>
+            </a:r>
+            <a:endParaRPr lang="en-US" sz="1200" dirty="0"/>
+          </a:p>
+        </p:txBody>
+      </p:sp>
+      <p:sp>
+        <p:nvSpPr>
+          <p:cNvPr id="27" name="fleche-72"/>
+          <p:cNvSpPr/>
+          <p:nvPr/>
+        </p:nvSpPr>
+        <p:spPr>
+          <a:xfrm flipV="1">
+            <a:off x="5152644" y="2167128"/>
+            <a:ext cx="914" cy="438912"/>
+          </a:xfrm>
+          <a:prstGeom prst="line">
+            <a:avLst/>
+          </a:prstGeom>
+          <a:noFill/>
+          <a:ln w="19050">
+            <a:solidFill>
+              <a:schemeClr val="accent6"/>
+            </a:solidFill>
+            <a:prstDash val="solid"/>
+            <a:tailEnd type="triangle"/>
+          </a:ln>
+        </p:spPr>
+      </p:sp>
+      <p:sp>
+        <p:nvSpPr>
+          <p:cNvPr id="28" name="service-73"/>
+          <p:cNvSpPr/>
+          <p:nvPr/>
+        </p:nvSpPr>
+        <p:spPr>
+          <a:xfrm>
+            <a:off x="6254496" y="2606040"/>
+            <a:ext cx="1600200" cy="640080"/>
+          </a:xfrm>
+          <a:prstGeom prst="roundRect">
+            <a:avLst>
+              <a:gd name="adj" fmla="val 11429"/>
+            </a:avLst>
+          </a:prstGeom>
+          <a:solidFill>
+            <a:schemeClr val="bg1"/>
+          </a:solidFill>
+          <a:ln w="15875">
+            <a:solidFill>
+              <a:schemeClr val="tx1"/>
+            </a:solidFill>
+            <a:prstDash val="solid"/>
+          </a:ln>
+        </p:spPr>
+      </p:sp>
+      <p:sp>
+        <p:nvSpPr>
+          <p:cNvPr id="29" name="service-texte-74"/>
+          <p:cNvSpPr txBox="1"/>
+          <p:nvPr/>
+        </p:nvSpPr>
+        <p:spPr>
+          <a:xfrm>
+            <a:off x="6254496" y="2606040"/>
+            <a:ext cx="1600200" cy="640080"/>
+          </a:xfrm>
+          <a:prstGeom prst="rect">
+            <a:avLst/>
+          </a:prstGeom>
+          <a:noFill/>
+          <a:ln/>
+        </p:spPr>
+        <p:txBody>
+          <a:bodyPr wrap="square" lIns="508" tIns="508" rIns="508" bIns="508" rtlCol="0" anchor="ctr"/>
+          <a:lstStyle/>
+          <a:p>
+            <a:pPr algn="ctr" indent="0" marL="0">
+              <a:buNone/>
+            </a:pPr>
+            <a:r>
+              <a:rPr lang="en-US" sz="1200" b="1" dirty="0">
+                <a:solidFill>
+                  <a:schemeClr val="tx1"/>
+                </a:solidFill>
+              </a:rPr>
+              <a:t>SSM</a:t>
+            </a:r>
+            <a:endParaRPr lang="en-US" sz="1200" dirty="0"/>
+          </a:p>
+          <a:p>
+            <a:pPr algn="ctr" indent="0" marL="0">
+              <a:buNone/>
+            </a:pPr>
+            <a:r>
+              <a:rPr lang="en-US" sz="1000" dirty="0">
+                <a:solidFill>
+                  <a:schemeClr val="tx1"/>
+                </a:solidFill>
+              </a:rPr>
+              <a:t>mot de passe, Session Manager</a:t>
+            </a:r>
+            <a:endParaRPr lang="en-US" sz="1200" dirty="0"/>
+          </a:p>
+        </p:txBody>
+      </p:sp>
+      <p:sp>
+        <p:nvSpPr>
+          <p:cNvPr id="30" name="fleche-75"/>
+          <p:cNvSpPr/>
+          <p:nvPr/>
+        </p:nvSpPr>
+        <p:spPr>
+          <a:xfrm>
+            <a:off x="7054596" y="2167128"/>
+            <a:ext cx="914" cy="438912"/>
+          </a:xfrm>
+          <a:prstGeom prst="line">
+            <a:avLst/>
+          </a:prstGeom>
+          <a:noFill/>
+          <a:ln w="19050">
+            <a:solidFill>
+              <a:schemeClr val="accent6"/>
+            </a:solidFill>
+            <a:prstDash val="solid"/>
+            <a:tailEnd type="triangle"/>
+          </a:ln>
+        </p:spPr>
+      </p:sp>
+      <p:sp>
+        <p:nvSpPr>
+          <p:cNvPr id="31" name="trait-76"/>
+          <p:cNvSpPr/>
+          <p:nvPr/>
+        </p:nvSpPr>
+        <p:spPr>
+          <a:xfrm>
+            <a:off x="10858500" y="2167128"/>
+            <a:ext cx="914" cy="1444752"/>
+          </a:xfrm>
+          <a:prstGeom prst="line">
+            <a:avLst/>
+          </a:prstGeom>
+          <a:noFill/>
+          <a:ln w="19050">
+            <a:solidFill>
+              <a:schemeClr val="accent6"/>
+            </a:solidFill>
+            <a:prstDash val="solid"/>
+          </a:ln>
+        </p:spPr>
+      </p:sp>
+      <p:sp>
+        <p:nvSpPr>
+          <p:cNvPr id="32" name="trait-77"/>
+          <p:cNvSpPr/>
+          <p:nvPr/>
+        </p:nvSpPr>
+        <p:spPr>
+          <a:xfrm>
+            <a:off x="1325880" y="3611880"/>
+            <a:ext cx="9532620" cy="914"/>
+          </a:xfrm>
+          <a:prstGeom prst="line">
+            <a:avLst/>
+          </a:prstGeom>
+          <a:noFill/>
+          <a:ln w="19050">
+            <a:solidFill>
+              <a:schemeClr val="accent6"/>
+            </a:solidFill>
+            <a:prstDash val="solid"/>
+          </a:ln>
+        </p:spPr>
+      </p:sp>
+      <p:sp>
+        <p:nvSpPr>
+          <p:cNvPr id="33" name="fleche-78"/>
+          <p:cNvSpPr/>
+          <p:nvPr/>
+        </p:nvSpPr>
+        <p:spPr>
+          <a:xfrm>
+            <a:off x="1325880" y="3611880"/>
+            <a:ext cx="914" cy="365760"/>
+          </a:xfrm>
+          <a:prstGeom prst="line">
+            <a:avLst/>
+          </a:prstGeom>
+          <a:noFill/>
+          <a:ln w="19050">
+            <a:solidFill>
+              <a:schemeClr val="accent6"/>
+            </a:solidFill>
+            <a:prstDash val="solid"/>
+            <a:tailEnd type="triangle"/>
+          </a:ln>
+        </p:spPr>
+      </p:sp>
+      <p:sp>
+        <p:nvSpPr>
+          <p:cNvPr id="34" name="service-79"/>
+          <p:cNvSpPr/>
+          <p:nvPr/>
+        </p:nvSpPr>
+        <p:spPr>
+          <a:xfrm>
+            <a:off x="548640" y="3977640"/>
+            <a:ext cx="1554480" cy="2148840"/>
+          </a:xfrm>
+          <a:prstGeom prst="roundRect">
+            <a:avLst>
+              <a:gd name="adj" fmla="val 4706"/>
+            </a:avLst>
+          </a:prstGeom>
+          <a:solidFill>
+            <a:schemeClr val="tx1"/>
+          </a:solidFill>
+          <a:ln w="15875">
+            <a:solidFill>
+              <a:schemeClr val="tx1"/>
+            </a:solidFill>
+            <a:prstDash val="solid"/>
+          </a:ln>
+        </p:spPr>
+      </p:sp>
+      <p:sp>
+        <p:nvSpPr>
+          <p:cNvPr id="35" name="service-texte-80"/>
+          <p:cNvSpPr txBox="1"/>
+          <p:nvPr/>
+        </p:nvSpPr>
+        <p:spPr>
+          <a:xfrm>
+            <a:off x="548640" y="3977640"/>
+            <a:ext cx="1554480" cy="2148840"/>
+          </a:xfrm>
+          <a:prstGeom prst="rect">
+            <a:avLst/>
+          </a:prstGeom>
+          <a:noFill/>
+          <a:ln/>
+        </p:spPr>
+        <p:txBody>
+          <a:bodyPr wrap="square" lIns="508" tIns="508" rIns="508" bIns="508" rtlCol="0" anchor="ctr"/>
+          <a:lstStyle/>
+          <a:p>
+            <a:pPr algn="ctr" indent="0" marL="0">
+              <a:buNone/>
+            </a:pPr>
+            <a:r>
+              <a:rPr lang="en-US" sz="1200" b="1" dirty="0">
+                <a:solidFill>
+                  <a:schemeClr val="bg1"/>
+                </a:solidFill>
+              </a:rPr>
+              <a:t>EC2 traitement</a:t>
+            </a:r>
+            <a:endParaRPr lang="en-US" sz="1200" dirty="0"/>
+          </a:p>
+          <a:p>
+            <a:pPr algn="ctr" indent="0" marL="0">
+              <a:buNone/>
+            </a:pPr>
+            <a:r>
+              <a:rPr lang="en-US" sz="1000" dirty="0">
+                <a:solidFill>
+                  <a:schemeClr val="bg1"/>
+                </a:solidFill>
+              </a:rPr>
+              <a:t>workers +</a:t>
+            </a:r>
+            <a:endParaRPr lang="en-US" sz="1200" dirty="0"/>
+          </a:p>
+          <a:p>
+            <a:pPr algn="ctr" indent="0" marL="0">
+              <a:buNone/>
+            </a:pPr>
+            <a:r>
+              <a:rPr lang="en-US" sz="1000" dirty="0">
+                <a:solidFill>
+                  <a:schemeClr val="bg1"/>
+                </a:solidFill>
+              </a:rPr>
+              <a:t>Kafka (KRaft)</a:t>
+            </a:r>
+            <a:endParaRPr lang="en-US" sz="1200" dirty="0"/>
+          </a:p>
+        </p:txBody>
+      </p:sp>
+      <p:sp>
+        <p:nvSpPr>
+          <p:cNvPr id="36" name="fleche-81"/>
+          <p:cNvSpPr/>
+          <p:nvPr/>
+        </p:nvSpPr>
+        <p:spPr>
+          <a:xfrm>
+            <a:off x="2103120" y="4325112"/>
+            <a:ext cx="548640" cy="914"/>
+          </a:xfrm>
+          <a:prstGeom prst="line">
+            <a:avLst/>
+          </a:prstGeom>
+          <a:noFill/>
+          <a:ln w="19050">
+            <a:solidFill>
+              <a:schemeClr val="accent6"/>
+            </a:solidFill>
+            <a:prstDash val="solid"/>
+            <a:tailEnd type="triangle"/>
+          </a:ln>
+        </p:spPr>
+      </p:sp>
+      <p:sp>
+        <p:nvSpPr>
+          <p:cNvPr id="37" name="service-82"/>
+          <p:cNvSpPr/>
+          <p:nvPr/>
+        </p:nvSpPr>
+        <p:spPr>
+          <a:xfrm>
+            <a:off x="2651760" y="4023360"/>
+            <a:ext cx="1783080" cy="603504"/>
+          </a:xfrm>
+          <a:prstGeom prst="roundRect">
+            <a:avLst>
+              <a:gd name="adj" fmla="val 12121"/>
+            </a:avLst>
+          </a:prstGeom>
+          <a:solidFill>
+            <a:schemeClr val="bg1"/>
+          </a:solidFill>
+          <a:ln w="15875">
+            <a:solidFill>
+              <a:schemeClr val="tx1"/>
+            </a:solidFill>
+            <a:prstDash val="solid"/>
+          </a:ln>
+        </p:spPr>
+      </p:sp>
+      <p:sp>
+        <p:nvSpPr>
+          <p:cNvPr id="38" name="service-texte-83"/>
+          <p:cNvSpPr txBox="1"/>
+          <p:nvPr/>
+        </p:nvSpPr>
+        <p:spPr>
+          <a:xfrm>
+            <a:off x="2651760" y="4023360"/>
+            <a:ext cx="1783080" cy="603504"/>
+          </a:xfrm>
+          <a:prstGeom prst="rect">
+            <a:avLst/>
+          </a:prstGeom>
+          <a:noFill/>
+          <a:ln/>
+        </p:spPr>
+        <p:txBody>
+          <a:bodyPr wrap="square" lIns="508" tIns="508" rIns="508" bIns="508" rtlCol="0" anchor="ctr"/>
+          <a:lstStyle/>
+          <a:p>
+            <a:pPr algn="ctr" indent="0" marL="0">
+              <a:buNone/>
+            </a:pPr>
+            <a:r>
+              <a:rPr lang="en-US" sz="1200" b="1" dirty="0">
+                <a:solidFill>
+                  <a:schemeClr val="tx1"/>
+                </a:solidFill>
+              </a:rPr>
+              <a:t>SQS traitement</a:t>
+            </a:r>
+            <a:endParaRPr lang="en-US" sz="1200" dirty="0"/>
+          </a:p>
+          <a:p>
+            <a:pPr algn="ctr" indent="0" marL="0">
+              <a:buNone/>
+            </a:pPr>
+            <a:r>
+              <a:rPr lang="en-US" sz="1000" dirty="0">
+                <a:solidFill>
+                  <a:schemeClr val="tx1"/>
+                </a:solidFill>
+              </a:rPr>
+              <a:t>file + DLQ</a:t>
+            </a:r>
+            <a:endParaRPr lang="en-US" sz="1200" dirty="0"/>
+          </a:p>
+        </p:txBody>
+      </p:sp>
+      <p:sp>
+        <p:nvSpPr>
+          <p:cNvPr id="39" name="service-84"/>
+          <p:cNvSpPr/>
+          <p:nvPr/>
+        </p:nvSpPr>
+        <p:spPr>
+          <a:xfrm>
+            <a:off x="4709160" y="4023360"/>
+            <a:ext cx="1783080" cy="603504"/>
+          </a:xfrm>
+          <a:prstGeom prst="roundRect">
+            <a:avLst>
+              <a:gd name="adj" fmla="val 12121"/>
+            </a:avLst>
+          </a:prstGeom>
+          <a:solidFill>
+            <a:schemeClr val="accent5"/>
+          </a:solidFill>
+          <a:ln w="15875">
+            <a:solidFill>
+              <a:schemeClr val="accent1"/>
+            </a:solidFill>
+            <a:prstDash val="solid"/>
+          </a:ln>
+        </p:spPr>
+      </p:sp>
+      <p:sp>
+        <p:nvSpPr>
+          <p:cNvPr id="40" name="service-texte-85"/>
+          <p:cNvSpPr txBox="1"/>
+          <p:nvPr/>
+        </p:nvSpPr>
+        <p:spPr>
+          <a:xfrm>
+            <a:off x="4709160" y="4023360"/>
+            <a:ext cx="1783080" cy="603504"/>
+          </a:xfrm>
+          <a:prstGeom prst="rect">
+            <a:avLst/>
+          </a:prstGeom>
+          <a:noFill/>
+          <a:ln/>
+        </p:spPr>
+        <p:txBody>
+          <a:bodyPr wrap="square" lIns="508" tIns="508" rIns="508" bIns="508" rtlCol="0" anchor="ctr"/>
+          <a:lstStyle/>
+          <a:p>
+            <a:pPr algn="ctr" indent="0" marL="0">
+              <a:buNone/>
+            </a:pPr>
+            <a:r>
+              <a:rPr lang="en-US" sz="1200" b="1" dirty="0">
+                <a:solidFill>
+                  <a:schemeClr val="tx1"/>
+                </a:solidFill>
+              </a:rPr>
+              <a:t>Worker</a:t>
+            </a:r>
+            <a:endParaRPr lang="en-US" sz="1200" dirty="0"/>
+          </a:p>
+          <a:p>
+            <a:pPr algn="ctr" indent="0" marL="0">
+              <a:buNone/>
+            </a:pPr>
+            <a:r>
+              <a:rPr lang="en-US" sz="1000" dirty="0">
+                <a:solidFill>
+                  <a:schemeClr val="tx1"/>
+                </a:solidFill>
+              </a:rPr>
+              <a:t>réserve, simule</a:t>
+            </a:r>
+            <a:endParaRPr lang="en-US" sz="1200" dirty="0"/>
+          </a:p>
+        </p:txBody>
+      </p:sp>
+      <p:sp>
+        <p:nvSpPr>
+          <p:cNvPr id="41" name="fleche-86"/>
+          <p:cNvSpPr/>
+          <p:nvPr/>
+        </p:nvSpPr>
+        <p:spPr>
+          <a:xfrm>
+            <a:off x="4434840" y="4325112"/>
+            <a:ext cx="274320" cy="914"/>
+          </a:xfrm>
+          <a:prstGeom prst="line">
+            <a:avLst/>
+          </a:prstGeom>
+          <a:noFill/>
+          <a:ln w="19050">
+            <a:solidFill>
+              <a:schemeClr val="accent6"/>
+            </a:solidFill>
+            <a:prstDash val="solid"/>
+            <a:tailEnd type="triangle"/>
+          </a:ln>
+        </p:spPr>
+      </p:sp>
+      <p:sp>
+        <p:nvSpPr>
+          <p:cNvPr id="42" name="service-87"/>
+          <p:cNvSpPr/>
+          <p:nvPr/>
+        </p:nvSpPr>
+        <p:spPr>
+          <a:xfrm>
+            <a:off x="6766560" y="4023360"/>
+            <a:ext cx="1783080" cy="603504"/>
+          </a:xfrm>
+          <a:prstGeom prst="roundRect">
+            <a:avLst>
+              <a:gd name="adj" fmla="val 12121"/>
+            </a:avLst>
+          </a:prstGeom>
+          <a:solidFill>
+            <a:schemeClr val="accent5"/>
+          </a:solidFill>
+          <a:ln w="15875">
+            <a:solidFill>
+              <a:schemeClr val="accent1"/>
+            </a:solidFill>
+            <a:prstDash val="solid"/>
+          </a:ln>
+        </p:spPr>
+      </p:sp>
+      <p:sp>
+        <p:nvSpPr>
+          <p:cNvPr id="43" name="service-texte-88"/>
+          <p:cNvSpPr txBox="1"/>
+          <p:nvPr/>
+        </p:nvSpPr>
+        <p:spPr>
+          <a:xfrm>
+            <a:off x="6766560" y="4023360"/>
+            <a:ext cx="1783080" cy="603504"/>
+          </a:xfrm>
+          <a:prstGeom prst="rect">
+            <a:avLst/>
+          </a:prstGeom>
+          <a:noFill/>
+          <a:ln/>
+        </p:spPr>
+        <p:txBody>
+          <a:bodyPr wrap="square" lIns="508" tIns="508" rIns="508" bIns="508" rtlCol="0" anchor="ctr"/>
+          <a:lstStyle/>
+          <a:p>
+            <a:pPr algn="ctr" indent="0" marL="0">
+              <a:buNone/>
+            </a:pPr>
+            <a:r>
+              <a:rPr lang="en-US" sz="1200" b="1" dirty="0">
+                <a:solidFill>
+                  <a:schemeClr val="tx1"/>
+                </a:solidFill>
+              </a:rPr>
+              <a:t>Amazon SES</a:t>
+            </a:r>
+            <a:endParaRPr lang="en-US" sz="1200" dirty="0"/>
+          </a:p>
+          <a:p>
+            <a:pPr algn="ctr" indent="0" marL="0">
+              <a:buNone/>
+            </a:pPr>
+            <a:r>
+              <a:rPr lang="en-US" sz="1000" dirty="0">
+                <a:solidFill>
+                  <a:schemeClr val="tx1"/>
+                </a:solidFill>
+              </a:rPr>
+              <a:t>confirmation</a:t>
+            </a:r>
+            <a:endParaRPr lang="en-US" sz="1200" dirty="0"/>
+          </a:p>
+        </p:txBody>
+      </p:sp>
+      <p:sp>
+        <p:nvSpPr>
+          <p:cNvPr id="44" name="fleche-89"/>
+          <p:cNvSpPr/>
+          <p:nvPr/>
+        </p:nvSpPr>
+        <p:spPr>
+          <a:xfrm>
+            <a:off x="6492240" y="4325112"/>
+            <a:ext cx="274320" cy="914"/>
+          </a:xfrm>
+          <a:prstGeom prst="line">
+            <a:avLst/>
+          </a:prstGeom>
+          <a:noFill/>
+          <a:ln w="19050">
+            <a:solidFill>
+              <a:schemeClr val="accent6"/>
+            </a:solidFill>
+            <a:prstDash val="solid"/>
+            <a:tailEnd type="triangle"/>
+          </a:ln>
+        </p:spPr>
+      </p:sp>
+      <p:sp>
+        <p:nvSpPr>
+          <p:cNvPr id="45" name="texte-90"/>
+          <p:cNvSpPr txBox="1"/>
+          <p:nvPr/>
+        </p:nvSpPr>
+        <p:spPr>
+          <a:xfrm>
+            <a:off x="8823960" y="4133088"/>
+            <a:ext cx="2788920" cy="411480"/>
+          </a:xfrm>
+          <a:prstGeom prst="rect">
+            <a:avLst/>
+          </a:prstGeom>
+          <a:noFill/>
+          <a:ln/>
+        </p:spPr>
+        <p:txBody>
+          <a:bodyPr wrap="square" lIns="0" tIns="0" rIns="0" bIns="0" rtlCol="0" anchor="ctr"/>
+          <a:lstStyle/>
+          <a:p>
+            <a:pPr indent="0" marL="0">
+              <a:buNone/>
+            </a:pPr>
+            <a:r>
+              <a:rPr lang="en-US" sz="1200" dirty="0">
+                <a:solidFill>
+                  <a:schemeClr val="accent6"/>
+                </a:solidFill>
+              </a:rPr>
+              <a:t>Chaque statut écrit dans RDS et publié sur Kafka</a:t>
+            </a:r>
+            <a:endParaRPr lang="en-US" sz="1200" dirty="0"/>
+          </a:p>
+        </p:txBody>
+      </p:sp>
+      <p:sp>
+        <p:nvSpPr>
+          <p:cNvPr id="46" name="fleche-91"/>
+          <p:cNvSpPr/>
+          <p:nvPr/>
+        </p:nvSpPr>
+        <p:spPr>
+          <a:xfrm>
+            <a:off x="2103120" y="5074920"/>
+            <a:ext cx="548640" cy="914"/>
+          </a:xfrm>
+          <a:prstGeom prst="line">
+            <a:avLst/>
+          </a:prstGeom>
+          <a:noFill/>
+          <a:ln w="19050">
+            <a:solidFill>
+              <a:schemeClr val="accent6"/>
+            </a:solidFill>
+            <a:prstDash val="solid"/>
+            <a:tailEnd type="triangle"/>
+          </a:ln>
+        </p:spPr>
+      </p:sp>
+      <p:sp>
+        <p:nvSpPr>
+          <p:cNvPr id="47" name="service-92"/>
+          <p:cNvSpPr/>
+          <p:nvPr/>
+        </p:nvSpPr>
+        <p:spPr>
+          <a:xfrm>
+            <a:off x="2651760" y="4773168"/>
+            <a:ext cx="1783080" cy="603504"/>
+          </a:xfrm>
+          <a:prstGeom prst="roundRect">
+            <a:avLst>
+              <a:gd name="adj" fmla="val 12121"/>
+            </a:avLst>
+          </a:prstGeom>
+          <a:solidFill>
+            <a:schemeClr val="bg1"/>
+          </a:solidFill>
+          <a:ln w="15875">
+            <a:solidFill>
+              <a:schemeClr val="tx1"/>
+            </a:solidFill>
+            <a:prstDash val="solid"/>
+          </a:ln>
+        </p:spPr>
+      </p:sp>
+      <p:sp>
+        <p:nvSpPr>
+          <p:cNvPr id="48" name="service-texte-93"/>
+          <p:cNvSpPr txBox="1"/>
+          <p:nvPr/>
+        </p:nvSpPr>
+        <p:spPr>
+          <a:xfrm>
+            <a:off x="2651760" y="4773168"/>
+            <a:ext cx="1783080" cy="603504"/>
+          </a:xfrm>
+          <a:prstGeom prst="rect">
+            <a:avLst/>
+          </a:prstGeom>
+          <a:noFill/>
+          <a:ln/>
+        </p:spPr>
+        <p:txBody>
+          <a:bodyPr wrap="square" lIns="508" tIns="508" rIns="508" bIns="508" rtlCol="0" anchor="ctr"/>
+          <a:lstStyle/>
+          <a:p>
+            <a:pPr algn="ctr" indent="0" marL="0">
+              <a:buNone/>
+            </a:pPr>
+            <a:r>
+              <a:rPr lang="en-US" sz="1200" b="1" dirty="0">
+                <a:solidFill>
+                  <a:schemeClr val="tx1"/>
+                </a:solidFill>
+              </a:rPr>
+              <a:t>Kafka</a:t>
+            </a:r>
+            <a:endParaRPr lang="en-US" sz="1200" dirty="0"/>
+          </a:p>
+          <a:p>
+            <a:pPr algn="ctr" indent="0" marL="0">
+              <a:buNone/>
+            </a:pPr>
+            <a:r>
+              <a:rPr lang="en-US" sz="1000" dirty="0">
+                <a:solidFill>
+                  <a:schemeClr val="tx1"/>
+                </a:solidFill>
+              </a:rPr>
+              <a:t>topic commandes</a:t>
+            </a:r>
+            <a:endParaRPr lang="en-US" sz="1200" dirty="0"/>
+          </a:p>
+        </p:txBody>
+      </p:sp>
+      <p:sp>
+        <p:nvSpPr>
+          <p:cNvPr id="49" name="service-94"/>
+          <p:cNvSpPr/>
+          <p:nvPr/>
+        </p:nvSpPr>
+        <p:spPr>
+          <a:xfrm>
+            <a:off x="4709160" y="4773168"/>
+            <a:ext cx="1783080" cy="603504"/>
+          </a:xfrm>
+          <a:prstGeom prst="roundRect">
+            <a:avLst>
+              <a:gd name="adj" fmla="val 12121"/>
+            </a:avLst>
+          </a:prstGeom>
+          <a:solidFill>
+            <a:schemeClr val="accent5"/>
+          </a:solidFill>
+          <a:ln w="15875">
+            <a:solidFill>
+              <a:schemeClr val="accent1"/>
+            </a:solidFill>
+            <a:prstDash val="solid"/>
+          </a:ln>
+        </p:spPr>
+      </p:sp>
+      <p:sp>
+        <p:nvSpPr>
+          <p:cNvPr id="50" name="service-texte-95"/>
+          <p:cNvSpPr txBox="1"/>
+          <p:nvPr/>
+        </p:nvSpPr>
+        <p:spPr>
+          <a:xfrm>
+            <a:off x="4709160" y="4773168"/>
+            <a:ext cx="1783080" cy="603504"/>
+          </a:xfrm>
+          <a:prstGeom prst="rect">
+            <a:avLst/>
+          </a:prstGeom>
+          <a:noFill/>
+          <a:ln/>
+        </p:spPr>
+        <p:txBody>
+          <a:bodyPr wrap="square" lIns="508" tIns="508" rIns="508" bIns="508" rtlCol="0" anchor="ctr"/>
+          <a:lstStyle/>
+          <a:p>
+            <a:pPr algn="ctr" indent="0" marL="0">
+              <a:buNone/>
+            </a:pPr>
+            <a:r>
+              <a:rPr lang="en-US" sz="1200" b="1" dirty="0">
+                <a:solidFill>
+                  <a:schemeClr val="tx1"/>
+                </a:solidFill>
+              </a:rPr>
+              <a:t>Groupe audit</a:t>
+            </a:r>
+            <a:endParaRPr lang="en-US" sz="1200" dirty="0"/>
+          </a:p>
+          <a:p>
+            <a:pPr algn="ctr" indent="0" marL="0">
+              <a:buNone/>
+            </a:pPr>
+            <a:r>
+              <a:rPr lang="en-US" sz="1000" dirty="0">
+                <a:solidFill>
+                  <a:schemeClr val="tx1"/>
+                </a:solidFill>
+              </a:rPr>
+              <a:t>consommateur</a:t>
+            </a:r>
+            <a:endParaRPr lang="en-US" sz="1200" dirty="0"/>
+          </a:p>
+        </p:txBody>
+      </p:sp>
+      <p:sp>
+        <p:nvSpPr>
+          <p:cNvPr id="51" name="fleche-96"/>
+          <p:cNvSpPr/>
+          <p:nvPr/>
+        </p:nvSpPr>
+        <p:spPr>
+          <a:xfrm>
+            <a:off x="4434840" y="5074920"/>
+            <a:ext cx="274320" cy="914"/>
+          </a:xfrm>
+          <a:prstGeom prst="line">
+            <a:avLst/>
+          </a:prstGeom>
+          <a:noFill/>
+          <a:ln w="19050">
+            <a:solidFill>
+              <a:schemeClr val="accent6"/>
+            </a:solidFill>
+            <a:prstDash val="solid"/>
+            <a:tailEnd type="triangle"/>
+          </a:ln>
+        </p:spPr>
+      </p:sp>
+      <p:sp>
+        <p:nvSpPr>
+          <p:cNvPr id="52" name="service-97"/>
+          <p:cNvSpPr/>
+          <p:nvPr/>
+        </p:nvSpPr>
+        <p:spPr>
+          <a:xfrm>
+            <a:off x="6766560" y="4773168"/>
+            <a:ext cx="1783080" cy="603504"/>
+          </a:xfrm>
+          <a:prstGeom prst="roundRect">
+            <a:avLst>
+              <a:gd name="adj" fmla="val 12121"/>
+            </a:avLst>
+          </a:prstGeom>
+          <a:solidFill>
+            <a:schemeClr val="bg1"/>
+          </a:solidFill>
+          <a:ln w="15875">
+            <a:solidFill>
+              <a:schemeClr val="tx1"/>
+            </a:solidFill>
+            <a:prstDash val="solid"/>
+          </a:ln>
+        </p:spPr>
+      </p:sp>
+      <p:sp>
+        <p:nvSpPr>
+          <p:cNvPr id="53" name="service-texte-98"/>
+          <p:cNvSpPr txBox="1"/>
+          <p:nvPr/>
+        </p:nvSpPr>
+        <p:spPr>
+          <a:xfrm>
+            <a:off x="6766560" y="4773168"/>
+            <a:ext cx="1783080" cy="603504"/>
+          </a:xfrm>
+          <a:prstGeom prst="rect">
+            <a:avLst/>
+          </a:prstGeom>
+          <a:noFill/>
+          <a:ln/>
+        </p:spPr>
+        <p:txBody>
+          <a:bodyPr wrap="square" lIns="508" tIns="508" rIns="508" bIns="508" rtlCol="0" anchor="ctr"/>
+          <a:lstStyle/>
+          <a:p>
+            <a:pPr algn="ctr" indent="0" marL="0">
+              <a:buNone/>
+            </a:pPr>
+            <a:r>
+              <a:rPr lang="en-US" sz="1200" b="1" dirty="0">
+                <a:solidFill>
+                  <a:schemeClr val="tx1"/>
+                </a:solidFill>
+              </a:rPr>
+              <a:t>S3 audit</a:t>
+            </a:r>
+            <a:endParaRPr lang="en-US" sz="1200" dirty="0"/>
+          </a:p>
+          <a:p>
+            <a:pPr algn="ctr" indent="0" marL="0">
+              <a:buNone/>
+            </a:pPr>
+            <a:r>
+              <a:rPr lang="en-US" sz="1000" dirty="0">
+                <a:solidFill>
+                  <a:schemeClr val="tx1"/>
+                </a:solidFill>
+              </a:rPr>
+              <a:t>1 JSON par événement</a:t>
+            </a:r>
+            <a:endParaRPr lang="en-US" sz="1200" dirty="0"/>
+          </a:p>
+        </p:txBody>
+      </p:sp>
+      <p:sp>
+        <p:nvSpPr>
+          <p:cNvPr id="54" name="fleche-99"/>
+          <p:cNvSpPr/>
+          <p:nvPr/>
+        </p:nvSpPr>
+        <p:spPr>
+          <a:xfrm>
+            <a:off x="6492240" y="5074920"/>
+            <a:ext cx="274320" cy="914"/>
+          </a:xfrm>
+          <a:prstGeom prst="line">
+            <a:avLst/>
+          </a:prstGeom>
+          <a:noFill/>
+          <a:ln w="19050">
+            <a:solidFill>
+              <a:schemeClr val="accent6"/>
+            </a:solidFill>
+            <a:prstDash val="solid"/>
+            <a:tailEnd type="triangle"/>
+          </a:ln>
+        </p:spPr>
+      </p:sp>
+      <p:sp>
+        <p:nvSpPr>
+          <p:cNvPr id="55" name="texte-100"/>
+          <p:cNvSpPr txBox="1"/>
+          <p:nvPr/>
+        </p:nvSpPr>
+        <p:spPr>
+          <a:xfrm>
+            <a:off x="8823960" y="4882896"/>
+            <a:ext cx="2788920" cy="411480"/>
+          </a:xfrm>
+          <a:prstGeom prst="rect">
+            <a:avLst/>
+          </a:prstGeom>
+          <a:noFill/>
+          <a:ln/>
+        </p:spPr>
+        <p:txBody>
+          <a:bodyPr wrap="square" lIns="0" tIns="0" rIns="0" bIns="0" rtlCol="0" anchor="ctr"/>
+          <a:lstStyle/>
+          <a:p>
+            <a:pPr indent="0" marL="0">
+              <a:buNone/>
+            </a:pPr>
+            <a:r>
+              <a:rPr lang="en-US" sz="1200" dirty="0">
+                <a:solidFill>
+                  <a:schemeClr val="accent6"/>
+                </a:solidFill>
+              </a:rPr>
+              <a:t>Tout le cycle de vie, rejouable</a:t>
+            </a:r>
+            <a:endParaRPr lang="en-US" sz="1200" dirty="0"/>
+          </a:p>
+        </p:txBody>
+      </p:sp>
+      <p:sp>
+        <p:nvSpPr>
+          <p:cNvPr id="56" name="fleche-101"/>
+          <p:cNvSpPr/>
+          <p:nvPr/>
+        </p:nvSpPr>
+        <p:spPr>
+          <a:xfrm>
+            <a:off x="2103120" y="5824728"/>
+            <a:ext cx="548640" cy="914"/>
+          </a:xfrm>
+          <a:prstGeom prst="line">
+            <a:avLst/>
+          </a:prstGeom>
+          <a:noFill/>
+          <a:ln w="19050">
+            <a:solidFill>
+              <a:schemeClr val="accent6"/>
+            </a:solidFill>
+            <a:prstDash val="solid"/>
+            <a:tailEnd type="triangle"/>
+          </a:ln>
+        </p:spPr>
+      </p:sp>
+      <p:sp>
+        <p:nvSpPr>
+          <p:cNvPr id="57" name="service-102"/>
+          <p:cNvSpPr/>
+          <p:nvPr/>
+        </p:nvSpPr>
+        <p:spPr>
+          <a:xfrm>
+            <a:off x="2651760" y="5522976"/>
+            <a:ext cx="1783080" cy="603504"/>
+          </a:xfrm>
+          <a:prstGeom prst="roundRect">
+            <a:avLst>
+              <a:gd name="adj" fmla="val 12121"/>
+            </a:avLst>
+          </a:prstGeom>
+          <a:solidFill>
+            <a:schemeClr val="accent5"/>
+          </a:solidFill>
+          <a:ln w="15875">
+            <a:solidFill>
+              <a:schemeClr val="accent1"/>
+            </a:solidFill>
+            <a:prstDash val="solid"/>
+          </a:ln>
+        </p:spPr>
+      </p:sp>
+      <p:sp>
+        <p:nvSpPr>
+          <p:cNvPr id="58" name="service-texte-103"/>
+          <p:cNvSpPr txBox="1"/>
+          <p:nvPr/>
+        </p:nvSpPr>
+        <p:spPr>
+          <a:xfrm>
+            <a:off x="2651760" y="5522976"/>
+            <a:ext cx="1783080" cy="603504"/>
+          </a:xfrm>
+          <a:prstGeom prst="rect">
+            <a:avLst/>
+          </a:prstGeom>
+          <a:noFill/>
+          <a:ln/>
+        </p:spPr>
+        <p:txBody>
+          <a:bodyPr wrap="square" lIns="508" tIns="508" rIns="508" bIns="508" rtlCol="0" anchor="ctr"/>
+          <a:lstStyle/>
+          <a:p>
+            <a:pPr algn="ctr" indent="0" marL="0">
+              <a:buNone/>
+            </a:pPr>
+            <a:r>
+              <a:rPr lang="en-US" sz="1200" b="1" dirty="0">
+                <a:solidFill>
+                  <a:schemeClr val="tx1"/>
+                </a:solidFill>
+              </a:rPr>
+              <a:t>Groupe emails-suivi</a:t>
+            </a:r>
+            <a:endParaRPr lang="en-US" sz="1200" dirty="0"/>
+          </a:p>
+          <a:p>
+            <a:pPr algn="ctr" indent="0" marL="0">
+              <a:buNone/>
+            </a:pPr>
+            <a:r>
+              <a:rPr lang="en-US" sz="1000" dirty="0">
+                <a:solidFill>
+                  <a:schemeClr val="tx1"/>
+                </a:solidFill>
+              </a:rPr>
+              <a:t>consommateur</a:t>
+            </a:r>
+            <a:endParaRPr lang="en-US" sz="1200" dirty="0"/>
+          </a:p>
+        </p:txBody>
+      </p:sp>
+      <p:sp>
+        <p:nvSpPr>
+          <p:cNvPr id="59" name="service-104"/>
+          <p:cNvSpPr/>
+          <p:nvPr/>
+        </p:nvSpPr>
+        <p:spPr>
+          <a:xfrm>
+            <a:off x="4709160" y="5522976"/>
+            <a:ext cx="1783080" cy="603504"/>
+          </a:xfrm>
+          <a:prstGeom prst="roundRect">
+            <a:avLst>
+              <a:gd name="adj" fmla="val 12121"/>
+            </a:avLst>
+          </a:prstGeom>
+          <a:solidFill>
+            <a:schemeClr val="bg1"/>
+          </a:solidFill>
+          <a:ln w="15875">
+            <a:solidFill>
+              <a:schemeClr val="tx1"/>
+            </a:solidFill>
+            <a:prstDash val="solid"/>
+          </a:ln>
+        </p:spPr>
+      </p:sp>
+      <p:sp>
+        <p:nvSpPr>
+          <p:cNvPr id="60" name="service-texte-105"/>
+          <p:cNvSpPr txBox="1"/>
+          <p:nvPr/>
+        </p:nvSpPr>
+        <p:spPr>
+          <a:xfrm>
+            <a:off x="4709160" y="5522976"/>
+            <a:ext cx="1783080" cy="603504"/>
+          </a:xfrm>
+          <a:prstGeom prst="rect">
+            <a:avLst/>
+          </a:prstGeom>
+          <a:noFill/>
+          <a:ln/>
+        </p:spPr>
+        <p:txBody>
+          <a:bodyPr wrap="square" lIns="508" tIns="508" rIns="508" bIns="508" rtlCol="0" anchor="ctr"/>
+          <a:lstStyle/>
+          <a:p>
+            <a:pPr algn="ctr" indent="0" marL="0">
+              <a:buNone/>
+            </a:pPr>
+            <a:r>
+              <a:rPr lang="en-US" sz="1200" b="1" dirty="0">
+                <a:solidFill>
+                  <a:schemeClr val="tx1"/>
+                </a:solidFill>
+              </a:rPr>
+              <a:t>Amazon SES</a:t>
+            </a:r>
+            <a:endParaRPr lang="en-US" sz="1200" dirty="0"/>
+          </a:p>
+          <a:p>
+            <a:pPr algn="ctr" indent="0" marL="0">
+              <a:buNone/>
+            </a:pPr>
+            <a:r>
+              <a:rPr lang="en-US" sz="1000" dirty="0">
+                <a:solidFill>
+                  <a:schemeClr val="tx1"/>
+                </a:solidFill>
+              </a:rPr>
+              <a:t>e-mail FR / EN</a:t>
+            </a:r>
+            <a:endParaRPr lang="en-US" sz="1200" dirty="0"/>
+          </a:p>
+        </p:txBody>
+      </p:sp>
+      <p:sp>
+        <p:nvSpPr>
+          <p:cNvPr id="61" name="fleche-106"/>
+          <p:cNvSpPr/>
+          <p:nvPr/>
+        </p:nvSpPr>
+        <p:spPr>
+          <a:xfrm>
+            <a:off x="4434840" y="5824728"/>
+            <a:ext cx="274320" cy="914"/>
+          </a:xfrm>
+          <a:prstGeom prst="line">
+            <a:avLst/>
+          </a:prstGeom>
+          <a:noFill/>
+          <a:ln w="19050">
+            <a:solidFill>
+              <a:schemeClr val="accent6"/>
+            </a:solidFill>
+            <a:prstDash val="solid"/>
+            <a:tailEnd type="triangle"/>
+          </a:ln>
+        </p:spPr>
+      </p:sp>
+      <p:sp>
+        <p:nvSpPr>
+          <p:cNvPr id="62" name="service-107"/>
+          <p:cNvSpPr/>
+          <p:nvPr/>
+        </p:nvSpPr>
+        <p:spPr>
+          <a:xfrm>
+            <a:off x="6766560" y="5522976"/>
+            <a:ext cx="1783080" cy="603504"/>
+          </a:xfrm>
+          <a:prstGeom prst="roundRect">
+            <a:avLst>
+              <a:gd name="adj" fmla="val 12121"/>
+            </a:avLst>
+          </a:prstGeom>
+          <a:solidFill>
+            <a:schemeClr val="bg1"/>
+          </a:solidFill>
+          <a:ln w="15875">
+            <a:solidFill>
+              <a:schemeClr val="tx1"/>
+            </a:solidFill>
+            <a:prstDash val="solid"/>
+          </a:ln>
+        </p:spPr>
+      </p:sp>
+      <p:sp>
+        <p:nvSpPr>
+          <p:cNvPr id="63" name="service-texte-108"/>
+          <p:cNvSpPr txBox="1"/>
+          <p:nvPr/>
+        </p:nvSpPr>
+        <p:spPr>
+          <a:xfrm>
+            <a:off x="6766560" y="5522976"/>
+            <a:ext cx="1783080" cy="603504"/>
+          </a:xfrm>
+          <a:prstGeom prst="rect">
+            <a:avLst/>
+          </a:prstGeom>
+          <a:noFill/>
+          <a:ln/>
+        </p:spPr>
+        <p:txBody>
+          <a:bodyPr wrap="square" lIns="508" tIns="508" rIns="508" bIns="508" rtlCol="0" anchor="ctr"/>
+          <a:lstStyle/>
+          <a:p>
+            <a:pPr algn="ctr" indent="0" marL="0">
+              <a:buNone/>
+            </a:pPr>
+            <a:r>
+              <a:rPr lang="en-US" sz="1200" b="1" dirty="0">
+                <a:solidFill>
+                  <a:schemeClr val="tx1"/>
+                </a:solidFill>
+              </a:rPr>
+              <a:t>Client</a:t>
+            </a:r>
+            <a:endParaRPr lang="en-US" sz="1200" dirty="0"/>
+          </a:p>
+          <a:p>
+            <a:pPr algn="ctr" indent="0" marL="0">
+              <a:buNone/>
+            </a:pPr>
+            <a:r>
+              <a:rPr lang="en-US" sz="1000" dirty="0">
+                <a:solidFill>
+                  <a:schemeClr val="tx1"/>
+                </a:solidFill>
+              </a:rPr>
+              <a:t>boîte mail</a:t>
+            </a:r>
+            <a:endParaRPr lang="en-US" sz="1200" dirty="0"/>
+          </a:p>
+        </p:txBody>
+      </p:sp>
+      <p:sp>
+        <p:nvSpPr>
+          <p:cNvPr id="64" name="fleche-109"/>
+          <p:cNvSpPr/>
+          <p:nvPr/>
+        </p:nvSpPr>
+        <p:spPr>
+          <a:xfrm>
+            <a:off x="6492240" y="5824728"/>
+            <a:ext cx="274320" cy="914"/>
+          </a:xfrm>
+          <a:prstGeom prst="line">
+            <a:avLst/>
+          </a:prstGeom>
+          <a:noFill/>
+          <a:ln w="19050">
+            <a:solidFill>
+              <a:schemeClr val="accent6"/>
+            </a:solidFill>
+            <a:prstDash val="solid"/>
+            <a:tailEnd type="triangle"/>
+          </a:ln>
+        </p:spPr>
+      </p:sp>
+      <p:sp>
+        <p:nvSpPr>
+          <p:cNvPr id="65" name="texte-110"/>
+          <p:cNvSpPr txBox="1"/>
+          <p:nvPr/>
+        </p:nvSpPr>
+        <p:spPr>
+          <a:xfrm>
+            <a:off x="8823960" y="5632704"/>
+            <a:ext cx="2788920" cy="411480"/>
+          </a:xfrm>
+          <a:prstGeom prst="rect">
+            <a:avLst/>
+          </a:prstGeom>
+          <a:noFill/>
+          <a:ln/>
+        </p:spPr>
+        <p:txBody>
+          <a:bodyPr wrap="square" lIns="0" tIns="0" rIns="0" bIns="0" rtlCol="0" anchor="ctr"/>
+          <a:lstStyle/>
+          <a:p>
+            <a:pPr indent="0" marL="0">
+              <a:buNone/>
+            </a:pPr>
+            <a:r>
+              <a:rPr lang="en-US" sz="1200" dirty="0">
+                <a:solidFill>
+                  <a:schemeClr val="accent6"/>
+                </a:solidFill>
+              </a:rPr>
+              <a:t>Expédition, incident et livraison</a:t>
+            </a:r>
+            <a:endParaRPr lang="en-US" sz="1200" dirty="0"/>
+          </a:p>
+        </p:txBody>
+      </p:sp>
+      <p:sp>
+        <p:nvSpPr>
+          <p:cNvPr id="25" name="Slide Number Placeholder 0"/>
+          <p:cNvSpPr>
+            <a:spLocks noGrp="1"/>
+          </p:cNvSpPr>
+          <p:nvPr>
+            <p:ph type="sldNum" sz="quarter" idx="4294967295"/>
+          </p:nvPr>
+        </p:nvSpPr>
+        <p:spPr>
+          <a:xfrm>
+            <a:off x="11155680" y="6400800"/>
+            <a:ext cx="457200" cy="274320"/>
+          </a:xfrm>
+          <a:prstGeom prst="rect">
+            <a:avLst/>
+          </a:prstGeom>
+          <a:extLst>
+            <a:ext uri="{C572A759-6A51-4108-AA02-DFA0A04FC94B}">
+              <ma14:wrappingTextBoxFlag xmlns:ma14="http://schemas.microsoft.com/office/mac/drawingml/2011/main" val="0"/>
+            </a:ext>
+          </a:extLst>
+        </p:spPr>
+        <p:txBody>
+          <a:bodyPr/>
+          <a:lstStyle>
+            <a:lvl1pPr>
+              <a:defRPr sz="1000">
+                <a:solidFill>
+                  <a:schemeClr val="accent6"/>
+                </a:solidFill>
+              </a:defRPr>
+            </a:lvl1pPr>
+          </a:lstStyle>
+          <a:p>
+            <a:pPr algn="r"/>
+            <a:fld id="{F7021451-1387-4CA6-816F-3879F97B5CBC}" type="slidenum">
+              <a:rPr b="0" lang="en-US"/>
+              <a:t>4</a:t>
+            </a:fld>
+            <a:endParaRPr lang="en-US"/>
+          </a:p>
+        </p:txBody>
+      </p:sp>
+    </p:spTree>
+  </p:cSld>
+  <p:clrMapOvr>
+    <a:masterClrMapping/>
+  </p:clrMapOvr>
+</p:sld>
+</file>
+
+<file path=ppt/slides/slide7.xml><?xml version="1.0" encoding="utf-8"?>
 <p:sld xmlns:a="http://schemas.openxmlformats.org/drawingml/2006/main" xmlns:r="http://schemas.openxmlformats.org/officeDocument/2006/relationships" xmlns:p="http://schemas.openxmlformats.org/presentationml/2006/main">
   <p:cSld name="Slide 6">
     <p:spTree>
@@ -10291,7 +15022,7 @@
 </p:sld>
 </file>
 
-<file path=ppt/slides/slide7.xml><?xml version="1.0" encoding="utf-8"?>
+<file path=ppt/slides/slide8.xml><?xml version="1.0" encoding="utf-8"?>
 <p:sld xmlns:a="http://schemas.openxmlformats.org/drawingml/2006/main" xmlns:r="http://schemas.openxmlformats.org/officeDocument/2006/relationships" xmlns:p="http://schemas.openxmlformats.org/presentationml/2006/main">
   <p:cSld name="Slide 7">
     <p:spTree>
@@ -10739,7 +15470,7 @@
 </p:sld>
 </file>
 
-<file path=ppt/slides/slide8.xml><?xml version="1.0" encoding="utf-8"?>
+<file path=ppt/slides/slide9.xml><?xml version="1.0" encoding="utf-8"?>
 <p:sld xmlns:a="http://schemas.openxmlformats.org/drawingml/2006/main" xmlns:r="http://schemas.openxmlformats.org/officeDocument/2006/relationships" xmlns:p="http://schemas.openxmlformats.org/presentationml/2006/main">
   <p:cSld name="Slide 8">
     <p:spTree>
@@ -12087,1027 +16818,6 @@
             <a:fld id="{F7021451-1387-4CA6-816F-3879F97B5CBC}" type="slidenum">
               <a:rPr b="0" lang="en-US"/>
               <a:t>8</a:t>
-            </a:fld>
-            <a:endParaRPr lang="en-US"/>
-          </a:p>
-        </p:txBody>
-      </p:sp>
-    </p:spTree>
-  </p:cSld>
-  <p:clrMapOvr>
-    <a:masterClrMapping/>
-  </p:clrMapOvr>
-</p:sld>
-</file>
-
-<file path=ppt/slides/slide9.xml><?xml version="1.0" encoding="utf-8"?>
-<p:sld xmlns:a="http://schemas.openxmlformats.org/drawingml/2006/main" xmlns:r="http://schemas.openxmlformats.org/officeDocument/2006/relationships" xmlns:p="http://schemas.openxmlformats.org/presentationml/2006/main">
-  <p:cSld name="Slide 9">
-    <p:spTree>
-      <p:nvGrpSpPr>
-        <p:cNvPr id="1" name=""/>
-        <p:cNvGrpSpPr/>
-        <p:nvPr/>
-      </p:nvGrpSpPr>
-      <p:grpSpPr>
-        <a:xfrm>
-          <a:off x="0" y="0"/>
-          <a:ext cx="0" cy="0"/>
-          <a:chOff x="0" y="0"/>
-          <a:chExt cx="0" cy="0"/>
-        </a:xfrm>
-      </p:grpSpPr>
-      <p:sp>
-        <p:nvSpPr>
-          <p:cNvPr id="2" name="orateur-193"/>
-          <p:cNvSpPr/>
-          <p:nvPr/>
-        </p:nvSpPr>
-        <p:spPr>
-          <a:xfrm>
-            <a:off x="10497312" y="109728"/>
-            <a:ext cx="868680" cy="292608"/>
-          </a:xfrm>
-          <a:prstGeom prst="roundRect">
-            <a:avLst>
-              <a:gd name="adj" fmla="val 50000"/>
-            </a:avLst>
-          </a:prstGeom>
-          <a:solidFill>
-            <a:schemeClr val="accent3"/>
-          </a:solidFill>
-          <a:ln w="12700">
-            <a:solidFill>
-              <a:schemeClr val="accent3"/>
-            </a:solidFill>
-            <a:prstDash val="solid"/>
-          </a:ln>
-        </p:spPr>
-      </p:sp>
-      <p:sp>
-        <p:nvSpPr>
-          <p:cNvPr id="3" name="orateur-texte-194"/>
-          <p:cNvSpPr txBox="1"/>
-          <p:nvPr/>
-        </p:nvSpPr>
-        <p:spPr>
-          <a:xfrm>
-            <a:off x="10497312" y="109728"/>
-            <a:ext cx="868680" cy="292608"/>
-          </a:xfrm>
-          <a:prstGeom prst="rect">
-            <a:avLst/>
-          </a:prstGeom>
-          <a:noFill/>
-          <a:ln/>
-        </p:spPr>
-        <p:txBody>
-          <a:bodyPr wrap="square" lIns="0" tIns="0" rIns="0" bIns="0" rtlCol="0" anchor="ctr"/>
-          <a:lstStyle/>
-          <a:p>
-            <a:pPr algn="ctr" indent="0" marL="0">
-              <a:buNone/>
-            </a:pPr>
-            <a:r>
-              <a:rPr lang="en-US" sz="1100" b="1" dirty="0">
-                <a:solidFill>
-                  <a:schemeClr val="bg1"/>
-                </a:solidFill>
-              </a:rPr>
-              <a:t>Félix</a:t>
-            </a:r>
-            <a:endParaRPr lang="en-US" sz="1100" dirty="0"/>
-          </a:p>
-        </p:txBody>
-      </p:sp>
-      <p:sp>
-        <p:nvSpPr>
-          <p:cNvPr id="4" name="Text 0"/>
-          <p:cNvSpPr/>
-          <p:nvPr>
-            <p:ph idx="100" type="title" hasCustomPrompt="1"/>
-          </p:nvPr>
-        </p:nvSpPr>
-        <p:spPr>
-          <a:xfrm>
-            <a:off x="548640" y="365760"/>
-            <a:ext cx="11064240" cy="777240"/>
-          </a:xfrm>
-          <a:prstGeom prst="rect">
-            <a:avLst/>
-          </a:prstGeom>
-          <a:noFill/>
-          <a:ln/>
-        </p:spPr>
-        <p:txBody>
-          <a:bodyPr wrap="square" lIns="0" tIns="0" rIns="0" bIns="0" rtlCol="0" anchor="ctr"/>
-          <a:lstStyle/>
-          <a:p>
-            <a:pPr algn="l" indent="0" marL="0">
-              <a:buNone/>
-            </a:pPr>
-            <a:r>
-              <a:rPr lang="en-US" sz="3000" b="1" dirty="0">
-                <a:solidFill>
-                  <a:schemeClr val="tx1"/>
-                </a:solidFill>
-              </a:rPr>
-              <a:t>De git push à la prod, sans clé d'accès</a:t>
-            </a:r>
-            <a:endParaRPr lang="en-US" sz="3000" dirty="0"/>
-          </a:p>
-        </p:txBody>
-      </p:sp>
-      <p:sp>
-        <p:nvSpPr>
-          <p:cNvPr id="5" name="service-195"/>
-          <p:cNvSpPr/>
-          <p:nvPr/>
-        </p:nvSpPr>
-        <p:spPr>
-          <a:xfrm>
-            <a:off x="548640" y="1463040"/>
-            <a:ext cx="1965960" cy="868680"/>
-          </a:xfrm>
-          <a:prstGeom prst="roundRect">
-            <a:avLst>
-              <a:gd name="adj" fmla="val 8421"/>
-            </a:avLst>
-          </a:prstGeom>
-          <a:solidFill>
-            <a:schemeClr val="tx1"/>
-          </a:solidFill>
-          <a:ln w="15875">
-            <a:solidFill>
-              <a:schemeClr val="tx1"/>
-            </a:solidFill>
-            <a:prstDash val="solid"/>
-          </a:ln>
-        </p:spPr>
-      </p:sp>
-      <p:sp>
-        <p:nvSpPr>
-          <p:cNvPr id="6" name="service-texte-196"/>
-          <p:cNvSpPr txBox="1"/>
-          <p:nvPr/>
-        </p:nvSpPr>
-        <p:spPr>
-          <a:xfrm>
-            <a:off x="548640" y="1463040"/>
-            <a:ext cx="1965960" cy="868680"/>
-          </a:xfrm>
-          <a:prstGeom prst="rect">
-            <a:avLst/>
-          </a:prstGeom>
-          <a:noFill/>
-          <a:ln/>
-        </p:spPr>
-        <p:txBody>
-          <a:bodyPr wrap="square" lIns="508" tIns="508" rIns="508" bIns="508" rtlCol="0" anchor="ctr"/>
-          <a:lstStyle/>
-          <a:p>
-            <a:pPr algn="ctr" indent="0" marL="0">
-              <a:buNone/>
-            </a:pPr>
-            <a:r>
-              <a:rPr lang="en-US" sz="1200" b="1" dirty="0">
-                <a:solidFill>
-                  <a:schemeClr val="bg1"/>
-                </a:solidFill>
-              </a:rPr>
-              <a:t>git push</a:t>
-            </a:r>
-            <a:endParaRPr lang="en-US" sz="1200" dirty="0"/>
-          </a:p>
-          <a:p>
-            <a:pPr algn="ctr" indent="0" marL="0">
-              <a:buNone/>
-            </a:pPr>
-            <a:r>
-              <a:rPr lang="en-US" sz="1000" dirty="0">
-                <a:solidFill>
-                  <a:schemeClr val="bg1"/>
-                </a:solidFill>
-              </a:rPr>
-              <a:t>branche dev ou main</a:t>
-            </a:r>
-            <a:endParaRPr lang="en-US" sz="1200" dirty="0"/>
-          </a:p>
-        </p:txBody>
-      </p:sp>
-      <p:sp>
-        <p:nvSpPr>
-          <p:cNvPr id="7" name="fleche-197"/>
-          <p:cNvSpPr/>
-          <p:nvPr/>
-        </p:nvSpPr>
-        <p:spPr>
-          <a:xfrm>
-            <a:off x="2514600" y="1897380"/>
-            <a:ext cx="310896" cy="914"/>
-          </a:xfrm>
-          <a:prstGeom prst="line">
-            <a:avLst/>
-          </a:prstGeom>
-          <a:noFill/>
-          <a:ln w="19050">
-            <a:solidFill>
-              <a:schemeClr val="accent6"/>
-            </a:solidFill>
-            <a:prstDash val="solid"/>
-            <a:tailEnd type="triangle"/>
-          </a:ln>
-        </p:spPr>
-      </p:sp>
-      <p:sp>
-        <p:nvSpPr>
-          <p:cNvPr id="8" name="service-198"/>
-          <p:cNvSpPr/>
-          <p:nvPr/>
-        </p:nvSpPr>
-        <p:spPr>
-          <a:xfrm>
-            <a:off x="2825496" y="1463040"/>
-            <a:ext cx="1965960" cy="868680"/>
-          </a:xfrm>
-          <a:prstGeom prst="roundRect">
-            <a:avLst>
-              <a:gd name="adj" fmla="val 8421"/>
-            </a:avLst>
-          </a:prstGeom>
-          <a:solidFill>
-            <a:schemeClr val="accent5"/>
-          </a:solidFill>
-          <a:ln w="15875">
-            <a:solidFill>
-              <a:schemeClr val="accent1"/>
-            </a:solidFill>
-            <a:prstDash val="solid"/>
-          </a:ln>
-        </p:spPr>
-      </p:sp>
-      <p:sp>
-        <p:nvSpPr>
-          <p:cNvPr id="9" name="service-texte-199"/>
-          <p:cNvSpPr txBox="1"/>
-          <p:nvPr/>
-        </p:nvSpPr>
-        <p:spPr>
-          <a:xfrm>
-            <a:off x="2825496" y="1463040"/>
-            <a:ext cx="1965960" cy="868680"/>
-          </a:xfrm>
-          <a:prstGeom prst="rect">
-            <a:avLst/>
-          </a:prstGeom>
-          <a:noFill/>
-          <a:ln/>
-        </p:spPr>
-        <p:txBody>
-          <a:bodyPr wrap="square" lIns="508" tIns="508" rIns="508" bIns="508" rtlCol="0" anchor="ctr"/>
-          <a:lstStyle/>
-          <a:p>
-            <a:pPr algn="ctr" indent="0" marL="0">
-              <a:buNone/>
-            </a:pPr>
-            <a:r>
-              <a:rPr lang="en-US" sz="1200" b="1" dirty="0">
-                <a:solidFill>
-                  <a:schemeClr val="tx1"/>
-                </a:solidFill>
-              </a:rPr>
-              <a:t>GitHub Actions</a:t>
-            </a:r>
-            <a:endParaRPr lang="en-US" sz="1200" dirty="0"/>
-          </a:p>
-          <a:p>
-            <a:pPr algn="ctr" indent="0" marL="0">
-              <a:buNone/>
-            </a:pPr>
-            <a:r>
-              <a:rPr lang="en-US" sz="1000" dirty="0">
-                <a:solidFill>
-                  <a:schemeClr val="tx1"/>
-                </a:solidFill>
-              </a:rPr>
-              <a:t>tests, lint, build</a:t>
-            </a:r>
-            <a:endParaRPr lang="en-US" sz="1200" dirty="0"/>
-          </a:p>
-        </p:txBody>
-      </p:sp>
-      <p:sp>
-        <p:nvSpPr>
-          <p:cNvPr id="10" name="fleche-200"/>
-          <p:cNvSpPr/>
-          <p:nvPr/>
-        </p:nvSpPr>
-        <p:spPr>
-          <a:xfrm>
-            <a:off x="4791456" y="1897380"/>
-            <a:ext cx="310896" cy="914"/>
-          </a:xfrm>
-          <a:prstGeom prst="line">
-            <a:avLst/>
-          </a:prstGeom>
-          <a:noFill/>
-          <a:ln w="19050">
-            <a:solidFill>
-              <a:schemeClr val="accent6"/>
-            </a:solidFill>
-            <a:prstDash val="solid"/>
-            <a:tailEnd type="triangle"/>
-          </a:ln>
-        </p:spPr>
-      </p:sp>
-      <p:sp>
-        <p:nvSpPr>
-          <p:cNvPr id="11" name="service-201"/>
-          <p:cNvSpPr/>
-          <p:nvPr/>
-        </p:nvSpPr>
-        <p:spPr>
-          <a:xfrm>
-            <a:off x="5102352" y="1463040"/>
-            <a:ext cx="1965960" cy="868680"/>
-          </a:xfrm>
-          <a:prstGeom prst="roundRect">
-            <a:avLst>
-              <a:gd name="adj" fmla="val 8421"/>
-            </a:avLst>
-          </a:prstGeom>
-          <a:solidFill>
-            <a:schemeClr val="accent5"/>
-          </a:solidFill>
-          <a:ln w="15875">
-            <a:solidFill>
-              <a:schemeClr val="accent1"/>
-            </a:solidFill>
-            <a:prstDash val="solid"/>
-          </a:ln>
-        </p:spPr>
-      </p:sp>
-      <p:sp>
-        <p:nvSpPr>
-          <p:cNvPr id="12" name="service-texte-202"/>
-          <p:cNvSpPr txBox="1"/>
-          <p:nvPr/>
-        </p:nvSpPr>
-        <p:spPr>
-          <a:xfrm>
-            <a:off x="5102352" y="1463040"/>
-            <a:ext cx="1965960" cy="868680"/>
-          </a:xfrm>
-          <a:prstGeom prst="rect">
-            <a:avLst/>
-          </a:prstGeom>
-          <a:noFill/>
-          <a:ln/>
-        </p:spPr>
-        <p:txBody>
-          <a:bodyPr wrap="square" lIns="508" tIns="508" rIns="508" bIns="508" rtlCol="0" anchor="ctr"/>
-          <a:lstStyle/>
-          <a:p>
-            <a:pPr algn="ctr" indent="0" marL="0">
-              <a:buNone/>
-            </a:pPr>
-            <a:r>
-              <a:rPr lang="en-US" sz="1200" b="1" dirty="0">
-                <a:solidFill>
-                  <a:schemeClr val="tx1"/>
-                </a:solidFill>
-              </a:rPr>
-              <a:t>terraform plan</a:t>
-            </a:r>
-            <a:endParaRPr lang="en-US" sz="1200" dirty="0"/>
-          </a:p>
-          <a:p>
-            <a:pPr algn="ctr" indent="0" marL="0">
-              <a:buNone/>
-            </a:pPr>
-            <a:r>
-              <a:rPr lang="en-US" sz="1000" dirty="0">
-                <a:solidFill>
-                  <a:schemeClr val="tx1"/>
-                </a:solidFill>
-              </a:rPr>
-              <a:t>affiché dans la PR</a:t>
-            </a:r>
-            <a:endParaRPr lang="en-US" sz="1200" dirty="0"/>
-          </a:p>
-        </p:txBody>
-      </p:sp>
-      <p:sp>
-        <p:nvSpPr>
-          <p:cNvPr id="13" name="fleche-203"/>
-          <p:cNvSpPr/>
-          <p:nvPr/>
-        </p:nvSpPr>
-        <p:spPr>
-          <a:xfrm>
-            <a:off x="7068312" y="1897380"/>
-            <a:ext cx="310896" cy="914"/>
-          </a:xfrm>
-          <a:prstGeom prst="line">
-            <a:avLst/>
-          </a:prstGeom>
-          <a:noFill/>
-          <a:ln w="19050">
-            <a:solidFill>
-              <a:schemeClr val="accent6"/>
-            </a:solidFill>
-            <a:prstDash val="solid"/>
-            <a:tailEnd type="triangle"/>
-          </a:ln>
-        </p:spPr>
-      </p:sp>
-      <p:sp>
-        <p:nvSpPr>
-          <p:cNvPr id="14" name="service-204"/>
-          <p:cNvSpPr/>
-          <p:nvPr/>
-        </p:nvSpPr>
-        <p:spPr>
-          <a:xfrm>
-            <a:off x="7379208" y="1463040"/>
-            <a:ext cx="1965960" cy="868680"/>
-          </a:xfrm>
-          <a:prstGeom prst="roundRect">
-            <a:avLst>
-              <a:gd name="adj" fmla="val 8421"/>
-            </a:avLst>
-          </a:prstGeom>
-          <a:solidFill>
-            <a:schemeClr val="tx1"/>
-          </a:solidFill>
-          <a:ln w="15875">
-            <a:solidFill>
-              <a:schemeClr val="tx1"/>
-            </a:solidFill>
-            <a:prstDash val="solid"/>
-          </a:ln>
-        </p:spPr>
-      </p:sp>
-      <p:sp>
-        <p:nvSpPr>
-          <p:cNvPr id="15" name="service-texte-205"/>
-          <p:cNvSpPr txBox="1"/>
-          <p:nvPr/>
-        </p:nvSpPr>
-        <p:spPr>
-          <a:xfrm>
-            <a:off x="7379208" y="1463040"/>
-            <a:ext cx="1965960" cy="868680"/>
-          </a:xfrm>
-          <a:prstGeom prst="rect">
-            <a:avLst/>
-          </a:prstGeom>
-          <a:noFill/>
-          <a:ln/>
-        </p:spPr>
-        <p:txBody>
-          <a:bodyPr wrap="square" lIns="508" tIns="508" rIns="508" bIns="508" rtlCol="0" anchor="ctr"/>
-          <a:lstStyle/>
-          <a:p>
-            <a:pPr algn="ctr" indent="0" marL="0">
-              <a:buNone/>
-            </a:pPr>
-            <a:r>
-              <a:rPr lang="en-US" sz="1200" b="1" dirty="0">
-                <a:solidFill>
-                  <a:schemeClr val="bg1"/>
-                </a:solidFill>
-              </a:rPr>
-              <a:t>IAM + OIDC</a:t>
-            </a:r>
-            <a:endParaRPr lang="en-US" sz="1200" dirty="0"/>
-          </a:p>
-          <a:p>
-            <a:pPr algn="ctr" indent="0" marL="0">
-              <a:buNone/>
-            </a:pPr>
-            <a:r>
-              <a:rPr lang="en-US" sz="1000" dirty="0">
-                <a:solidFill>
-                  <a:schemeClr val="bg1"/>
-                </a:solidFill>
-              </a:rPr>
-              <a:t>identifiants d'1 h</a:t>
-            </a:r>
-            <a:endParaRPr lang="en-US" sz="1200" dirty="0"/>
-          </a:p>
-        </p:txBody>
-      </p:sp>
-      <p:sp>
-        <p:nvSpPr>
-          <p:cNvPr id="16" name="fleche-206"/>
-          <p:cNvSpPr/>
-          <p:nvPr/>
-        </p:nvSpPr>
-        <p:spPr>
-          <a:xfrm>
-            <a:off x="9345168" y="1897380"/>
-            <a:ext cx="310896" cy="914"/>
-          </a:xfrm>
-          <a:prstGeom prst="line">
-            <a:avLst/>
-          </a:prstGeom>
-          <a:noFill/>
-          <a:ln w="19050">
-            <a:solidFill>
-              <a:schemeClr val="accent6"/>
-            </a:solidFill>
-            <a:prstDash val="solid"/>
-            <a:tailEnd type="triangle"/>
-          </a:ln>
-        </p:spPr>
-      </p:sp>
-      <p:sp>
-        <p:nvSpPr>
-          <p:cNvPr id="17" name="service-207"/>
-          <p:cNvSpPr/>
-          <p:nvPr/>
-        </p:nvSpPr>
-        <p:spPr>
-          <a:xfrm>
-            <a:off x="9656064" y="1463040"/>
-            <a:ext cx="1965960" cy="868680"/>
-          </a:xfrm>
-          <a:prstGeom prst="roundRect">
-            <a:avLst>
-              <a:gd name="adj" fmla="val 8421"/>
-            </a:avLst>
-          </a:prstGeom>
-          <a:solidFill>
-            <a:schemeClr val="bg1"/>
-          </a:solidFill>
-          <a:ln w="15875">
-            <a:solidFill>
-              <a:schemeClr val="tx1"/>
-            </a:solidFill>
-            <a:prstDash val="solid"/>
-          </a:ln>
-        </p:spPr>
-      </p:sp>
-      <p:sp>
-        <p:nvSpPr>
-          <p:cNvPr id="18" name="service-texte-208"/>
-          <p:cNvSpPr txBox="1"/>
-          <p:nvPr/>
-        </p:nvSpPr>
-        <p:spPr>
-          <a:xfrm>
-            <a:off x="9656064" y="1463040"/>
-            <a:ext cx="1965960" cy="868680"/>
-          </a:xfrm>
-          <a:prstGeom prst="rect">
-            <a:avLst/>
-          </a:prstGeom>
-          <a:noFill/>
-          <a:ln/>
-        </p:spPr>
-        <p:txBody>
-          <a:bodyPr wrap="square" lIns="508" tIns="508" rIns="508" bIns="508" rtlCol="0" anchor="ctr"/>
-          <a:lstStyle/>
-          <a:p>
-            <a:pPr algn="ctr" indent="0" marL="0">
-              <a:buNone/>
-            </a:pPr>
-            <a:r>
-              <a:rPr lang="en-US" sz="1200" b="1" dirty="0">
-                <a:solidFill>
-                  <a:schemeClr val="tx1"/>
-                </a:solidFill>
-              </a:rPr>
-              <a:t>terraform apply</a:t>
-            </a:r>
-            <a:endParaRPr lang="en-US" sz="1200" dirty="0"/>
-          </a:p>
-          <a:p>
-            <a:pPr algn="ctr" indent="0" marL="0">
-              <a:buNone/>
-            </a:pPr>
-            <a:r>
-              <a:rPr lang="en-US" sz="1000" dirty="0">
-                <a:solidFill>
-                  <a:schemeClr val="tx1"/>
-                </a:solidFill>
-              </a:rPr>
-              <a:t>dev ou prod</a:t>
-            </a:r>
-            <a:endParaRPr lang="en-US" sz="1200" dirty="0"/>
-          </a:p>
-        </p:txBody>
-      </p:sp>
-      <p:sp>
-        <p:nvSpPr>
-          <p:cNvPr id="19" name="carte-209"/>
-          <p:cNvSpPr/>
-          <p:nvPr/>
-        </p:nvSpPr>
-        <p:spPr>
-          <a:xfrm>
-            <a:off x="548640" y="2743200"/>
-            <a:ext cx="5440680" cy="1600200"/>
-          </a:xfrm>
-          <a:prstGeom prst="roundRect">
-            <a:avLst>
-              <a:gd name="adj" fmla="val 6857"/>
-            </a:avLst>
-          </a:prstGeom>
-          <a:solidFill>
-            <a:schemeClr val="bg2"/>
-          </a:solidFill>
-          <a:ln w="12700">
-            <a:solidFill>
-              <a:schemeClr val="bg2"/>
-            </a:solidFill>
-            <a:prstDash val="solid"/>
-          </a:ln>
-        </p:spPr>
-      </p:sp>
-      <p:sp>
-        <p:nvSpPr>
-          <p:cNvPr id="20" name="texte-210"/>
-          <p:cNvSpPr txBox="1"/>
-          <p:nvPr/>
-        </p:nvSpPr>
-        <p:spPr>
-          <a:xfrm>
-            <a:off x="868680" y="2926080"/>
-            <a:ext cx="1371600" cy="548640"/>
-          </a:xfrm>
-          <a:prstGeom prst="rect">
-            <a:avLst/>
-          </a:prstGeom>
-          <a:noFill/>
-          <a:ln/>
-        </p:spPr>
-        <p:txBody>
-          <a:bodyPr wrap="square" lIns="0" tIns="0" rIns="0" bIns="0" rtlCol="0" anchor="t"/>
-          <a:lstStyle/>
-          <a:p>
-            <a:pPr indent="0" marL="0">
-              <a:buNone/>
-            </a:pPr>
-            <a:r>
-              <a:rPr lang="en-US" sz="3000" b="1" dirty="0">
-                <a:solidFill>
-                  <a:schemeClr val="accent1"/>
-                </a:solidFill>
-              </a:rPr>
-              <a:t>dev</a:t>
-            </a:r>
-            <a:endParaRPr lang="en-US" sz="3000" dirty="0"/>
-          </a:p>
-        </p:txBody>
-      </p:sp>
-      <p:sp>
-        <p:nvSpPr>
-          <p:cNvPr id="21" name="texte-211"/>
-          <p:cNvSpPr txBox="1"/>
-          <p:nvPr/>
-        </p:nvSpPr>
-        <p:spPr>
-          <a:xfrm>
-            <a:off x="2286000" y="2971800"/>
-            <a:ext cx="3474720" cy="365760"/>
-          </a:xfrm>
-          <a:prstGeom prst="rect">
-            <a:avLst/>
-          </a:prstGeom>
-          <a:noFill/>
-          <a:ln/>
-        </p:spPr>
-        <p:txBody>
-          <a:bodyPr wrap="square" lIns="0" tIns="0" rIns="0" bIns="0" rtlCol="0" anchor="t"/>
-          <a:lstStyle/>
-          <a:p>
-            <a:pPr indent="0" marL="0">
-              <a:buNone/>
-            </a:pPr>
-            <a:r>
-              <a:rPr lang="en-US" sz="1500" b="1" dirty="0">
-                <a:solidFill>
-                  <a:schemeClr val="tx1"/>
-                </a:solidFill>
-              </a:rPr>
-              <a:t>Branche dev · préfixe shopimt-dev</a:t>
-            </a:r>
-            <a:endParaRPr lang="en-US" sz="1500" dirty="0"/>
-          </a:p>
-        </p:txBody>
-      </p:sp>
-      <p:sp>
-        <p:nvSpPr>
-          <p:cNvPr id="22" name="texte-212"/>
-          <p:cNvSpPr txBox="1"/>
-          <p:nvPr/>
-        </p:nvSpPr>
-        <p:spPr>
-          <a:xfrm>
-            <a:off x="2286000" y="3383280"/>
-            <a:ext cx="3474720" cy="731520"/>
-          </a:xfrm>
-          <a:prstGeom prst="rect">
-            <a:avLst/>
-          </a:prstGeom>
-          <a:noFill/>
-          <a:ln/>
-        </p:spPr>
-        <p:txBody>
-          <a:bodyPr wrap="square" lIns="0" tIns="0" rIns="0" bIns="0" rtlCol="0" anchor="t"/>
-          <a:lstStyle/>
-          <a:p>
-            <a:pPr indent="0" marL="0">
-              <a:buNone/>
-            </a:pPr>
-            <a:r>
-              <a:rPr lang="en-US" sz="1300" dirty="0">
-                <a:solidFill>
-                  <a:schemeClr val="accent6"/>
-                </a:solidFill>
-              </a:rPr>
-              <a:t>Capacité DynamoDB minimale, on y casse tout sans risque</a:t>
-            </a:r>
-            <a:endParaRPr lang="en-US" sz="1300" dirty="0"/>
-          </a:p>
-        </p:txBody>
-      </p:sp>
-      <p:sp>
-        <p:nvSpPr>
-          <p:cNvPr id="23" name="carte-213"/>
-          <p:cNvSpPr/>
-          <p:nvPr/>
-        </p:nvSpPr>
-        <p:spPr>
-          <a:xfrm>
-            <a:off x="6172200" y="2743200"/>
-            <a:ext cx="5440680" cy="1600200"/>
-          </a:xfrm>
-          <a:prstGeom prst="roundRect">
-            <a:avLst>
-              <a:gd name="adj" fmla="val 6857"/>
-            </a:avLst>
-          </a:prstGeom>
-          <a:solidFill>
-            <a:schemeClr val="accent5"/>
-          </a:solidFill>
-          <a:ln w="12700">
-            <a:solidFill>
-              <a:schemeClr val="accent5"/>
-            </a:solidFill>
-            <a:prstDash val="solid"/>
-          </a:ln>
-        </p:spPr>
-      </p:sp>
-      <p:sp>
-        <p:nvSpPr>
-          <p:cNvPr id="24" name="texte-214"/>
-          <p:cNvSpPr txBox="1"/>
-          <p:nvPr/>
-        </p:nvSpPr>
-        <p:spPr>
-          <a:xfrm>
-            <a:off x="6492240" y="2926080"/>
-            <a:ext cx="1371600" cy="548640"/>
-          </a:xfrm>
-          <a:prstGeom prst="rect">
-            <a:avLst/>
-          </a:prstGeom>
-          <a:noFill/>
-          <a:ln/>
-        </p:spPr>
-        <p:txBody>
-          <a:bodyPr wrap="square" lIns="0" tIns="0" rIns="0" bIns="0" rtlCol="0" anchor="t"/>
-          <a:lstStyle/>
-          <a:p>
-            <a:pPr indent="0" marL="0">
-              <a:buNone/>
-            </a:pPr>
-            <a:r>
-              <a:rPr lang="en-US" sz="3000" b="1" dirty="0">
-                <a:solidFill>
-                  <a:schemeClr val="tx1"/>
-                </a:solidFill>
-              </a:rPr>
-              <a:t>prod</a:t>
-            </a:r>
-            <a:endParaRPr lang="en-US" sz="3000" dirty="0"/>
-          </a:p>
-        </p:txBody>
-      </p:sp>
-      <p:sp>
-        <p:nvSpPr>
-          <p:cNvPr id="25" name="texte-215"/>
-          <p:cNvSpPr txBox="1"/>
-          <p:nvPr/>
-        </p:nvSpPr>
-        <p:spPr>
-          <a:xfrm>
-            <a:off x="7909560" y="2971800"/>
-            <a:ext cx="3474720" cy="365760"/>
-          </a:xfrm>
-          <a:prstGeom prst="rect">
-            <a:avLst/>
-          </a:prstGeom>
-          <a:noFill/>
-          <a:ln/>
-        </p:spPr>
-        <p:txBody>
-          <a:bodyPr wrap="square" lIns="0" tIns="0" rIns="0" bIns="0" rtlCol="0" anchor="t"/>
-          <a:lstStyle/>
-          <a:p>
-            <a:pPr indent="0" marL="0">
-              <a:buNone/>
-            </a:pPr>
-            <a:r>
-              <a:rPr lang="en-US" sz="1500" b="1" dirty="0">
-                <a:solidFill>
-                  <a:schemeClr val="tx1"/>
-                </a:solidFill>
-              </a:rPr>
-              <a:t>Branche main · préfixe shopimt-sls</a:t>
-            </a:r>
-            <a:endParaRPr lang="en-US" sz="1500" dirty="0"/>
-          </a:p>
-        </p:txBody>
-      </p:sp>
-      <p:sp>
-        <p:nvSpPr>
-          <p:cNvPr id="26" name="texte-216"/>
-          <p:cNvSpPr txBox="1"/>
-          <p:nvPr/>
-        </p:nvSpPr>
-        <p:spPr>
-          <a:xfrm>
-            <a:off x="7909560" y="3383280"/>
-            <a:ext cx="3474720" cy="731520"/>
-          </a:xfrm>
-          <a:prstGeom prst="rect">
-            <a:avLst/>
-          </a:prstGeom>
-          <a:noFill/>
-          <a:ln/>
-        </p:spPr>
-        <p:txBody>
-          <a:bodyPr wrap="square" lIns="0" tIns="0" rIns="0" bIns="0" rtlCol="0" anchor="t"/>
-          <a:lstStyle/>
-          <a:p>
-            <a:pPr indent="0" marL="0">
-              <a:buNone/>
-            </a:pPr>
-            <a:r>
-              <a:rPr lang="en-US" sz="1300" dirty="0">
-                <a:solidFill>
-                  <a:schemeClr val="accent6"/>
-                </a:solidFill>
-              </a:rPr>
-              <a:t>Même module Terraform, seules quelques valeurs changent</a:t>
-            </a:r>
-            <a:endParaRPr lang="en-US" sz="1300" dirty="0"/>
-          </a:p>
-        </p:txBody>
-      </p:sp>
-      <p:sp>
-        <p:nvSpPr>
-          <p:cNvPr id="27" name="carte-217"/>
-          <p:cNvSpPr/>
-          <p:nvPr/>
-        </p:nvSpPr>
-        <p:spPr>
-          <a:xfrm>
-            <a:off x="548640" y="4572000"/>
-            <a:ext cx="11064240" cy="1508760"/>
-          </a:xfrm>
-          <a:prstGeom prst="roundRect">
-            <a:avLst>
-              <a:gd name="adj" fmla="val 7273"/>
-            </a:avLst>
-          </a:prstGeom>
-          <a:solidFill>
-            <a:schemeClr val="tx1"/>
-          </a:solidFill>
-          <a:ln w="12700">
-            <a:solidFill>
-              <a:schemeClr val="tx1"/>
-            </a:solidFill>
-            <a:prstDash val="solid"/>
-          </a:ln>
-        </p:spPr>
-      </p:sp>
-      <p:sp>
-        <p:nvSpPr>
-          <p:cNvPr id="28" name="texte-218"/>
-          <p:cNvSpPr txBox="1"/>
-          <p:nvPr/>
-        </p:nvSpPr>
-        <p:spPr>
-          <a:xfrm>
-            <a:off x="868680" y="4800600"/>
-            <a:ext cx="10424160" cy="411480"/>
-          </a:xfrm>
-          <a:prstGeom prst="rect">
-            <a:avLst/>
-          </a:prstGeom>
-          <a:noFill/>
-          <a:ln/>
-        </p:spPr>
-        <p:txBody>
-          <a:bodyPr wrap="square" lIns="0" tIns="0" rIns="0" bIns="0" rtlCol="0" anchor="t"/>
-          <a:lstStyle/>
-          <a:p>
-            <a:pPr indent="0" marL="0">
-              <a:buNone/>
-            </a:pPr>
-            <a:r>
-              <a:rPr lang="en-US" sz="1500" b="1" dirty="0">
-                <a:solidFill>
-                  <a:schemeClr val="bg1"/>
-                </a:solidFill>
-              </a:rPr>
-              <a:t>État Terraform dans S3 (versionné, verrouillé) · réglages personnels dans SSM Parameter Store, hors du dépôt</a:t>
-            </a:r>
-            <a:endParaRPr lang="en-US" sz="1500" dirty="0"/>
-          </a:p>
-        </p:txBody>
-      </p:sp>
-      <p:sp>
-        <p:nvSpPr>
-          <p:cNvPr id="29" name="texte-219"/>
-          <p:cNvSpPr txBox="1"/>
-          <p:nvPr/>
-        </p:nvSpPr>
-        <p:spPr>
-          <a:xfrm>
-            <a:off x="868680" y="5303520"/>
-            <a:ext cx="10424160" cy="457200"/>
-          </a:xfrm>
-          <a:prstGeom prst="rect">
-            <a:avLst/>
-          </a:prstGeom>
-          <a:noFill/>
-          <a:ln/>
-        </p:spPr>
-        <p:txBody>
-          <a:bodyPr wrap="square" lIns="0" tIns="0" rIns="0" bIns="0" rtlCol="0" anchor="t"/>
-          <a:lstStyle/>
-          <a:p>
-            <a:pPr indent="0" marL="0">
-              <a:buNone/>
-            </a:pPr>
-            <a:r>
-              <a:rPr lang="en-US" sz="1300" dirty="0">
-                <a:solidFill>
-                  <a:schemeClr val="bg2"/>
-                </a:solidFill>
-              </a:rPr>
-              <a:t>Aucune adresse e-mail, aucun secret, aucun état dans GitHub : le dépôt peut être public.</a:t>
-            </a:r>
-            <a:endParaRPr lang="en-US" sz="1300" dirty="0"/>
-          </a:p>
-        </p:txBody>
-      </p:sp>
-      <p:sp>
-        <p:nvSpPr>
-          <p:cNvPr id="25" name="Slide Number Placeholder 0"/>
-          <p:cNvSpPr>
-            <a:spLocks noGrp="1"/>
-          </p:cNvSpPr>
-          <p:nvPr>
-            <p:ph type="sldNum" sz="quarter" idx="4294967295"/>
-          </p:nvPr>
-        </p:nvSpPr>
-        <p:spPr>
-          <a:xfrm>
-            <a:off x="11155680" y="6400800"/>
-            <a:ext cx="457200" cy="274320"/>
-          </a:xfrm>
-          <a:prstGeom prst="rect">
-            <a:avLst/>
-          </a:prstGeom>
-          <a:extLst>
-            <a:ext uri="{C572A759-6A51-4108-AA02-DFA0A04FC94B}">
-              <ma14:wrappingTextBoxFlag xmlns:ma14="http://schemas.microsoft.com/office/mac/drawingml/2011/main" val="0"/>
-            </a:ext>
-          </a:extLst>
-        </p:spPr>
-        <p:txBody>
-          <a:bodyPr/>
-          <a:lstStyle>
-            <a:lvl1pPr>
-              <a:defRPr sz="1000">
-                <a:solidFill>
-                  <a:schemeClr val="accent6"/>
-                </a:solidFill>
-              </a:defRPr>
-            </a:lvl1pPr>
-          </a:lstStyle>
-          <a:p>
-            <a:pPr algn="r"/>
-            <a:fld id="{F7021451-1387-4CA6-816F-3879F97B5CBC}" type="slidenum">
-              <a:rPr b="0" lang="en-US"/>
-              <a:t>9</a:t>
             </a:fld>
             <a:endParaRPr lang="en-US"/>
           </a:p>

--- a/docs/SHOP-IMT-presentation.pptx
+++ b/docs/SHOP-IMT-presentation.pptx
@@ -664,6 +664,11 @@
           </a:p>
           <a:p>
             <a:r>
+              <a:t>Trusted Advisor surveille aussi le compte gratuitement : dès qu'un contrôle passe à l'orange ou au rouge, EventBridge nous l'envoie par e-mail.</a:t>
+            </a:r>
+          </a:p>
+          <a:p>
+            <a:r>
               <a:t>Transition : « Gabin, et la commande du jury ? »</a:t>
             </a:r>
           </a:p>
@@ -770,7 +775,7 @@
           </a:p>
           <a:p>
             <a:r>
-              <a:t>Services (22) : CloudFront, S3, API Gateway, Lambda, DynamoDB, SNS, SQS, Step Functions, SES, Cognito, Translate, EventBridge Scheduler, CloudWatch, CloudTrail, IAM, SSM, Budgets, et pour la solution EC2 : EC2, Auto Scaling, Elastic Load Balancing, RDS, VPC.</a:t>
+              <a:t>Services (23) : CloudFront, S3, API Gateway, Lambda, DynamoDB, SNS, SQS, Step Functions, SES, Cognito, Translate, EventBridge Scheduler, CloudWatch, CloudTrail, IAM, SSM, Budgets, Trusted Advisor, et pour la solution EC2 : EC2, Auto Scaling, Elastic Load Balancing, RDS, VPC.</a:t>
             </a:r>
           </a:p>
         </p:txBody>
@@ -5014,6 +5019,119 @@
                   </a:tcPr>
                 </a:tc>
               </a:tr>
+              <a:tr h="548640">
+                <a:tc>
+                  <a:txBody>
+                    <a:bodyPr/>
+                    <a:lstStyle/>
+                    <a:p>
+                      <a:pPr indent="0" marL="0">
+                        <a:buNone/>
+                      </a:pPr>
+                      <a:r>
+                        <a:rPr lang="en-US" sz="1300" dirty="0">
+                          <a:solidFill>
+                            <a:schemeClr val="tx1"/>
+                          </a:solidFill>
+                        </a:rPr>
+                        <a:t>Trusted Advisor</a:t>
+                      </a:r>
+                      <a:endParaRPr lang="en-US" sz="1300" dirty="0"/>
+                    </a:p>
+                  </a:txBody>
+                  <a:tcPr marL="109728" marR="109728" marT="0" marB="0" anchor="ctr">
+                    <a:lnL w="0" cap="flat" cmpd="sng" algn="ctr">
+                      <a:noFill/>
+                    </a:lnL>
+                    <a:lnR w="0" cap="flat" cmpd="sng" algn="ctr">
+                      <a:noFill/>
+                    </a:lnR>
+                    <a:lnT w="0" cap="flat" cmpd="sng" algn="ctr">
+                      <a:noFill/>
+                    </a:lnT>
+                    <a:lnB w="0" cap="flat" cmpd="sng" algn="ctr">
+                      <a:noFill/>
+                    </a:lnB>
+                    <a:solidFill>
+                      <a:schemeClr val="bg2"/>
+                    </a:solidFill>
+                  </a:tcPr>
+                </a:tc>
+                <a:tc>
+                  <a:txBody>
+                    <a:bodyPr/>
+                    <a:lstStyle/>
+                    <a:p>
+                      <a:pPr indent="0" marL="0">
+                        <a:buNone/>
+                      </a:pPr>
+                      <a:r>
+                        <a:rPr lang="en-US" sz="1300" dirty="0">
+                          <a:solidFill>
+                            <a:schemeClr val="tx1"/>
+                          </a:solidFill>
+                        </a:rPr>
+                        <a:t>Contrôles de base, alertes EventBridge</a:t>
+                      </a:r>
+                      <a:endParaRPr lang="en-US" sz="1300" dirty="0"/>
+                    </a:p>
+                  </a:txBody>
+                  <a:tcPr marL="109728" marR="109728" marT="0" marB="0" anchor="ctr">
+                    <a:lnL w="0" cap="flat" cmpd="sng" algn="ctr">
+                      <a:noFill/>
+                    </a:lnL>
+                    <a:lnR w="0" cap="flat" cmpd="sng" algn="ctr">
+                      <a:noFill/>
+                    </a:lnR>
+                    <a:lnT w="0" cap="flat" cmpd="sng" algn="ctr">
+                      <a:noFill/>
+                    </a:lnT>
+                    <a:lnB w="0" cap="flat" cmpd="sng" algn="ctr">
+                      <a:noFill/>
+                    </a:lnB>
+                    <a:solidFill>
+                      <a:schemeClr val="bg2"/>
+                    </a:solidFill>
+                  </a:tcPr>
+                </a:tc>
+                <a:tc>
+                  <a:txBody>
+                    <a:bodyPr/>
+                    <a:lstStyle/>
+                    <a:p>
+                      <a:pPr indent="0" marL="0">
+                        <a:buNone/>
+                      </a:pPr>
+                      <a:r>
+                        <a:rPr lang="en-US" sz="1300" dirty="0">
+                          <a:solidFill>
+                            <a:schemeClr val="tx1"/>
+                          </a:solidFill>
+                        </a:rPr>
+                        <a:t>Inclus dans le support Basic</a:t>
+                      </a:r>
+                      <a:endParaRPr lang="en-US" sz="1300" dirty="0"/>
+                    </a:p>
+                  </a:txBody>
+                  <a:tcPr marL="109728" marR="109728" marT="0" marB="0" anchor="ctr">
+                    <a:lnL w="0" cap="flat" cmpd="sng" algn="ctr">
+                      <a:noFill/>
+                    </a:lnL>
+                    <a:lnR w="0" cap="flat" cmpd="sng" algn="ctr">
+                      <a:noFill/>
+                    </a:lnR>
+                    <a:lnT w="0" cap="flat" cmpd="sng" algn="ctr">
+                      <a:noFill/>
+                    </a:lnT>
+                    <a:lnB w="0" cap="flat" cmpd="sng" algn="ctr">
+                      <a:noFill/>
+                    </a:lnB>
+                    <a:solidFill>
+                      <a:schemeClr val="bg2"/>
+                    </a:solidFill>
+                  </a:tcPr>
+                </a:tc>
+              </a:tr>
             </a:tbl>
           </a:graphicData>
         </a:graphic>
@@ -6577,7 +6695,7 @@
                   <a:schemeClr val="accent1"/>
                 </a:solidFill>
               </a:rPr>
-              <a:t>22</a:t>
+              <a:t>23</a:t>
             </a:r>
             <a:endParaRPr lang="en-US" sz="5400" dirty="0"/>
           </a:p>

--- a/docs/SHOP-IMT-presentation.pptx
+++ b/docs/SHOP-IMT-presentation.pptx
@@ -664,11 +664,6 @@
           </a:p>
           <a:p>
             <a:r>
-              <a:t>Trusted Advisor surveille aussi le compte gratuitement : dès qu'un contrôle passe à l'orange ou au rouge, EventBridge nous l'envoie par e-mail.</a:t>
-            </a:r>
-          </a:p>
-          <a:p>
-            <a:r>
               <a:t>Transition : « Gabin, et la commande du jury ? »</a:t>
             </a:r>
           </a:p>
@@ -775,7 +770,7 @@
           </a:p>
           <a:p>
             <a:r>
-              <a:t>Services (23) : CloudFront, S3, API Gateway, Lambda, DynamoDB, SNS, SQS, Step Functions, SES, Cognito, Translate, EventBridge Scheduler, CloudWatch, CloudTrail, IAM, SSM, Budgets, Trusted Advisor, et pour la solution EC2 : EC2, Auto Scaling, Elastic Load Balancing, RDS, VPC.</a:t>
+              <a:t>Services (22) : CloudFront, S3, API Gateway, Lambda, DynamoDB, SNS, SQS, Step Functions, SES, Cognito, Translate, EventBridge Scheduler, CloudWatch, CloudTrail, IAM, SSM, Budgets, et pour la solution EC2 : EC2, Auto Scaling, Elastic Load Balancing, RDS, VPC.</a:t>
             </a:r>
           </a:p>
         </p:txBody>
@@ -5019,119 +5014,6 @@
                   </a:tcPr>
                 </a:tc>
               </a:tr>
-              <a:tr h="548640">
-                <a:tc>
-                  <a:txBody>
-                    <a:bodyPr/>
-                    <a:lstStyle/>
-                    <a:p>
-                      <a:pPr indent="0" marL="0">
-                        <a:buNone/>
-                      </a:pPr>
-                      <a:r>
-                        <a:rPr lang="en-US" sz="1300" dirty="0">
-                          <a:solidFill>
-                            <a:schemeClr val="tx1"/>
-                          </a:solidFill>
-                        </a:rPr>
-                        <a:t>Trusted Advisor</a:t>
-                      </a:r>
-                      <a:endParaRPr lang="en-US" sz="1300" dirty="0"/>
-                    </a:p>
-                  </a:txBody>
-                  <a:tcPr marL="109728" marR="109728" marT="0" marB="0" anchor="ctr">
-                    <a:lnL w="0" cap="flat" cmpd="sng" algn="ctr">
-                      <a:noFill/>
-                    </a:lnL>
-                    <a:lnR w="0" cap="flat" cmpd="sng" algn="ctr">
-                      <a:noFill/>
-                    </a:lnR>
-                    <a:lnT w="0" cap="flat" cmpd="sng" algn="ctr">
-                      <a:noFill/>
-                    </a:lnT>
-                    <a:lnB w="0" cap="flat" cmpd="sng" algn="ctr">
-                      <a:noFill/>
-                    </a:lnB>
-                    <a:solidFill>
-                      <a:schemeClr val="bg2"/>
-                    </a:solidFill>
-                  </a:tcPr>
-                </a:tc>
-                <a:tc>
-                  <a:txBody>
-                    <a:bodyPr/>
-                    <a:lstStyle/>
-                    <a:p>
-                      <a:pPr indent="0" marL="0">
-                        <a:buNone/>
-                      </a:pPr>
-                      <a:r>
-                        <a:rPr lang="en-US" sz="1300" dirty="0">
-                          <a:solidFill>
-                            <a:schemeClr val="tx1"/>
-                          </a:solidFill>
-                        </a:rPr>
-                        <a:t>Contrôles de base, alertes EventBridge</a:t>
-                      </a:r>
-                      <a:endParaRPr lang="en-US" sz="1300" dirty="0"/>
-                    </a:p>
-                  </a:txBody>
-                  <a:tcPr marL="109728" marR="109728" marT="0" marB="0" anchor="ctr">
-                    <a:lnL w="0" cap="flat" cmpd="sng" algn="ctr">
-                      <a:noFill/>
-                    </a:lnL>
-                    <a:lnR w="0" cap="flat" cmpd="sng" algn="ctr">
-                      <a:noFill/>
-                    </a:lnR>
-                    <a:lnT w="0" cap="flat" cmpd="sng" algn="ctr">
-                      <a:noFill/>
-                    </a:lnT>
-                    <a:lnB w="0" cap="flat" cmpd="sng" algn="ctr">
-                      <a:noFill/>
-                    </a:lnB>
-                    <a:solidFill>
-                      <a:schemeClr val="bg2"/>
-                    </a:solidFill>
-                  </a:tcPr>
-                </a:tc>
-                <a:tc>
-                  <a:txBody>
-                    <a:bodyPr/>
-                    <a:lstStyle/>
-                    <a:p>
-                      <a:pPr indent="0" marL="0">
-                        <a:buNone/>
-                      </a:pPr>
-                      <a:r>
-                        <a:rPr lang="en-US" sz="1300" dirty="0">
-                          <a:solidFill>
-                            <a:schemeClr val="tx1"/>
-                          </a:solidFill>
-                        </a:rPr>
-                        <a:t>Inclus dans le support Basic</a:t>
-                      </a:r>
-                      <a:endParaRPr lang="en-US" sz="1300" dirty="0"/>
-                    </a:p>
-                  </a:txBody>
-                  <a:tcPr marL="109728" marR="109728" marT="0" marB="0" anchor="ctr">
-                    <a:lnL w="0" cap="flat" cmpd="sng" algn="ctr">
-                      <a:noFill/>
-                    </a:lnL>
-                    <a:lnR w="0" cap="flat" cmpd="sng" algn="ctr">
-                      <a:noFill/>
-                    </a:lnR>
-                    <a:lnT w="0" cap="flat" cmpd="sng" algn="ctr">
-                      <a:noFill/>
-                    </a:lnT>
-                    <a:lnB w="0" cap="flat" cmpd="sng" algn="ctr">
-                      <a:noFill/>
-                    </a:lnB>
-                    <a:solidFill>
-                      <a:schemeClr val="bg2"/>
-                    </a:solidFill>
-                  </a:tcPr>
-                </a:tc>
-              </a:tr>
             </a:tbl>
           </a:graphicData>
         </a:graphic>
@@ -6695,7 +6577,7 @@
                   <a:schemeClr val="accent1"/>
                 </a:solidFill>
               </a:rPr>
-              <a:t>23</a:t>
+              <a:t>22</a:t>
             </a:r>
             <a:endParaRPr lang="en-US" sz="5400" dirty="0"/>
           </a:p>
